--- a/docs/anvil-roadmap-v1.0-v1.30.pptx
+++ b/docs/anvil-roadmap-v1.0-v1.30.pptx
@@ -20,9 +20,11 @@
     <p:sldId id="268" r:id="rId14"/>
     <p:sldId id="269" r:id="rId15"/>
     <p:sldId id="270" r:id="rId16"/>
+    <p:sldId id="271" r:id="rId17"/>
+    <p:sldId id="272" r:id="rId18"/>
   </p:sldIdLst>
   <p:notesMasterIdLst>
-    <p:notesMasterId r:id="rId17"/>
+    <p:notesMasterId r:id="rId19"/>
   </p:notesMasterIdLst>
   <p:sldSz cx="12192000" cy="6858000"/>
   <p:notesSz cx="6858000" cy="12192000"/>
@@ -1068,6 +1070,182 @@
             <a:fld id="{F7021451-1387-4CA6-816F-3879F97B5CBC}" type="slidenum">
               <a:rPr lang="en-US"/>
               <a:t>15</a:t>
+            </a:fld>
+            <a:endParaRPr lang="en-US"/>
+          </a:p>
+        </p:txBody>
+      </p:sp>
+    </p:spTree>
+    <p:extLst>
+      <p:ext uri="{BB962C8B-B14F-4D97-AF65-F5344CB8AC3E}">
+        <p14:creationId xmlns:p14="http://schemas.microsoft.com/office/powerpoint/2010/main" val="1024086991"/>
+      </p:ext>
+    </p:extLst>
+  </p:cSld>
+  <p:clrMapOvr>
+    <a:masterClrMapping/>
+  </p:clrMapOvr>
+</p:notes>
+</file>
+
+<file path=ppt/notesSlides/notesSlide16.xml><?xml version="1.0" encoding="utf-8"?>
+<p:notes xmlns:a="http://schemas.openxmlformats.org/drawingml/2006/main" xmlns:r="http://schemas.openxmlformats.org/officeDocument/2006/relationships" xmlns:p="http://schemas.openxmlformats.org/presentationml/2006/main">
+  <p:cSld>
+    <p:spTree>
+      <p:nvGrpSpPr>
+        <p:cNvPr id="1" name=""/>
+        <p:cNvGrpSpPr/>
+        <p:nvPr/>
+      </p:nvGrpSpPr>
+      <p:grpSpPr>
+        <a:xfrm>
+          <a:off x="0" y="0"/>
+          <a:ext cx="0" cy="0"/>
+          <a:chOff x="0" y="0"/>
+          <a:chExt cx="0" cy="0"/>
+        </a:xfrm>
+      </p:grpSpPr>
+      <p:sp>
+        <p:nvSpPr>
+          <p:cNvPr id="2" name="Slide Image Placeholder 1"/>
+          <p:cNvSpPr>
+            <a:spLocks noGrp="1" noRot="1" noChangeAspect="1"/>
+          </p:cNvSpPr>
+          <p:nvPr>
+            <p:ph type="sldImg"/>
+          </p:nvPr>
+        </p:nvSpPr>
+        <p:spPr/>
+      </p:sp>
+      <p:sp>
+        <p:nvSpPr>
+          <p:cNvPr id="3" name="Notes Placeholder 2"/>
+          <p:cNvSpPr>
+            <a:spLocks noGrp="1"/>
+          </p:cNvSpPr>
+          <p:nvPr>
+            <p:ph type="body" idx="1"/>
+          </p:nvPr>
+        </p:nvSpPr>
+        <p:spPr/>
+        <p:txBody>
+          <a:bodyPr/>
+          <a:lstStyle/>
+          <a:p>
+            <a:r>
+              <a:rPr lang="en-US" dirty="0"/>
+              <a:t/>
+            </a:r>
+            <a:endParaRPr lang="en-US" dirty="0"/>
+          </a:p>
+        </p:txBody>
+      </p:sp>
+      <p:sp>
+        <p:nvSpPr>
+          <p:cNvPr id="4" name="Slide Number Placeholder 3"/>
+          <p:cNvSpPr>
+            <a:spLocks noGrp="1"/>
+          </p:cNvSpPr>
+          <p:nvPr>
+            <p:ph type="sldNum" sz="quarter" idx="10"/>
+          </p:nvPr>
+        </p:nvSpPr>
+        <p:spPr/>
+        <p:txBody>
+          <a:bodyPr/>
+          <a:lstStyle/>
+          <a:p>
+            <a:fld id="{F7021451-1387-4CA6-816F-3879F97B5CBC}" type="slidenum">
+              <a:rPr lang="en-US"/>
+              <a:t>16</a:t>
+            </a:fld>
+            <a:endParaRPr lang="en-US"/>
+          </a:p>
+        </p:txBody>
+      </p:sp>
+    </p:spTree>
+    <p:extLst>
+      <p:ext uri="{BB962C8B-B14F-4D97-AF65-F5344CB8AC3E}">
+        <p14:creationId xmlns:p14="http://schemas.microsoft.com/office/powerpoint/2010/main" val="1024086991"/>
+      </p:ext>
+    </p:extLst>
+  </p:cSld>
+  <p:clrMapOvr>
+    <a:masterClrMapping/>
+  </p:clrMapOvr>
+</p:notes>
+</file>
+
+<file path=ppt/notesSlides/notesSlide17.xml><?xml version="1.0" encoding="utf-8"?>
+<p:notes xmlns:a="http://schemas.openxmlformats.org/drawingml/2006/main" xmlns:r="http://schemas.openxmlformats.org/officeDocument/2006/relationships" xmlns:p="http://schemas.openxmlformats.org/presentationml/2006/main">
+  <p:cSld>
+    <p:spTree>
+      <p:nvGrpSpPr>
+        <p:cNvPr id="1" name=""/>
+        <p:cNvGrpSpPr/>
+        <p:nvPr/>
+      </p:nvGrpSpPr>
+      <p:grpSpPr>
+        <a:xfrm>
+          <a:off x="0" y="0"/>
+          <a:ext cx="0" cy="0"/>
+          <a:chOff x="0" y="0"/>
+          <a:chExt cx="0" cy="0"/>
+        </a:xfrm>
+      </p:grpSpPr>
+      <p:sp>
+        <p:nvSpPr>
+          <p:cNvPr id="2" name="Slide Image Placeholder 1"/>
+          <p:cNvSpPr>
+            <a:spLocks noGrp="1" noRot="1" noChangeAspect="1"/>
+          </p:cNvSpPr>
+          <p:nvPr>
+            <p:ph type="sldImg"/>
+          </p:nvPr>
+        </p:nvSpPr>
+        <p:spPr/>
+      </p:sp>
+      <p:sp>
+        <p:nvSpPr>
+          <p:cNvPr id="3" name="Notes Placeholder 2"/>
+          <p:cNvSpPr>
+            <a:spLocks noGrp="1"/>
+          </p:cNvSpPr>
+          <p:nvPr>
+            <p:ph type="body" idx="1"/>
+          </p:nvPr>
+        </p:nvSpPr>
+        <p:spPr/>
+        <p:txBody>
+          <a:bodyPr/>
+          <a:lstStyle/>
+          <a:p>
+            <a:r>
+              <a:rPr lang="en-US" dirty="0"/>
+              <a:t/>
+            </a:r>
+            <a:endParaRPr lang="en-US" dirty="0"/>
+          </a:p>
+        </p:txBody>
+      </p:sp>
+      <p:sp>
+        <p:nvSpPr>
+          <p:cNvPr id="4" name="Slide Number Placeholder 3"/>
+          <p:cNvSpPr>
+            <a:spLocks noGrp="1"/>
+          </p:cNvSpPr>
+          <p:nvPr>
+            <p:ph type="sldNum" sz="quarter" idx="10"/>
+          </p:nvPr>
+        </p:nvSpPr>
+        <p:spPr/>
+        <p:txBody>
+          <a:bodyPr/>
+          <a:lstStyle/>
+          <a:p>
+            <a:fld id="{F7021451-1387-4CA6-816F-3879F97B5CBC}" type="slidenum">
+              <a:rPr lang="en-US"/>
+              <a:t>17</a:t>
             </a:fld>
             <a:endParaRPr lang="en-US"/>
           </a:p>
@@ -2259,7 +2437,7 @@
                 <a:ea typeface="Calibri" pitchFamily="34" charset="-122"/>
                 <a:cs typeface="Calibri" pitchFamily="34" charset="-120"/>
               </a:rPr>
-              <a:t>v1.0  →  v1.30.7</a:t>
+              <a:t>v1.0  →  v1.30.8</a:t>
             </a:r>
             <a:endParaRPr lang="en-US" sz="2000" dirty="0"/>
           </a:p>
@@ -2274,7 +2452,7 @@
         <p:spPr>
           <a:xfrm>
             <a:off x="685800" y="2944368"/>
-            <a:ext cx="8412480" cy="411480"/>
+            <a:ext cx="10789920" cy="411480"/>
           </a:xfrm>
           <a:prstGeom prst="rect">
             <a:avLst/>
@@ -2298,7 +2476,7 @@
                 <a:ea typeface="Calibri" pitchFamily="34" charset="-122"/>
                 <a:cs typeface="Calibri" pitchFamily="34" charset="-120"/>
               </a:rPr>
-              <a:t>从常驻角色与任务板，到可治理的频道知识作用域</a:t>
+              <a:t>从常驻角色与任务板，到长程运行时与可治理的知识作用域</a:t>
             </a:r>
             <a:endParaRPr lang="en-US" sz="1600" dirty="0"/>
           </a:p>
@@ -2610,7 +2788,7 @@
                 <a:ea typeface="Cambria" pitchFamily="34" charset="-122"/>
                 <a:cs typeface="Cambria" pitchFamily="34" charset="-120"/>
               </a:rPr>
-              <a:t>549</a:t>
+              <a:t>567</a:t>
             </a:r>
             <a:endParaRPr lang="en-US" sz="2900" dirty="0"/>
           </a:p>
@@ -2727,7 +2905,7 @@
                 <a:ea typeface="Calibri" pitchFamily="34" charset="-122"/>
                 <a:cs typeface="Calibri" pitchFamily="34" charset="-120"/>
               </a:rPr>
-              <a:t>2026-10-26</a:t>
+              <a:t>2026-10-28</a:t>
             </a:r>
             <a:endParaRPr lang="en-US" sz="950" dirty="0"/>
           </a:p>
@@ -3983,7 +4161,7 @@
                 <a:ea typeface="Calibri" pitchFamily="34" charset="-122"/>
                 <a:cs typeface="Calibri" pitchFamily="34" charset="-120"/>
               </a:rPr>
-              <a:t>Anvil roadmap · v1.0 → v1.30.7</a:t>
+              <a:t>Anvil roadmap · v1.0 → v1.30.8</a:t>
             </a:r>
             <a:endParaRPr lang="en-US" sz="850" dirty="0"/>
           </a:p>
@@ -5719,7 +5897,7 @@
                 <a:ea typeface="Calibri" pitchFamily="34" charset="-122"/>
                 <a:cs typeface="Calibri" pitchFamily="34" charset="-120"/>
               </a:rPr>
-              <a:t>Anvil roadmap · v1.0 → v1.30.7</a:t>
+              <a:t>Anvil roadmap · v1.0 → v1.30.8</a:t>
             </a:r>
             <a:endParaRPr lang="en-US" sz="850" dirty="0"/>
           </a:p>
@@ -7068,7 +7246,7 @@
                 <a:ea typeface="Calibri" pitchFamily="34" charset="-122"/>
                 <a:cs typeface="Calibri" pitchFamily="34" charset="-120"/>
               </a:rPr>
-              <a:t>Anvil roadmap · v1.0 → v1.30.7</a:t>
+              <a:t>Anvil roadmap · v1.0 → v1.30.8</a:t>
             </a:r>
             <a:endParaRPr lang="en-US" sz="850" dirty="0"/>
           </a:p>
@@ -8672,7 +8850,7 @@
                 <a:ea typeface="Calibri" pitchFamily="34" charset="-122"/>
                 <a:cs typeface="Calibri" pitchFamily="34" charset="-120"/>
               </a:rPr>
-              <a:t>Anvil roadmap · v1.0 → v1.30.7</a:t>
+              <a:t>Anvil roadmap · v1.0 → v1.30.8</a:t>
             </a:r>
             <a:endParaRPr lang="en-US" sz="850" dirty="0"/>
           </a:p>
@@ -8782,7 +8960,7 @@
                 <a:ea typeface="Calibri" pitchFamily="34" charset="-122"/>
                 <a:cs typeface="Calibri" pitchFamily="34" charset="-120"/>
               </a:rPr>
-              <a:t>PEER COMPARISON</a:t>
+              <a:t>RUNTIME · CONTEXT ISOLATION</a:t>
             </a:r>
             <a:endParaRPr lang="en-US" sz="950" dirty="0"/>
           </a:p>
@@ -8821,7 +8999,7 @@
                 <a:ea typeface="Cambria" pitchFamily="34" charset="-122"/>
                 <a:cs typeface="Cambria" pitchFamily="34" charset="-120"/>
               </a:rPr>
-              <a:t>整体架构对比：Anvil 选的是“任务级 + 可审计”路线</a:t>
+              <a:t>长程角色：进程不是上下文，任务槽才是</a:t>
             </a:r>
             <a:endParaRPr lang="en-US" sz="2700" dirty="0"/>
           </a:p>
@@ -8860,7 +9038,7 @@
                 <a:ea typeface="Calibri" pitchFamily="34" charset="-122"/>
                 <a:cs typeface="Calibri" pitchFamily="34" charset="-120"/>
               </a:rPr>
-              <a:t>不是比谁更像聊天软件，而是比谁能把执行与知识治理闭环。</a:t>
+              <a:t>一个角色一个进程、一个 turn；上下文按 (角色, 任务) 分槽，切换只发生在 turn 边界。</a:t>
             </a:r>
             <a:endParaRPr lang="en-US" sz="1250" dirty="0"/>
           </a:p>
@@ -8868,17 +9046,221 @@
       </p:sp>
       <p:sp>
         <p:nvSpPr>
-          <p:cNvPr id="5" name="Text 3"/>
-          <p:cNvSpPr/>
-          <p:nvPr/>
-        </p:nvSpPr>
-        <p:spPr>
-          <a:xfrm>
-            <a:off x="548640" y="1783080"/>
-            <a:ext cx="1325880" cy="347472"/>
-          </a:xfrm>
-          <a:prstGeom prst="rect">
-            <a:avLst/>
+          <p:cNvPr id="5" name="Shape 3"/>
+          <p:cNvSpPr/>
+          <p:nvPr/>
+        </p:nvSpPr>
+        <p:spPr>
+          <a:xfrm>
+            <a:off x="548640" y="1691640"/>
+            <a:ext cx="3794760" cy="2423160"/>
+          </a:xfrm>
+          <a:prstGeom prst="roundRect">
+            <a:avLst>
+              <a:gd name="adj" fmla="val 3019"/>
+            </a:avLst>
+          </a:prstGeom>
+          <a:solidFill>
+            <a:srgbClr val="E6F6F9"/>
+          </a:solidFill>
+          <a:ln w="12700">
+            <a:solidFill>
+              <a:srgbClr val="B7DCE5"/>
+            </a:solidFill>
+            <a:prstDash val="solid"/>
+          </a:ln>
+          <a:effectLst>
+            <a:outerShdw sx="100000" sy="100000" kx="0" ky="0" algn="bl" rotWithShape="0" blurRad="50800" dist="12700" dir="5400000">
+              <a:srgbClr val="000000">
+                <a:alpha val="7000"/>
+              </a:srgbClr>
+            </a:outerShdw>
+          </a:effectLst>
+        </p:spPr>
+      </p:sp>
+      <p:sp>
+        <p:nvSpPr>
+          <p:cNvPr id="6" name="Text 4"/>
+          <p:cNvSpPr/>
+          <p:nvPr/>
+        </p:nvSpPr>
+        <p:spPr>
+          <a:xfrm>
+            <a:off x="731520" y="1810512"/>
+            <a:ext cx="3474720" cy="274320"/>
+          </a:xfrm>
+          <a:prstGeom prst="rect">
+            <a:avLst/>
+          </a:prstGeom>
+          <a:noFill/>
+          <a:ln/>
+        </p:spPr>
+        <p:txBody>
+          <a:bodyPr wrap="square" lIns="0" tIns="0" rIns="0" bIns="0" rtlCol="0" anchor="ctr"/>
+          <a:lstStyle/>
+          <a:p>
+            <a:pPr indent="0" marL="0">
+              <a:buNone/>
+            </a:pPr>
+            <a:r>
+              <a:rPr lang="en-US" sz="1250" b="1" dirty="0">
+                <a:solidFill>
+                  <a:srgbClr val="14131A"/>
+                </a:solidFill>
+                <a:latin typeface="Calibri" pitchFamily="34" charset="0"/>
+                <a:ea typeface="Calibri" pitchFamily="34" charset="-122"/>
+                <a:cs typeface="Calibri" pitchFamily="34" charset="-120"/>
+              </a:rPr>
+              <a:t>角色进程（每角色 1 个）</a:t>
+            </a:r>
+            <a:endParaRPr lang="en-US" sz="1250" dirty="0"/>
+          </a:p>
+        </p:txBody>
+      </p:sp>
+      <p:sp>
+        <p:nvSpPr>
+          <p:cNvPr id="7" name="Text 5"/>
+          <p:cNvSpPr/>
+          <p:nvPr/>
+        </p:nvSpPr>
+        <p:spPr>
+          <a:xfrm>
+            <a:off x="731520" y="2148840"/>
+            <a:ext cx="3429000" cy="1005840"/>
+          </a:xfrm>
+          <a:prstGeom prst="rect">
+            <a:avLst/>
+          </a:prstGeom>
+          <a:noFill/>
+          <a:ln/>
+        </p:spPr>
+        <p:txBody>
+          <a:bodyPr wrap="square" lIns="0" tIns="0" rIns="0" bIns="0" rtlCol="0" anchor="ctr"/>
+          <a:lstStyle/>
+          <a:p>
+            <a:pPr indent="0" marL="0">
+              <a:buNone/>
+            </a:pPr>
+            <a:r>
+              <a:rPr lang="en-US" sz="960" dirty="0">
+                <a:solidFill>
+                  <a:srgbClr val="14131A"/>
+                </a:solidFill>
+                <a:latin typeface="Calibri" pitchFamily="34" charset="0"/>
+                <a:ea typeface="Calibri" pitchFamily="34" charset="-122"/>
+                <a:cs typeface="Calibri" pitchFamily="34" charset="-120"/>
+              </a:rPr>
+              <a:t>• 同一时刻只跑一个 turn，不抢占</a:t>
+            </a:r>
+            <a:endParaRPr lang="en-US" sz="960" dirty="0"/>
+          </a:p>
+          <a:p>
+            <a:pPr indent="0" marL="0">
+              <a:buNone/>
+            </a:pPr>
+            <a:r>
+              <a:rPr lang="en-US" sz="960" dirty="0">
+                <a:solidFill>
+                  <a:srgbClr val="14131A"/>
+                </a:solidFill>
+                <a:latin typeface="Calibri" pitchFamily="34" charset="0"/>
+                <a:ea typeface="Calibri" pitchFamily="34" charset="-122"/>
+                <a:cs typeface="Calibri" pitchFamily="34" charset="-120"/>
+              </a:rPr>
+              <a:t>• busy 绑定 current_task_id</a:t>
+            </a:r>
+            <a:endParaRPr lang="en-US" sz="960" dirty="0"/>
+          </a:p>
+          <a:p>
+            <a:pPr indent="0" marL="0">
+              <a:buNone/>
+            </a:pPr>
+            <a:r>
+              <a:rPr lang="en-US" sz="960" dirty="0">
+                <a:solidFill>
+                  <a:srgbClr val="14131A"/>
+                </a:solidFill>
+                <a:latin typeface="Calibri" pitchFamily="34" charset="0"/>
+                <a:ea typeface="Calibri" pitchFamily="34" charset="-122"/>
+                <a:cs typeface="Calibri" pitchFamily="34" charset="-120"/>
+              </a:rPr>
+              <a:t>• 队列 FIFO：消息携带 task / run / spawn spec</a:t>
+            </a:r>
+            <a:endParaRPr lang="en-US" sz="960" dirty="0"/>
+          </a:p>
+          <a:p>
+            <a:pPr indent="0" marL="0">
+              <a:buNone/>
+            </a:pPr>
+            <a:r>
+              <a:rPr lang="en-US" sz="960" dirty="0">
+                <a:solidFill>
+                  <a:srgbClr val="14131A"/>
+                </a:solidFill>
+                <a:latin typeface="Calibri" pitchFamily="34" charset="0"/>
+                <a:ea typeface="Calibri" pitchFamily="34" charset="-122"/>
+                <a:cs typeface="Calibri" pitchFamily="34" charset="-120"/>
+              </a:rPr>
+              <a:t>• 角色忙 A 时，B 的 @ 与步骤排队</a:t>
+            </a:r>
+            <a:endParaRPr lang="en-US" sz="960" dirty="0"/>
+          </a:p>
+        </p:txBody>
+      </p:sp>
+      <p:sp>
+        <p:nvSpPr>
+          <p:cNvPr id="8" name="Text 6"/>
+          <p:cNvSpPr/>
+          <p:nvPr/>
+        </p:nvSpPr>
+        <p:spPr>
+          <a:xfrm>
+            <a:off x="731520" y="3200400"/>
+            <a:ext cx="914400" cy="182880"/>
+          </a:xfrm>
+          <a:prstGeom prst="rect">
+            <a:avLst/>
+          </a:prstGeom>
+          <a:noFill/>
+          <a:ln/>
+        </p:spPr>
+        <p:txBody>
+          <a:bodyPr wrap="square" lIns="0" tIns="0" rIns="0" bIns="0" rtlCol="0" anchor="ctr"/>
+          <a:lstStyle/>
+          <a:p>
+            <a:pPr indent="0" marL="0">
+              <a:buNone/>
+            </a:pPr>
+            <a:r>
+              <a:rPr lang="en-US" sz="850" b="1" dirty="0">
+                <a:solidFill>
+                  <a:srgbClr val="0E7490"/>
+                </a:solidFill>
+                <a:latin typeface="Calibri" pitchFamily="34" charset="0"/>
+                <a:ea typeface="Calibri" pitchFamily="34" charset="-122"/>
+                <a:cs typeface="Calibri" pitchFamily="34" charset="-120"/>
+              </a:rPr>
+              <a:t>队列</a:t>
+            </a:r>
+            <a:endParaRPr lang="en-US" sz="850" dirty="0"/>
+          </a:p>
+        </p:txBody>
+      </p:sp>
+      <p:sp>
+        <p:nvSpPr>
+          <p:cNvPr id="9" name="Shape 7"/>
+          <p:cNvSpPr/>
+          <p:nvPr/>
+        </p:nvSpPr>
+        <p:spPr>
+          <a:xfrm>
+            <a:off x="731520" y="3429000"/>
+            <a:ext cx="1051560" cy="310896"/>
+          </a:xfrm>
+          <a:prstGeom prst="roundRect">
+            <a:avLst>
+              <a:gd name="adj" fmla="val 23529"/>
+            </a:avLst>
           </a:prstGeom>
           <a:solidFill>
             <a:srgbClr val="FFFAF1"/>
@@ -8887,17 +9269,43 @@
             <a:solidFill>
               <a:srgbClr val="D8CBB8"/>
             </a:solidFill>
+            <a:prstDash val="solid"/>
           </a:ln>
-        </p:spPr>
-        <p:txBody>
-          <a:bodyPr wrap="square" lIns="381" tIns="381" rIns="381" bIns="381" rtlCol="0" anchor="ctr"/>
-          <a:lstStyle/>
-          <a:p>
-            <a:pPr indent="0" marL="0">
-              <a:buNone/>
-            </a:pPr>
-            <a:r>
-              <a:rPr lang="en-US" sz="920" b="1" dirty="0">
+          <a:effectLst>
+            <a:outerShdw sx="100000" sy="100000" kx="0" ky="0" algn="bl" rotWithShape="0" blurRad="50800" dist="12700" dir="5400000">
+              <a:srgbClr val="000000">
+                <a:alpha val="7000"/>
+              </a:srgbClr>
+            </a:outerShdw>
+          </a:effectLst>
+        </p:spPr>
+      </p:sp>
+      <p:sp>
+        <p:nvSpPr>
+          <p:cNvPr id="10" name="Text 8"/>
+          <p:cNvSpPr/>
+          <p:nvPr/>
+        </p:nvSpPr>
+        <p:spPr>
+          <a:xfrm>
+            <a:off x="731520" y="3474720"/>
+            <a:ext cx="1051560" cy="201168"/>
+          </a:xfrm>
+          <a:prstGeom prst="rect">
+            <a:avLst/>
+          </a:prstGeom>
+          <a:noFill/>
+          <a:ln/>
+        </p:spPr>
+        <p:txBody>
+          <a:bodyPr wrap="square" lIns="0" tIns="0" rIns="0" bIns="0" rtlCol="0" anchor="ctr"/>
+          <a:lstStyle/>
+          <a:p>
+            <a:pPr algn="ctr" indent="0" marL="0">
+              <a:buNone/>
+            </a:pPr>
+            <a:r>
+              <a:rPr lang="en-US" sz="800" dirty="0">
                 <a:solidFill>
                   <a:srgbClr val="6B6375"/>
                 </a:solidFill>
@@ -8905,70 +9313,27 @@
                 <a:ea typeface="Calibri" pitchFamily="34" charset="-122"/>
                 <a:cs typeface="Calibri" pitchFamily="34" charset="-120"/>
               </a:rPr>
-              <a:t>维度</a:t>
-            </a:r>
-            <a:endParaRPr lang="en-US" sz="920" dirty="0"/>
-          </a:p>
-        </p:txBody>
-      </p:sp>
-      <p:sp>
-        <p:nvSpPr>
-          <p:cNvPr id="6" name="Text 4"/>
-          <p:cNvSpPr/>
-          <p:nvPr/>
-        </p:nvSpPr>
-        <p:spPr>
-          <a:xfrm>
-            <a:off x="1874520" y="1783080"/>
-            <a:ext cx="2423160" cy="347472"/>
-          </a:xfrm>
-          <a:prstGeom prst="rect">
-            <a:avLst/>
-          </a:prstGeom>
-          <a:solidFill>
-            <a:srgbClr val="FACC15"/>
-          </a:solidFill>
-          <a:ln w="12700">
-            <a:solidFill>
-              <a:srgbClr val="D8CBB8"/>
-            </a:solidFill>
-          </a:ln>
-        </p:spPr>
-        <p:txBody>
-          <a:bodyPr wrap="square" lIns="381" tIns="381" rIns="381" bIns="381" rtlCol="0" anchor="ctr"/>
-          <a:lstStyle/>
-          <a:p>
-            <a:pPr indent="0" marL="0">
-              <a:buNone/>
-            </a:pPr>
-            <a:r>
-              <a:rPr lang="en-US" sz="920" b="1" dirty="0">
-                <a:solidFill>
-                  <a:srgbClr val="14131A"/>
-                </a:solidFill>
-                <a:latin typeface="Calibri" pitchFamily="34" charset="0"/>
-                <a:ea typeface="Calibri" pitchFamily="34" charset="-122"/>
-                <a:cs typeface="Calibri" pitchFamily="34" charset="-120"/>
-              </a:rPr>
-              <a:t>Anvil</a:t>
-            </a:r>
-            <a:endParaRPr lang="en-US" sz="920" dirty="0"/>
-          </a:p>
-        </p:txBody>
-      </p:sp>
-      <p:sp>
-        <p:nvSpPr>
-          <p:cNvPr id="7" name="Text 5"/>
-          <p:cNvSpPr/>
-          <p:nvPr/>
-        </p:nvSpPr>
-        <p:spPr>
-          <a:xfrm>
-            <a:off x="4297680" y="1783080"/>
-            <a:ext cx="2103120" cy="347472"/>
-          </a:xfrm>
-          <a:prstGeom prst="rect">
-            <a:avLst/>
+              <a:t>task A · run</a:t>
+            </a:r>
+            <a:endParaRPr lang="en-US" sz="800" dirty="0"/>
+          </a:p>
+        </p:txBody>
+      </p:sp>
+      <p:sp>
+        <p:nvSpPr>
+          <p:cNvPr id="11" name="Shape 9"/>
+          <p:cNvSpPr/>
+          <p:nvPr/>
+        </p:nvSpPr>
+        <p:spPr>
+          <a:xfrm>
+            <a:off x="1874520" y="3429000"/>
+            <a:ext cx="1051560" cy="310896"/>
+          </a:xfrm>
+          <a:prstGeom prst="roundRect">
+            <a:avLst>
+              <a:gd name="adj" fmla="val 23529"/>
+            </a:avLst>
           </a:prstGeom>
           <a:solidFill>
             <a:srgbClr val="FFFAF1"/>
@@ -8977,17 +9342,43 @@
             <a:solidFill>
               <a:srgbClr val="D8CBB8"/>
             </a:solidFill>
+            <a:prstDash val="solid"/>
           </a:ln>
-        </p:spPr>
-        <p:txBody>
-          <a:bodyPr wrap="square" lIns="381" tIns="381" rIns="381" bIns="381" rtlCol="0" anchor="ctr"/>
-          <a:lstStyle/>
-          <a:p>
-            <a:pPr indent="0" marL="0">
-              <a:buNone/>
-            </a:pPr>
-            <a:r>
-              <a:rPr lang="en-US" sz="920" b="1" dirty="0">
+          <a:effectLst>
+            <a:outerShdw sx="100000" sy="100000" kx="0" ky="0" algn="bl" rotWithShape="0" blurRad="50800" dist="12700" dir="5400000">
+              <a:srgbClr val="000000">
+                <a:alpha val="7000"/>
+              </a:srgbClr>
+            </a:outerShdw>
+          </a:effectLst>
+        </p:spPr>
+      </p:sp>
+      <p:sp>
+        <p:nvSpPr>
+          <p:cNvPr id="12" name="Text 10"/>
+          <p:cNvSpPr/>
+          <p:nvPr/>
+        </p:nvSpPr>
+        <p:spPr>
+          <a:xfrm>
+            <a:off x="1874520" y="3474720"/>
+            <a:ext cx="1051560" cy="201168"/>
+          </a:xfrm>
+          <a:prstGeom prst="rect">
+            <a:avLst/>
+          </a:prstGeom>
+          <a:noFill/>
+          <a:ln/>
+        </p:spPr>
+        <p:txBody>
+          <a:bodyPr wrap="square" lIns="0" tIns="0" rIns="0" bIns="0" rtlCol="0" anchor="ctr"/>
+          <a:lstStyle/>
+          <a:p>
+            <a:pPr algn="ctr" indent="0" marL="0">
+              <a:buNone/>
+            </a:pPr>
+            <a:r>
+              <a:rPr lang="en-US" sz="800" dirty="0">
                 <a:solidFill>
                   <a:srgbClr val="6B6375"/>
                 </a:solidFill>
@@ -8995,25 +9386,27 @@
                 <a:ea typeface="Calibri" pitchFamily="34" charset="-122"/>
                 <a:cs typeface="Calibri" pitchFamily="34" charset="-120"/>
               </a:rPr>
-              <a:t>Raft / Poco</a:t>
-            </a:r>
-            <a:endParaRPr lang="en-US" sz="920" dirty="0"/>
-          </a:p>
-        </p:txBody>
-      </p:sp>
-      <p:sp>
-        <p:nvSpPr>
-          <p:cNvPr id="8" name="Text 6"/>
-          <p:cNvSpPr/>
-          <p:nvPr/>
-        </p:nvSpPr>
-        <p:spPr>
-          <a:xfrm>
-            <a:off x="6400800" y="1783080"/>
-            <a:ext cx="1874520" cy="347472"/>
-          </a:xfrm>
-          <a:prstGeom prst="rect">
-            <a:avLst/>
+              <a:t>task B · @</a:t>
+            </a:r>
+            <a:endParaRPr lang="en-US" sz="800" dirty="0"/>
+          </a:p>
+        </p:txBody>
+      </p:sp>
+      <p:sp>
+        <p:nvSpPr>
+          <p:cNvPr id="13" name="Shape 11"/>
+          <p:cNvSpPr/>
+          <p:nvPr/>
+        </p:nvSpPr>
+        <p:spPr>
+          <a:xfrm>
+            <a:off x="3017520" y="3429000"/>
+            <a:ext cx="1051560" cy="310896"/>
+          </a:xfrm>
+          <a:prstGeom prst="roundRect">
+            <a:avLst>
+              <a:gd name="adj" fmla="val 23529"/>
+            </a:avLst>
           </a:prstGeom>
           <a:solidFill>
             <a:srgbClr val="FFFAF1"/>
@@ -9022,17 +9415,43 @@
             <a:solidFill>
               <a:srgbClr val="D8CBB8"/>
             </a:solidFill>
+            <a:prstDash val="solid"/>
           </a:ln>
-        </p:spPr>
-        <p:txBody>
-          <a:bodyPr wrap="square" lIns="381" tIns="381" rIns="381" bIns="381" rtlCol="0" anchor="ctr"/>
-          <a:lstStyle/>
-          <a:p>
-            <a:pPr indent="0" marL="0">
-              <a:buNone/>
-            </a:pPr>
-            <a:r>
-              <a:rPr lang="en-US" sz="920" b="1" dirty="0">
+          <a:effectLst>
+            <a:outerShdw sx="100000" sy="100000" kx="0" ky="0" algn="bl" rotWithShape="0" blurRad="50800" dist="12700" dir="5400000">
+              <a:srgbClr val="000000">
+                <a:alpha val="7000"/>
+              </a:srgbClr>
+            </a:outerShdw>
+          </a:effectLst>
+        </p:spPr>
+      </p:sp>
+      <p:sp>
+        <p:nvSpPr>
+          <p:cNvPr id="14" name="Text 12"/>
+          <p:cNvSpPr/>
+          <p:nvPr/>
+        </p:nvSpPr>
+        <p:spPr>
+          <a:xfrm>
+            <a:off x="3017520" y="3474720"/>
+            <a:ext cx="1051560" cy="201168"/>
+          </a:xfrm>
+          <a:prstGeom prst="rect">
+            <a:avLst/>
+          </a:prstGeom>
+          <a:noFill/>
+          <a:ln/>
+        </p:spPr>
+        <p:txBody>
+          <a:bodyPr wrap="square" lIns="0" tIns="0" rIns="0" bIns="0" rtlCol="0" anchor="ctr"/>
+          <a:lstStyle/>
+          <a:p>
+            <a:pPr algn="ctr" indent="0" marL="0">
+              <a:buNone/>
+            </a:pPr>
+            <a:r>
+              <a:rPr lang="en-US" sz="800" dirty="0">
                 <a:solidFill>
                   <a:srgbClr val="6B6375"/>
                 </a:solidFill>
@@ -9040,25 +9459,27 @@
                 <a:ea typeface="Calibri" pitchFamily="34" charset="-122"/>
                 <a:cs typeface="Calibri" pitchFamily="34" charset="-120"/>
               </a:rPr>
-              <a:t>AutoGen</a:t>
-            </a:r>
-            <a:endParaRPr lang="en-US" sz="920" dirty="0"/>
-          </a:p>
-        </p:txBody>
-      </p:sp>
-      <p:sp>
-        <p:nvSpPr>
-          <p:cNvPr id="9" name="Text 7"/>
-          <p:cNvSpPr/>
-          <p:nvPr/>
-        </p:nvSpPr>
-        <p:spPr>
-          <a:xfrm>
-            <a:off x="8275320" y="1783080"/>
-            <a:ext cx="1920240" cy="347472"/>
-          </a:xfrm>
-          <a:prstGeom prst="rect">
-            <a:avLst/>
+              <a:t>__global__</a:t>
+            </a:r>
+            <a:endParaRPr lang="en-US" sz="800" dirty="0"/>
+          </a:p>
+        </p:txBody>
+      </p:sp>
+      <p:sp>
+        <p:nvSpPr>
+          <p:cNvPr id="15" name="Shape 13"/>
+          <p:cNvSpPr/>
+          <p:nvPr/>
+        </p:nvSpPr>
+        <p:spPr>
+          <a:xfrm>
+            <a:off x="4709160" y="1691640"/>
+            <a:ext cx="3200400" cy="2423160"/>
+          </a:xfrm>
+          <a:prstGeom prst="roundRect">
+            <a:avLst>
+              <a:gd name="adj" fmla="val 3019"/>
+            </a:avLst>
           </a:prstGeom>
           <a:solidFill>
             <a:srgbClr val="FFFAF1"/>
@@ -9067,17 +9488,189 @@
             <a:solidFill>
               <a:srgbClr val="D8CBB8"/>
             </a:solidFill>
+            <a:prstDash val="solid"/>
           </a:ln>
-        </p:spPr>
-        <p:txBody>
-          <a:bodyPr wrap="square" lIns="381" tIns="381" rIns="381" bIns="381" rtlCol="0" anchor="ctr"/>
-          <a:lstStyle/>
-          <a:p>
-            <a:pPr indent="0" marL="0">
-              <a:buNone/>
-            </a:pPr>
-            <a:r>
-              <a:rPr lang="en-US" sz="920" b="1" dirty="0">
+          <a:effectLst>
+            <a:outerShdw sx="100000" sy="100000" kx="0" ky="0" algn="bl" rotWithShape="0" blurRad="50800" dist="12700" dir="5400000">
+              <a:srgbClr val="000000">
+                <a:alpha val="7000"/>
+              </a:srgbClr>
+            </a:outerShdw>
+          </a:effectLst>
+        </p:spPr>
+      </p:sp>
+      <p:sp>
+        <p:nvSpPr>
+          <p:cNvPr id="16" name="Text 14"/>
+          <p:cNvSpPr/>
+          <p:nvPr/>
+        </p:nvSpPr>
+        <p:spPr>
+          <a:xfrm>
+            <a:off x="4873752" y="1810512"/>
+            <a:ext cx="2834640" cy="274320"/>
+          </a:xfrm>
+          <a:prstGeom prst="rect">
+            <a:avLst/>
+          </a:prstGeom>
+          <a:noFill/>
+          <a:ln/>
+        </p:spPr>
+        <p:txBody>
+          <a:bodyPr wrap="square" lIns="0" tIns="0" rIns="0" bIns="0" rtlCol="0" anchor="ctr"/>
+          <a:lstStyle/>
+          <a:p>
+            <a:pPr indent="0" marL="0">
+              <a:buNone/>
+            </a:pPr>
+            <a:r>
+              <a:rPr lang="en-US" sz="1250" b="1" dirty="0">
+                <a:solidFill>
+                  <a:srgbClr val="14131A"/>
+                </a:solidFill>
+                <a:latin typeface="Calibri" pitchFamily="34" charset="0"/>
+                <a:ea typeface="Calibri" pitchFamily="34" charset="-122"/>
+                <a:cs typeface="Calibri" pitchFamily="34" charset="-120"/>
+              </a:rPr>
+              <a:t>一次唤醒怎么走</a:t>
+            </a:r>
+            <a:endParaRPr lang="en-US" sz="1250" dirty="0"/>
+          </a:p>
+        </p:txBody>
+      </p:sp>
+      <p:sp>
+        <p:nvSpPr>
+          <p:cNvPr id="17" name="Text 15"/>
+          <p:cNvSpPr/>
+          <p:nvPr/>
+        </p:nvSpPr>
+        <p:spPr>
+          <a:xfrm>
+            <a:off x="4873752" y="2194560"/>
+            <a:ext cx="2852928" cy="1600200"/>
+          </a:xfrm>
+          <a:prstGeom prst="rect">
+            <a:avLst/>
+          </a:prstGeom>
+          <a:noFill/>
+          <a:ln/>
+        </p:spPr>
+        <p:txBody>
+          <a:bodyPr wrap="square" lIns="0" tIns="0" rIns="0" bIns="0" rtlCol="0" anchor="ctr"/>
+          <a:lstStyle/>
+          <a:p>
+            <a:pPr indent="0" marL="0">
+              <a:buNone/>
+            </a:pPr>
+            <a:r>
+              <a:rPr lang="en-US" sz="940" dirty="0">
+                <a:solidFill>
+                  <a:srgbClr val="14131A"/>
+                </a:solidFill>
+                <a:latin typeface="Calibri" pitchFamily="34" charset="0"/>
+                <a:ea typeface="Calibri" pitchFamily="34" charset="-122"/>
+                <a:cs typeface="Calibri" pitchFamily="34" charset="-120"/>
+              </a:rPr>
+              <a:t>1  消息到达 → 取 task_key</a:t>
+            </a:r>
+            <a:endParaRPr lang="en-US" sz="940" dirty="0"/>
+          </a:p>
+          <a:p>
+            <a:pPr indent="0" marL="0">
+              <a:buNone/>
+            </a:pPr>
+            <a:r>
+              <a:rPr lang="en-US" sz="940" dirty="0">
+                <a:solidFill>
+                  <a:srgbClr val="14131A"/>
+                </a:solidFill>
+                <a:latin typeface="Calibri" pitchFamily="34" charset="0"/>
+                <a:ea typeface="Calibri" pitchFamily="34" charset="-122"/>
+                <a:cs typeface="Calibri" pitchFamily="34" charset="-120"/>
+              </a:rPr>
+              <a:t>2  同 task：复用进程，直接写 stdin</a:t>
+            </a:r>
+            <a:endParaRPr lang="en-US" sz="940" dirty="0"/>
+          </a:p>
+          <a:p>
+            <a:pPr indent="0" marL="0">
+              <a:buNone/>
+            </a:pPr>
+            <a:r>
+              <a:rPr lang="en-US" sz="940" dirty="0">
+                <a:solidFill>
+                  <a:srgbClr val="14131A"/>
+                </a:solidFill>
+                <a:latin typeface="Calibri" pitchFamily="34" charset="0"/>
+                <a:ea typeface="Calibri" pitchFamily="34" charset="-122"/>
+                <a:cs typeface="Calibri" pitchFamily="34" charset="-120"/>
+              </a:rPr>
+              <a:t>3  换 task：保存当前槽 → 优雅退出进程</a:t>
+            </a:r>
+            <a:endParaRPr lang="en-US" sz="940" dirty="0"/>
+          </a:p>
+          <a:p>
+            <a:pPr indent="0" marL="0">
+              <a:buNone/>
+            </a:pPr>
+            <a:r>
+              <a:rPr lang="en-US" sz="940" dirty="0">
+                <a:solidFill>
+                  <a:srgbClr val="14131A"/>
+                </a:solidFill>
+                <a:latin typeface="Calibri" pitchFamily="34" charset="0"/>
+                <a:ea typeface="Calibri" pitchFamily="34" charset="-122"/>
+                <a:cs typeface="Calibri" pitchFamily="34" charset="-120"/>
+              </a:rPr>
+              <a:t>4  读目标槽：session + cwd 匹配 → resume</a:t>
+            </a:r>
+            <a:endParaRPr lang="en-US" sz="940" dirty="0"/>
+          </a:p>
+          <a:p>
+            <a:pPr indent="0" marL="0">
+              <a:buNone/>
+            </a:pPr>
+            <a:r>
+              <a:rPr lang="en-US" sz="940" dirty="0">
+                <a:solidFill>
+                  <a:srgbClr val="14131A"/>
+                </a:solidFill>
+                <a:latin typeface="Calibri" pitchFamily="34" charset="0"/>
+                <a:ea typeface="Calibri" pitchFamily="34" charset="-122"/>
+                <a:cs typeface="Calibri" pitchFamily="34" charset="-120"/>
+              </a:rPr>
+              <a:t>5  否则：new session + CIC 重建</a:t>
+            </a:r>
+            <a:endParaRPr lang="en-US" sz="940" dirty="0"/>
+          </a:p>
+        </p:txBody>
+      </p:sp>
+      <p:sp>
+        <p:nvSpPr>
+          <p:cNvPr id="18" name="Text 16"/>
+          <p:cNvSpPr/>
+          <p:nvPr/>
+        </p:nvSpPr>
+        <p:spPr>
+          <a:xfrm>
+            <a:off x="4873752" y="3730752"/>
+            <a:ext cx="2834640" cy="256032"/>
+          </a:xfrm>
+          <a:prstGeom prst="rect">
+            <a:avLst/>
+          </a:prstGeom>
+          <a:noFill/>
+          <a:ln/>
+        </p:spPr>
+        <p:txBody>
+          <a:bodyPr wrap="square" lIns="0" tIns="0" rIns="0" bIns="0" rtlCol="0" anchor="ctr"/>
+          <a:lstStyle/>
+          <a:p>
+            <a:pPr indent="0" marL="0">
+              <a:buNone/>
+            </a:pPr>
+            <a:r>
+              <a:rPr lang="en-US" sz="830" i="1" dirty="0">
                 <a:solidFill>
                   <a:srgbClr val="6B6375"/>
                 </a:solidFill>
@@ -9085,25 +9678,100 @@
                 <a:ea typeface="Calibri" pitchFamily="34" charset="-122"/>
                 <a:cs typeface="Calibri" pitchFamily="34" charset="-120"/>
               </a:rPr>
-              <a:t>MetaGPT / ChatDev</a:t>
-            </a:r>
-            <a:endParaRPr lang="en-US" sz="920" dirty="0"/>
-          </a:p>
-        </p:txBody>
-      </p:sp>
-      <p:sp>
-        <p:nvSpPr>
-          <p:cNvPr id="10" name="Text 8"/>
-          <p:cNvSpPr/>
-          <p:nvPr/>
-        </p:nvSpPr>
-        <p:spPr>
-          <a:xfrm>
-            <a:off x="10195560" y="1783080"/>
-            <a:ext cx="2377440" cy="347472"/>
-          </a:xfrm>
-          <a:prstGeom prst="rect">
-            <a:avLst/>
+              <a:t>切换只在 result 之后，不打断当前 turn</a:t>
+            </a:r>
+            <a:endParaRPr lang="en-US" sz="830" dirty="0"/>
+          </a:p>
+        </p:txBody>
+      </p:sp>
+      <p:sp>
+        <p:nvSpPr>
+          <p:cNvPr id="19" name="Shape 17"/>
+          <p:cNvSpPr/>
+          <p:nvPr/>
+        </p:nvSpPr>
+        <p:spPr>
+          <a:xfrm>
+            <a:off x="8092440" y="1691640"/>
+            <a:ext cx="3566160" cy="2423160"/>
+          </a:xfrm>
+          <a:prstGeom prst="roundRect">
+            <a:avLst>
+              <a:gd name="adj" fmla="val 3019"/>
+            </a:avLst>
+          </a:prstGeom>
+          <a:solidFill>
+            <a:srgbClr val="FFF4D6"/>
+          </a:solidFill>
+          <a:ln w="12700">
+            <a:solidFill>
+              <a:srgbClr val="E7D39B"/>
+            </a:solidFill>
+            <a:prstDash val="solid"/>
+          </a:ln>
+          <a:effectLst>
+            <a:outerShdw sx="100000" sy="100000" kx="0" ky="0" algn="bl" rotWithShape="0" blurRad="50800" dist="12700" dir="5400000">
+              <a:srgbClr val="000000">
+                <a:alpha val="7000"/>
+              </a:srgbClr>
+            </a:outerShdw>
+          </a:effectLst>
+        </p:spPr>
+      </p:sp>
+      <p:sp>
+        <p:nvSpPr>
+          <p:cNvPr id="20" name="Text 18"/>
+          <p:cNvSpPr/>
+          <p:nvPr/>
+        </p:nvSpPr>
+        <p:spPr>
+          <a:xfrm>
+            <a:off x="8257032" y="1810512"/>
+            <a:ext cx="3246120" cy="274320"/>
+          </a:xfrm>
+          <a:prstGeom prst="rect">
+            <a:avLst/>
+          </a:prstGeom>
+          <a:noFill/>
+          <a:ln/>
+        </p:spPr>
+        <p:txBody>
+          <a:bodyPr wrap="square" lIns="0" tIns="0" rIns="0" bIns="0" rtlCol="0" anchor="ctr"/>
+          <a:lstStyle/>
+          <a:p>
+            <a:pPr indent="0" marL="0">
+              <a:buNone/>
+            </a:pPr>
+            <a:r>
+              <a:rPr lang="en-US" sz="1150" b="1" dirty="0">
+                <a:solidFill>
+                  <a:srgbClr val="14131A"/>
+                </a:solidFill>
+                <a:latin typeface="Calibri" pitchFamily="34" charset="0"/>
+                <a:ea typeface="Calibri" pitchFamily="34" charset="-122"/>
+                <a:cs typeface="Calibri" pitchFamily="34" charset="-120"/>
+              </a:rPr>
+              <a:t>上下文槽 role_task_sessions</a:t>
+            </a:r>
+            <a:endParaRPr lang="en-US" sz="1150" dirty="0"/>
+          </a:p>
+        </p:txBody>
+      </p:sp>
+      <p:sp>
+        <p:nvSpPr>
+          <p:cNvPr id="21" name="Shape 19"/>
+          <p:cNvSpPr/>
+          <p:nvPr/>
+        </p:nvSpPr>
+        <p:spPr>
+          <a:xfrm>
+            <a:off x="8257032" y="2194560"/>
+            <a:ext cx="3246120" cy="475488"/>
+          </a:xfrm>
+          <a:prstGeom prst="roundRect">
+            <a:avLst>
+              <a:gd name="adj" fmla="val 15385"/>
+            </a:avLst>
           </a:prstGeom>
           <a:solidFill>
             <a:srgbClr val="FFFAF1"/>
@@ -9112,17 +9780,82 @@
             <a:solidFill>
               <a:srgbClr val="D8CBB8"/>
             </a:solidFill>
+            <a:prstDash val="solid"/>
           </a:ln>
-        </p:spPr>
-        <p:txBody>
-          <a:bodyPr wrap="square" lIns="381" tIns="381" rIns="381" bIns="381" rtlCol="0" anchor="ctr"/>
-          <a:lstStyle/>
-          <a:p>
-            <a:pPr indent="0" marL="0">
-              <a:buNone/>
-            </a:pPr>
-            <a:r>
-              <a:rPr lang="en-US" sz="920" b="1" dirty="0">
+          <a:effectLst>
+            <a:outerShdw sx="100000" sy="100000" kx="0" ky="0" algn="bl" rotWithShape="0" blurRad="50800" dist="12700" dir="5400000">
+              <a:srgbClr val="000000">
+                <a:alpha val="7000"/>
+              </a:srgbClr>
+            </a:outerShdw>
+          </a:effectLst>
+        </p:spPr>
+      </p:sp>
+      <p:sp>
+        <p:nvSpPr>
+          <p:cNvPr id="22" name="Text 20"/>
+          <p:cNvSpPr/>
+          <p:nvPr/>
+        </p:nvSpPr>
+        <p:spPr>
+          <a:xfrm>
+            <a:off x="8366760" y="2249424"/>
+            <a:ext cx="1005840" cy="201168"/>
+          </a:xfrm>
+          <a:prstGeom prst="rect">
+            <a:avLst/>
+          </a:prstGeom>
+          <a:noFill/>
+          <a:ln/>
+        </p:spPr>
+        <p:txBody>
+          <a:bodyPr wrap="square" lIns="0" tIns="0" rIns="0" bIns="0" rtlCol="0" anchor="ctr"/>
+          <a:lstStyle/>
+          <a:p>
+            <a:pPr indent="0" marL="0">
+              <a:buNone/>
+            </a:pPr>
+            <a:r>
+              <a:rPr lang="en-US" sz="900" b="1" dirty="0">
+                <a:solidFill>
+                  <a:srgbClr val="14131A"/>
+                </a:solidFill>
+                <a:latin typeface="Calibri" pitchFamily="34" charset="0"/>
+                <a:ea typeface="Calibri" pitchFamily="34" charset="-122"/>
+                <a:cs typeface="Calibri" pitchFamily="34" charset="-120"/>
+              </a:rPr>
+              <a:t>Task A</a:t>
+            </a:r>
+            <a:endParaRPr lang="en-US" sz="900" dirty="0"/>
+          </a:p>
+        </p:txBody>
+      </p:sp>
+      <p:sp>
+        <p:nvSpPr>
+          <p:cNvPr id="23" name="Text 21"/>
+          <p:cNvSpPr/>
+          <p:nvPr/>
+        </p:nvSpPr>
+        <p:spPr>
+          <a:xfrm>
+            <a:off x="9281160" y="2249424"/>
+            <a:ext cx="2121408" cy="329184"/>
+          </a:xfrm>
+          <a:prstGeom prst="rect">
+            <a:avLst/>
+          </a:prstGeom>
+          <a:noFill/>
+          <a:ln/>
+        </p:spPr>
+        <p:txBody>
+          <a:bodyPr wrap="square" lIns="0" tIns="0" rIns="0" bIns="0" rtlCol="0" anchor="ctr"/>
+          <a:lstStyle/>
+          <a:p>
+            <a:pPr indent="0" marL="0">
+              <a:buNone/>
+            </a:pPr>
+            <a:r>
+              <a:rPr lang="en-US" sz="750" dirty="0">
                 <a:solidFill>
                   <a:srgbClr val="6B6375"/>
                 </a:solidFill>
@@ -9130,44 +9863,111 @@
                 <a:ea typeface="Calibri" pitchFamily="34" charset="-122"/>
                 <a:cs typeface="Calibri" pitchFamily="34" charset="-120"/>
               </a:rPr>
-              <a:t>AgentTeams / Claude Tag</a:t>
-            </a:r>
-            <a:endParaRPr lang="en-US" sz="920" dirty="0"/>
-          </a:p>
-        </p:txBody>
-      </p:sp>
-      <p:sp>
-        <p:nvSpPr>
-          <p:cNvPr id="11" name="Text 9"/>
-          <p:cNvSpPr/>
-          <p:nvPr/>
-        </p:nvSpPr>
-        <p:spPr>
-          <a:xfrm>
-            <a:off x="548640" y="2167128"/>
-            <a:ext cx="1325880" cy="603504"/>
-          </a:xfrm>
-          <a:prstGeom prst="rect">
-            <a:avLst/>
+              <a:t>session_id · cwd · ctx_tokens · activity cursor</a:t>
+            </a:r>
+            <a:endParaRPr lang="en-US" sz="750" dirty="0"/>
+          </a:p>
+        </p:txBody>
+      </p:sp>
+      <p:sp>
+        <p:nvSpPr>
+          <p:cNvPr id="24" name="Shape 22"/>
+          <p:cNvSpPr/>
+          <p:nvPr/>
+        </p:nvSpPr>
+        <p:spPr>
+          <a:xfrm>
+            <a:off x="8257032" y="2761488"/>
+            <a:ext cx="3246120" cy="475488"/>
+          </a:xfrm>
+          <a:prstGeom prst="roundRect">
+            <a:avLst>
+              <a:gd name="adj" fmla="val 15385"/>
+            </a:avLst>
           </a:prstGeom>
           <a:solidFill>
-            <a:srgbClr val="FBF5EA"/>
+            <a:srgbClr val="FFFAF1"/>
           </a:solidFill>
-          <a:ln w="8890">
+          <a:ln w="12700">
             <a:solidFill>
               <a:srgbClr val="D8CBB8"/>
             </a:solidFill>
+            <a:prstDash val="solid"/>
           </a:ln>
-        </p:spPr>
-        <p:txBody>
-          <a:bodyPr wrap="square" lIns="381" tIns="381" rIns="381" bIns="381" rtlCol="0" anchor="ctr"/>
-          <a:lstStyle/>
-          <a:p>
-            <a:pPr indent="0" marL="0">
-              <a:buNone/>
-            </a:pPr>
-            <a:r>
-              <a:rPr lang="en-US" sz="870" b="1" dirty="0">
+          <a:effectLst>
+            <a:outerShdw sx="100000" sy="100000" kx="0" ky="0" algn="bl" rotWithShape="0" blurRad="50800" dist="12700" dir="5400000">
+              <a:srgbClr val="000000">
+                <a:alpha val="7000"/>
+              </a:srgbClr>
+            </a:outerShdw>
+          </a:effectLst>
+        </p:spPr>
+      </p:sp>
+      <p:sp>
+        <p:nvSpPr>
+          <p:cNvPr id="25" name="Text 23"/>
+          <p:cNvSpPr/>
+          <p:nvPr/>
+        </p:nvSpPr>
+        <p:spPr>
+          <a:xfrm>
+            <a:off x="8366760" y="2816352"/>
+            <a:ext cx="1005840" cy="201168"/>
+          </a:xfrm>
+          <a:prstGeom prst="rect">
+            <a:avLst/>
+          </a:prstGeom>
+          <a:noFill/>
+          <a:ln/>
+        </p:spPr>
+        <p:txBody>
+          <a:bodyPr wrap="square" lIns="0" tIns="0" rIns="0" bIns="0" rtlCol="0" anchor="ctr"/>
+          <a:lstStyle/>
+          <a:p>
+            <a:pPr indent="0" marL="0">
+              <a:buNone/>
+            </a:pPr>
+            <a:r>
+              <a:rPr lang="en-US" sz="900" b="1" dirty="0">
+                <a:solidFill>
+                  <a:srgbClr val="14131A"/>
+                </a:solidFill>
+                <a:latin typeface="Calibri" pitchFamily="34" charset="0"/>
+                <a:ea typeface="Calibri" pitchFamily="34" charset="-122"/>
+                <a:cs typeface="Calibri" pitchFamily="34" charset="-120"/>
+              </a:rPr>
+              <a:t>Task B</a:t>
+            </a:r>
+            <a:endParaRPr lang="en-US" sz="900" dirty="0"/>
+          </a:p>
+        </p:txBody>
+      </p:sp>
+      <p:sp>
+        <p:nvSpPr>
+          <p:cNvPr id="26" name="Text 24"/>
+          <p:cNvSpPr/>
+          <p:nvPr/>
+        </p:nvSpPr>
+        <p:spPr>
+          <a:xfrm>
+            <a:off x="9281160" y="2816352"/>
+            <a:ext cx="2121408" cy="329184"/>
+          </a:xfrm>
+          <a:prstGeom prst="rect">
+            <a:avLst/>
+          </a:prstGeom>
+          <a:noFill/>
+          <a:ln/>
+        </p:spPr>
+        <p:txBody>
+          <a:bodyPr wrap="square" lIns="0" tIns="0" rIns="0" bIns="0" rtlCol="0" anchor="ctr"/>
+          <a:lstStyle/>
+          <a:p>
+            <a:pPr indent="0" marL="0">
+              <a:buNone/>
+            </a:pPr>
+            <a:r>
+              <a:rPr lang="en-US" sz="750" dirty="0">
                 <a:solidFill>
                   <a:srgbClr val="6B6375"/>
                 </a:solidFill>
@@ -9175,44 +9975,184 @@
                 <a:ea typeface="Calibri" pitchFamily="34" charset="-122"/>
                 <a:cs typeface="Calibri" pitchFamily="34" charset="-120"/>
               </a:rPr>
-              <a:t>交互场所</a:t>
-            </a:r>
-            <a:endParaRPr lang="en-US" sz="870" dirty="0"/>
-          </a:p>
-        </p:txBody>
-      </p:sp>
-      <p:sp>
-        <p:nvSpPr>
-          <p:cNvPr id="12" name="Text 10"/>
-          <p:cNvSpPr/>
-          <p:nvPr/>
-        </p:nvSpPr>
-        <p:spPr>
-          <a:xfrm>
-            <a:off x="1874520" y="2167128"/>
-            <a:ext cx="2423160" cy="603504"/>
-          </a:xfrm>
-          <a:prstGeom prst="rect">
-            <a:avLst/>
+              <a:t>session_id · cwd · ctx_tokens · activity cursor</a:t>
+            </a:r>
+            <a:endParaRPr lang="en-US" sz="750" dirty="0"/>
+          </a:p>
+        </p:txBody>
+      </p:sp>
+      <p:sp>
+        <p:nvSpPr>
+          <p:cNvPr id="27" name="Shape 25"/>
+          <p:cNvSpPr/>
+          <p:nvPr/>
+        </p:nvSpPr>
+        <p:spPr>
+          <a:xfrm>
+            <a:off x="8257032" y="3328416"/>
+            <a:ext cx="3246120" cy="475488"/>
+          </a:xfrm>
+          <a:prstGeom prst="roundRect">
+            <a:avLst>
+              <a:gd name="adj" fmla="val 15385"/>
+            </a:avLst>
+          </a:prstGeom>
+          <a:solidFill>
+            <a:srgbClr val="FFFAF1"/>
+          </a:solidFill>
+          <a:ln w="12700">
+            <a:solidFill>
+              <a:srgbClr val="D8CBB8"/>
+            </a:solidFill>
+            <a:prstDash val="solid"/>
+          </a:ln>
+          <a:effectLst>
+            <a:outerShdw sx="100000" sy="100000" kx="0" ky="0" algn="bl" rotWithShape="0" blurRad="50800" dist="12700" dir="5400000">
+              <a:srgbClr val="000000">
+                <a:alpha val="7000"/>
+              </a:srgbClr>
+            </a:outerShdw>
+          </a:effectLst>
+        </p:spPr>
+      </p:sp>
+      <p:sp>
+        <p:nvSpPr>
+          <p:cNvPr id="28" name="Text 26"/>
+          <p:cNvSpPr/>
+          <p:nvPr/>
+        </p:nvSpPr>
+        <p:spPr>
+          <a:xfrm>
+            <a:off x="8366760" y="3383280"/>
+            <a:ext cx="1005840" cy="201168"/>
+          </a:xfrm>
+          <a:prstGeom prst="rect">
+            <a:avLst/>
+          </a:prstGeom>
+          <a:noFill/>
+          <a:ln/>
+        </p:spPr>
+        <p:txBody>
+          <a:bodyPr wrap="square" lIns="0" tIns="0" rIns="0" bIns="0" rtlCol="0" anchor="ctr"/>
+          <a:lstStyle/>
+          <a:p>
+            <a:pPr indent="0" marL="0">
+              <a:buNone/>
+            </a:pPr>
+            <a:r>
+              <a:rPr lang="en-US" sz="900" b="1" dirty="0">
+                <a:solidFill>
+                  <a:srgbClr val="0E7490"/>
+                </a:solidFill>
+                <a:latin typeface="Calibri" pitchFamily="34" charset="0"/>
+                <a:ea typeface="Calibri" pitchFamily="34" charset="-122"/>
+                <a:cs typeface="Calibri" pitchFamily="34" charset="-120"/>
+              </a:rPr>
+              <a:t>__global__</a:t>
+            </a:r>
+            <a:endParaRPr lang="en-US" sz="900" dirty="0"/>
+          </a:p>
+        </p:txBody>
+      </p:sp>
+      <p:sp>
+        <p:nvSpPr>
+          <p:cNvPr id="29" name="Text 27"/>
+          <p:cNvSpPr/>
+          <p:nvPr/>
+        </p:nvSpPr>
+        <p:spPr>
+          <a:xfrm>
+            <a:off x="9281160" y="3383280"/>
+            <a:ext cx="2121408" cy="329184"/>
+          </a:xfrm>
+          <a:prstGeom prst="rect">
+            <a:avLst/>
+          </a:prstGeom>
+          <a:noFill/>
+          <a:ln/>
+        </p:spPr>
+        <p:txBody>
+          <a:bodyPr wrap="square" lIns="0" tIns="0" rIns="0" bIns="0" rtlCol="0" anchor="ctr"/>
+          <a:lstStyle/>
+          <a:p>
+            <a:pPr indent="0" marL="0">
+              <a:buNone/>
+            </a:pPr>
+            <a:r>
+              <a:rPr lang="en-US" sz="750" dirty="0">
+                <a:solidFill>
+                  <a:srgbClr val="6B6375"/>
+                </a:solidFill>
+                <a:latin typeface="Calibri" pitchFamily="34" charset="0"/>
+                <a:ea typeface="Calibri" pitchFamily="34" charset="-122"/>
+                <a:cs typeface="Calibri" pitchFamily="34" charset="-120"/>
+              </a:rPr>
+              <a:t>reminder / 角色直聊，不共享任务上下文</a:t>
+            </a:r>
+            <a:endParaRPr lang="en-US" sz="750" dirty="0"/>
+          </a:p>
+        </p:txBody>
+      </p:sp>
+      <p:sp>
+        <p:nvSpPr>
+          <p:cNvPr id="30" name="Shape 28"/>
+          <p:cNvSpPr/>
+          <p:nvPr/>
+        </p:nvSpPr>
+        <p:spPr>
+          <a:xfrm>
+            <a:off x="548640" y="4297680"/>
+            <a:ext cx="11109960" cy="475488"/>
+          </a:xfrm>
+          <a:prstGeom prst="roundRect">
+            <a:avLst>
+              <a:gd name="adj" fmla="val 15385"/>
+            </a:avLst>
           </a:prstGeom>
           <a:solidFill>
             <a:srgbClr val="FFF4D6"/>
           </a:solidFill>
-          <a:ln w="8890">
+          <a:ln w="12700">
             <a:solidFill>
-              <a:srgbClr val="D8CBB8"/>
+              <a:srgbClr val="E7D39B"/>
             </a:solidFill>
+            <a:prstDash val="solid"/>
           </a:ln>
-        </p:spPr>
-        <p:txBody>
-          <a:bodyPr wrap="square" lIns="381" tIns="381" rIns="381" bIns="381" rtlCol="0" anchor="ctr"/>
-          <a:lstStyle/>
-          <a:p>
-            <a:pPr indent="0" marL="0">
-              <a:buNone/>
-            </a:pPr>
-            <a:r>
-              <a:rPr lang="en-US" sz="870" b="1" dirty="0">
+          <a:effectLst>
+            <a:outerShdw sx="100000" sy="100000" kx="0" ky="0" algn="bl" rotWithShape="0" blurRad="50800" dist="12700" dir="5400000">
+              <a:srgbClr val="000000">
+                <a:alpha val="7000"/>
+              </a:srgbClr>
+            </a:outerShdw>
+          </a:effectLst>
+        </p:spPr>
+      </p:sp>
+      <p:sp>
+        <p:nvSpPr>
+          <p:cNvPr id="31" name="Text 29"/>
+          <p:cNvSpPr/>
+          <p:nvPr/>
+        </p:nvSpPr>
+        <p:spPr>
+          <a:xfrm>
+            <a:off x="731520" y="4389120"/>
+            <a:ext cx="10789920" cy="219456"/>
+          </a:xfrm>
+          <a:prstGeom prst="rect">
+            <a:avLst/>
+          </a:prstGeom>
+          <a:noFill/>
+          <a:ln/>
+        </p:spPr>
+        <p:txBody>
+          <a:bodyPr wrap="square" lIns="0" tIns="0" rIns="0" bIns="0" rtlCol="0" anchor="ctr"/>
+          <a:lstStyle/>
+          <a:p>
+            <a:pPr indent="0" marL="0">
+              <a:buNone/>
+            </a:pPr>
+            <a:r>
+              <a:rPr lang="en-US" sz="920" dirty="0">
                 <a:solidFill>
                   <a:srgbClr val="14131A"/>
                 </a:solidFill>
@@ -9220,44 +10160,150 @@
                 <a:ea typeface="Calibri" pitchFamily="34" charset="-122"/>
                 <a:cs typeface="Calibri" pitchFamily="34" charset="-120"/>
               </a:rPr>
-              <a:t>任务时间线</a:t>
-            </a:r>
-            <a:endParaRPr lang="en-US" sz="870" dirty="0"/>
-          </a:p>
-        </p:txBody>
-      </p:sp>
-      <p:sp>
-        <p:nvSpPr>
-          <p:cNvPr id="13" name="Text 11"/>
-          <p:cNvSpPr/>
-          <p:nvPr/>
-        </p:nvSpPr>
-        <p:spPr>
-          <a:xfrm>
-            <a:off x="4297680" y="2167128"/>
-            <a:ext cx="2103120" cy="603504"/>
-          </a:xfrm>
-          <a:prstGeom prst="rect">
-            <a:avLst/>
+              <a:t>idle → busy → result → idle   ｜   空闲 15 分钟释放进程，但槽保留   ｜   下次消息：加载对应槽 → resume 或 new + CIC</a:t>
+            </a:r>
+            <a:endParaRPr lang="en-US" sz="920" dirty="0"/>
+          </a:p>
+        </p:txBody>
+      </p:sp>
+      <p:sp>
+        <p:nvSpPr>
+          <p:cNvPr id="32" name="Shape 30"/>
+          <p:cNvSpPr/>
+          <p:nvPr/>
+        </p:nvSpPr>
+        <p:spPr>
+          <a:xfrm>
+            <a:off x="548640" y="4937760"/>
+            <a:ext cx="11109960" cy="841248"/>
+          </a:xfrm>
+          <a:prstGeom prst="roundRect">
+            <a:avLst>
+              <a:gd name="adj" fmla="val 8696"/>
+            </a:avLst>
           </a:prstGeom>
           <a:solidFill>
-            <a:srgbClr val="FBF5EA"/>
+            <a:srgbClr val="E6F6F9"/>
           </a:solidFill>
-          <a:ln w="8890">
+          <a:ln w="12700">
             <a:solidFill>
-              <a:srgbClr val="D8CBB8"/>
+              <a:srgbClr val="B7DCE5"/>
             </a:solidFill>
+            <a:prstDash val="solid"/>
           </a:ln>
-        </p:spPr>
-        <p:txBody>
-          <a:bodyPr wrap="square" lIns="381" tIns="381" rIns="381" bIns="381" rtlCol="0" anchor="ctr"/>
-          <a:lstStyle/>
-          <a:p>
-            <a:pPr indent="0" marL="0">
-              <a:buNone/>
-            </a:pPr>
-            <a:r>
-              <a:rPr lang="en-US" sz="870" dirty="0">
+          <a:effectLst>
+            <a:outerShdw sx="100000" sy="100000" kx="0" ky="0" algn="bl" rotWithShape="0" blurRad="50800" dist="12700" dir="5400000">
+              <a:srgbClr val="000000">
+                <a:alpha val="7000"/>
+              </a:srgbClr>
+            </a:outerShdw>
+          </a:effectLst>
+        </p:spPr>
+      </p:sp>
+      <p:sp>
+        <p:nvSpPr>
+          <p:cNvPr id="33" name="Text 31"/>
+          <p:cNvSpPr/>
+          <p:nvPr/>
+        </p:nvSpPr>
+        <p:spPr>
+          <a:xfrm>
+            <a:off x="713232" y="5029200"/>
+            <a:ext cx="1143000" cy="201168"/>
+          </a:xfrm>
+          <a:prstGeom prst="rect">
+            <a:avLst/>
+          </a:prstGeom>
+          <a:noFill/>
+          <a:ln/>
+        </p:spPr>
+        <p:txBody>
+          <a:bodyPr wrap="square" lIns="0" tIns="0" rIns="0" bIns="0" rtlCol="0" anchor="ctr"/>
+          <a:lstStyle/>
+          <a:p>
+            <a:pPr indent="0" marL="0">
+              <a:buNone/>
+            </a:pPr>
+            <a:r>
+              <a:rPr lang="en-US" sz="950" b="1" dirty="0">
+                <a:solidFill>
+                  <a:srgbClr val="0E7490"/>
+                </a:solidFill>
+                <a:latin typeface="Calibri" pitchFamily="34" charset="0"/>
+                <a:ea typeface="Calibri" pitchFamily="34" charset="-122"/>
+                <a:cs typeface="Calibri" pitchFamily="34" charset="-120"/>
+              </a:rPr>
+              <a:t>同行对比</a:t>
+            </a:r>
+            <a:endParaRPr lang="en-US" sz="950" dirty="0"/>
+          </a:p>
+        </p:txBody>
+      </p:sp>
+      <p:sp>
+        <p:nvSpPr>
+          <p:cNvPr id="34" name="Text 32"/>
+          <p:cNvSpPr/>
+          <p:nvPr/>
+        </p:nvSpPr>
+        <p:spPr>
+          <a:xfrm>
+            <a:off x="1920240" y="5020056"/>
+            <a:ext cx="3075432" cy="201168"/>
+          </a:xfrm>
+          <a:prstGeom prst="rect">
+            <a:avLst/>
+          </a:prstGeom>
+          <a:noFill/>
+          <a:ln/>
+        </p:spPr>
+        <p:txBody>
+          <a:bodyPr wrap="square" lIns="0" tIns="0" rIns="0" bIns="0" rtlCol="0" anchor="ctr"/>
+          <a:lstStyle/>
+          <a:p>
+            <a:pPr indent="0" marL="0">
+              <a:buNone/>
+            </a:pPr>
+            <a:r>
+              <a:rPr lang="en-US" sz="950" b="1" dirty="0">
+                <a:solidFill>
+                  <a:srgbClr val="14131A"/>
+                </a:solidFill>
+                <a:latin typeface="Calibri" pitchFamily="34" charset="0"/>
+                <a:ea typeface="Calibri" pitchFamily="34" charset="-122"/>
+                <a:cs typeface="Calibri" pitchFamily="34" charset="-120"/>
+              </a:rPr>
+              <a:t>Raft</a:t>
+            </a:r>
+            <a:endParaRPr lang="en-US" sz="950" dirty="0"/>
+          </a:p>
+        </p:txBody>
+      </p:sp>
+      <p:sp>
+        <p:nvSpPr>
+          <p:cNvPr id="35" name="Text 33"/>
+          <p:cNvSpPr/>
+          <p:nvPr/>
+        </p:nvSpPr>
+        <p:spPr>
+          <a:xfrm>
+            <a:off x="1920240" y="5212080"/>
+            <a:ext cx="3075432" cy="475488"/>
+          </a:xfrm>
+          <a:prstGeom prst="rect">
+            <a:avLst/>
+          </a:prstGeom>
+          <a:noFill/>
+          <a:ln/>
+        </p:spPr>
+        <p:txBody>
+          <a:bodyPr wrap="square" lIns="0" tIns="0" rIns="0" bIns="0" rtlCol="0" anchor="t"/>
+          <a:lstStyle/>
+          <a:p>
+            <a:pPr indent="0" marL="0">
+              <a:buNone/>
+            </a:pPr>
+            <a:r>
+              <a:rPr lang="en-US" sz="820" dirty="0">
                 <a:solidFill>
                   <a:srgbClr val="6B6375"/>
                 </a:solidFill>
@@ -9265,44 +10311,77 @@
                 <a:ea typeface="Calibri" pitchFamily="34" charset="-122"/>
                 <a:cs typeface="Calibri" pitchFamily="34" charset="-120"/>
               </a:rPr>
-              <a:t>channel / thread</a:t>
-            </a:r>
-            <a:endParaRPr lang="en-US" sz="870" dirty="0"/>
-          </a:p>
-        </p:txBody>
-      </p:sp>
-      <p:sp>
-        <p:nvSpPr>
-          <p:cNvPr id="14" name="Text 12"/>
-          <p:cNvSpPr/>
-          <p:nvPr/>
-        </p:nvSpPr>
-        <p:spPr>
-          <a:xfrm>
-            <a:off x="6400800" y="2167128"/>
-            <a:ext cx="1874520" cy="603504"/>
-          </a:xfrm>
-          <a:prstGeom prst="rect">
-            <a:avLst/>
-          </a:prstGeom>
-          <a:solidFill>
-            <a:srgbClr val="FBF5EA"/>
-          </a:solidFill>
-          <a:ln w="8890">
-            <a:solidFill>
-              <a:srgbClr val="D8CBB8"/>
-            </a:solidFill>
-          </a:ln>
-        </p:spPr>
-        <p:txBody>
-          <a:bodyPr wrap="square" lIns="381" tIns="381" rIns="381" bIns="381" rtlCol="0" anchor="ctr"/>
-          <a:lstStyle/>
-          <a:p>
-            <a:pPr indent="0" marL="0">
-              <a:buNone/>
-            </a:pPr>
-            <a:r>
-              <a:rPr lang="en-US" sz="870" dirty="0">
+              <a:t>一个 agent 长期单会话；Anvil 按 (角色, 任务) 拆成多个上下文槽。</a:t>
+            </a:r>
+            <a:endParaRPr lang="en-US" sz="820" dirty="0"/>
+          </a:p>
+        </p:txBody>
+      </p:sp>
+      <p:sp>
+        <p:nvSpPr>
+          <p:cNvPr id="36" name="Text 34"/>
+          <p:cNvSpPr/>
+          <p:nvPr/>
+        </p:nvSpPr>
+        <p:spPr>
+          <a:xfrm>
+            <a:off x="5160264" y="5020056"/>
+            <a:ext cx="3075432" cy="201168"/>
+          </a:xfrm>
+          <a:prstGeom prst="rect">
+            <a:avLst/>
+          </a:prstGeom>
+          <a:noFill/>
+          <a:ln/>
+        </p:spPr>
+        <p:txBody>
+          <a:bodyPr wrap="square" lIns="0" tIns="0" rIns="0" bIns="0" rtlCol="0" anchor="ctr"/>
+          <a:lstStyle/>
+          <a:p>
+            <a:pPr indent="0" marL="0">
+              <a:buNone/>
+            </a:pPr>
+            <a:r>
+              <a:rPr lang="en-US" sz="950" b="1" dirty="0">
+                <a:solidFill>
+                  <a:srgbClr val="14131A"/>
+                </a:solidFill>
+                <a:latin typeface="Calibri" pitchFamily="34" charset="0"/>
+                <a:ea typeface="Calibri" pitchFamily="34" charset="-122"/>
+                <a:cs typeface="Calibri" pitchFamily="34" charset="-120"/>
+              </a:rPr>
+              <a:t>AgentScope Harness</a:t>
+            </a:r>
+            <a:endParaRPr lang="en-US" sz="950" dirty="0"/>
+          </a:p>
+        </p:txBody>
+      </p:sp>
+      <p:sp>
+        <p:nvSpPr>
+          <p:cNvPr id="37" name="Text 35"/>
+          <p:cNvSpPr/>
+          <p:nvPr/>
+        </p:nvSpPr>
+        <p:spPr>
+          <a:xfrm>
+            <a:off x="5160264" y="5212080"/>
+            <a:ext cx="3075432" cy="475488"/>
+          </a:xfrm>
+          <a:prstGeom prst="rect">
+            <a:avLst/>
+          </a:prstGeom>
+          <a:noFill/>
+          <a:ln/>
+        </p:spPr>
+        <p:txBody>
+          <a:bodyPr wrap="square" lIns="0" tIns="0" rIns="0" bIns="0" rtlCol="0" anchor="t"/>
+          <a:lstStyle/>
+          <a:p>
+            <a:pPr indent="0" marL="0">
+              <a:buNone/>
+            </a:pPr>
+            <a:r>
+              <a:rPr lang="en-US" sz="820" dirty="0">
                 <a:solidFill>
                   <a:srgbClr val="6B6375"/>
                 </a:solidFill>
@@ -9310,44 +10389,77 @@
                 <a:ea typeface="Calibri" pitchFamily="34" charset="-122"/>
                 <a:cs typeface="Calibri" pitchFamily="34" charset="-120"/>
               </a:rPr>
-              <a:t>任务内群聊</a:t>
-            </a:r>
-            <a:endParaRPr lang="en-US" sz="870" dirty="0"/>
-          </a:p>
-        </p:txBody>
-      </p:sp>
-      <p:sp>
-        <p:nvSpPr>
-          <p:cNvPr id="15" name="Text 13"/>
-          <p:cNvSpPr/>
-          <p:nvPr/>
-        </p:nvSpPr>
-        <p:spPr>
-          <a:xfrm>
-            <a:off x="8275320" y="2167128"/>
-            <a:ext cx="1920240" cy="603504"/>
-          </a:xfrm>
-          <a:prstGeom prst="rect">
-            <a:avLst/>
-          </a:prstGeom>
-          <a:solidFill>
-            <a:srgbClr val="FBF5EA"/>
-          </a:solidFill>
-          <a:ln w="8890">
-            <a:solidFill>
-              <a:srgbClr val="D8CBB8"/>
-            </a:solidFill>
-          </a:ln>
-        </p:spPr>
-        <p:txBody>
-          <a:bodyPr wrap="square" lIns="381" tIns="381" rIns="381" bIns="381" rtlCol="0" anchor="ctr"/>
-          <a:lstStyle/>
-          <a:p>
-            <a:pPr indent="0" marL="0">
-              <a:buNone/>
-            </a:pPr>
-            <a:r>
-              <a:rPr lang="en-US" sz="870" dirty="0">
+              <a:t>task 身份与上下文解耦、Continuation 恢复；Anvil 落到运行时槽 + FIFO 队列。</a:t>
+            </a:r>
+            <a:endParaRPr lang="en-US" sz="820" dirty="0"/>
+          </a:p>
+        </p:txBody>
+      </p:sp>
+      <p:sp>
+        <p:nvSpPr>
+          <p:cNvPr id="38" name="Text 36"/>
+          <p:cNvSpPr/>
+          <p:nvPr/>
+        </p:nvSpPr>
+        <p:spPr>
+          <a:xfrm>
+            <a:off x="8400288" y="5020056"/>
+            <a:ext cx="3075432" cy="201168"/>
+          </a:xfrm>
+          <a:prstGeom prst="rect">
+            <a:avLst/>
+          </a:prstGeom>
+          <a:noFill/>
+          <a:ln/>
+        </p:spPr>
+        <p:txBody>
+          <a:bodyPr wrap="square" lIns="0" tIns="0" rIns="0" bIns="0" rtlCol="0" anchor="ctr"/>
+          <a:lstStyle/>
+          <a:p>
+            <a:pPr indent="0" marL="0">
+              <a:buNone/>
+            </a:pPr>
+            <a:r>
+              <a:rPr lang="en-US" sz="950" b="1" dirty="0">
+                <a:solidFill>
+                  <a:srgbClr val="14131A"/>
+                </a:solidFill>
+                <a:latin typeface="Calibri" pitchFamily="34" charset="0"/>
+                <a:ea typeface="Calibri" pitchFamily="34" charset="-122"/>
+                <a:cs typeface="Calibri" pitchFamily="34" charset="-120"/>
+              </a:rPr>
+              <a:t>Claude Code</a:t>
+            </a:r>
+            <a:endParaRPr lang="en-US" sz="950" dirty="0"/>
+          </a:p>
+        </p:txBody>
+      </p:sp>
+      <p:sp>
+        <p:nvSpPr>
+          <p:cNvPr id="39" name="Text 37"/>
+          <p:cNvSpPr/>
+          <p:nvPr/>
+        </p:nvSpPr>
+        <p:spPr>
+          <a:xfrm>
+            <a:off x="8400288" y="5212080"/>
+            <a:ext cx="3075432" cy="475488"/>
+          </a:xfrm>
+          <a:prstGeom prst="rect">
+            <a:avLst/>
+          </a:prstGeom>
+          <a:noFill/>
+          <a:ln/>
+        </p:spPr>
+        <p:txBody>
+          <a:bodyPr wrap="square" lIns="0" tIns="0" rIns="0" bIns="0" rtlCol="0" anchor="t"/>
+          <a:lstStyle/>
+          <a:p>
+            <a:pPr indent="0" marL="0">
+              <a:buNone/>
+            </a:pPr>
+            <a:r>
+              <a:rPr lang="en-US" sz="820" dirty="0">
                 <a:solidFill>
                   <a:srgbClr val="6B6375"/>
                 </a:solidFill>
@@ -9355,134 +10467,52 @@
                 <a:ea typeface="Calibri" pitchFamily="34" charset="-122"/>
                 <a:cs typeface="Calibri" pitchFamily="34" charset="-120"/>
               </a:rPr>
-              <a:t>SOP / pipeline</a:t>
-            </a:r>
-            <a:endParaRPr lang="en-US" sz="870" dirty="0"/>
-          </a:p>
-        </p:txBody>
-      </p:sp>
-      <p:sp>
-        <p:nvSpPr>
-          <p:cNvPr id="16" name="Text 14"/>
-          <p:cNvSpPr/>
-          <p:nvPr/>
-        </p:nvSpPr>
-        <p:spPr>
-          <a:xfrm>
-            <a:off x="10195560" y="2167128"/>
-            <a:ext cx="2377440" cy="603504"/>
-          </a:xfrm>
-          <a:prstGeom prst="rect">
-            <a:avLst/>
-          </a:prstGeom>
-          <a:solidFill>
-            <a:srgbClr val="FBF5EA"/>
-          </a:solidFill>
-          <a:ln w="8890">
-            <a:solidFill>
-              <a:srgbClr val="D8CBB8"/>
-            </a:solidFill>
-          </a:ln>
-        </p:spPr>
-        <p:txBody>
-          <a:bodyPr wrap="square" lIns="381" tIns="381" rIns="381" bIns="381" rtlCol="0" anchor="ctr"/>
-          <a:lstStyle/>
-          <a:p>
-            <a:pPr indent="0" marL="0">
-              <a:buNone/>
-            </a:pPr>
-            <a:r>
-              <a:rPr lang="en-US" sz="870" dirty="0">
-                <a:solidFill>
-                  <a:srgbClr val="6B6375"/>
-                </a:solidFill>
-                <a:latin typeface="Calibri" pitchFamily="34" charset="0"/>
-                <a:ea typeface="Calibri" pitchFamily="34" charset="-122"/>
-                <a:cs typeface="Calibri" pitchFamily="34" charset="-120"/>
-              </a:rPr>
-              <a:t>群聊 / 组织</a:t>
-            </a:r>
-            <a:endParaRPr lang="en-US" sz="870" dirty="0"/>
-          </a:p>
-        </p:txBody>
-      </p:sp>
-      <p:sp>
-        <p:nvSpPr>
-          <p:cNvPr id="17" name="Text 15"/>
-          <p:cNvSpPr/>
-          <p:nvPr/>
-        </p:nvSpPr>
-        <p:spPr>
-          <a:xfrm>
-            <a:off x="548640" y="2807208"/>
-            <a:ext cx="1325880" cy="603504"/>
-          </a:xfrm>
-          <a:prstGeom prst="rect">
-            <a:avLst/>
-          </a:prstGeom>
-          <a:solidFill>
-            <a:srgbClr val="FFFAF1"/>
-          </a:solidFill>
-          <a:ln w="8890">
-            <a:solidFill>
-              <a:srgbClr val="D8CBB8"/>
-            </a:solidFill>
-          </a:ln>
-        </p:spPr>
-        <p:txBody>
-          <a:bodyPr wrap="square" lIns="381" tIns="381" rIns="381" bIns="381" rtlCol="0" anchor="ctr"/>
-          <a:lstStyle/>
-          <a:p>
-            <a:pPr indent="0" marL="0">
-              <a:buNone/>
-            </a:pPr>
-            <a:r>
-              <a:rPr lang="en-US" sz="870" b="1" dirty="0">
-                <a:solidFill>
-                  <a:srgbClr val="6B6375"/>
-                </a:solidFill>
-                <a:latin typeface="Calibri" pitchFamily="34" charset="0"/>
-                <a:ea typeface="Calibri" pitchFamily="34" charset="-122"/>
-                <a:cs typeface="Calibri" pitchFamily="34" charset="-120"/>
-              </a:rPr>
-              <a:t>工作单元</a:t>
-            </a:r>
-            <a:endParaRPr lang="en-US" sz="870" dirty="0"/>
-          </a:p>
-        </p:txBody>
-      </p:sp>
-      <p:sp>
-        <p:nvSpPr>
-          <p:cNvPr id="18" name="Text 16"/>
-          <p:cNvSpPr/>
-          <p:nvPr/>
-        </p:nvSpPr>
-        <p:spPr>
-          <a:xfrm>
-            <a:off x="1874520" y="2807208"/>
-            <a:ext cx="2423160" cy="603504"/>
-          </a:xfrm>
-          <a:prstGeom prst="rect">
-            <a:avLst/>
-          </a:prstGeom>
-          <a:solidFill>
-            <a:srgbClr val="FFF4D6"/>
-          </a:solidFill>
-          <a:ln w="8890">
-            <a:solidFill>
-              <a:srgbClr val="D8CBB8"/>
-            </a:solidFill>
-          </a:ln>
-        </p:spPr>
-        <p:txBody>
-          <a:bodyPr wrap="square" lIns="381" tIns="381" rIns="381" bIns="381" rtlCol="0" anchor="ctr"/>
-          <a:lstStyle/>
-          <a:p>
-            <a:pPr indent="0" marL="0">
-              <a:buNone/>
-            </a:pPr>
-            <a:r>
-              <a:rPr lang="en-US" sz="870" b="1" dirty="0">
+              <a:t>session 与 cwd 绑定；Anvil 把 session_id + cwd + 水位一起存进槽。</a:t>
+            </a:r>
+            <a:endParaRPr lang="en-US" sz="820" dirty="0"/>
+          </a:p>
+        </p:txBody>
+      </p:sp>
+      <p:sp>
+        <p:nvSpPr>
+          <p:cNvPr id="40" name="Text 38"/>
+          <p:cNvSpPr/>
+          <p:nvPr/>
+        </p:nvSpPr>
+        <p:spPr>
+          <a:xfrm>
+            <a:off x="548640" y="5897880"/>
+            <a:ext cx="5486400" cy="256032"/>
+          </a:xfrm>
+          <a:prstGeom prst="rect">
+            <a:avLst/>
+          </a:prstGeom>
+          <a:noFill/>
+          <a:ln/>
+        </p:spPr>
+        <p:txBody>
+          <a:bodyPr wrap="square" lIns="0" tIns="0" rIns="0" bIns="0" rtlCol="0" anchor="ctr"/>
+          <a:lstStyle/>
+          <a:p>
+            <a:pPr indent="0" marL="0">
+              <a:buNone/>
+            </a:pPr>
+            <a:r>
+              <a:rPr lang="en-US" sz="1050" b="1" dirty="0">
+                <a:solidFill>
+                  <a:srgbClr val="0E7490"/>
+                </a:solidFill>
+                <a:latin typeface="Calibri" pitchFamily="34" charset="0"/>
+                <a:ea typeface="Calibri" pitchFamily="34" charset="-122"/>
+                <a:cs typeface="Calibri" pitchFamily="34" charset="-120"/>
+              </a:rPr>
+              <a:t>目标  </a:t>
+            </a:r>
+            <a:pPr indent="0" marL="0">
+              <a:buNone/>
+            </a:pPr>
+            <a:r>
+              <a:rPr lang="en-US" sz="1050" dirty="0">
                 <a:solidFill>
                   <a:srgbClr val="14131A"/>
                 </a:solidFill>
@@ -9490,269 +10520,52 @@
                 <a:ea typeface="Calibri" pitchFamily="34" charset="-122"/>
                 <a:cs typeface="Calibri" pitchFamily="34" charset="-120"/>
               </a:rPr>
-              <a:t>Task + step</a:t>
-            </a:r>
-            <a:endParaRPr lang="en-US" sz="870" dirty="0"/>
-          </a:p>
-        </p:txBody>
-      </p:sp>
-      <p:sp>
-        <p:nvSpPr>
-          <p:cNvPr id="19" name="Text 17"/>
-          <p:cNvSpPr/>
-          <p:nvPr/>
-        </p:nvSpPr>
-        <p:spPr>
-          <a:xfrm>
-            <a:off x="4297680" y="2807208"/>
-            <a:ext cx="2103120" cy="603504"/>
-          </a:xfrm>
-          <a:prstGeom prst="rect">
-            <a:avLst/>
-          </a:prstGeom>
-          <a:solidFill>
-            <a:srgbClr val="FFFAF1"/>
-          </a:solidFill>
-          <a:ln w="8890">
-            <a:solidFill>
-              <a:srgbClr val="D8CBB8"/>
-            </a:solidFill>
-          </a:ln>
-        </p:spPr>
-        <p:txBody>
-          <a:bodyPr wrap="square" lIns="381" tIns="381" rIns="381" bIns="381" rtlCol="0" anchor="ctr"/>
-          <a:lstStyle/>
-          <a:p>
-            <a:pPr indent="0" marL="0">
-              <a:buNone/>
-            </a:pPr>
-            <a:r>
-              <a:rPr lang="en-US" sz="870" dirty="0">
-                <a:solidFill>
-                  <a:srgbClr val="6B6375"/>
-                </a:solidFill>
-                <a:latin typeface="Calibri" pitchFamily="34" charset="0"/>
-                <a:ea typeface="Calibri" pitchFamily="34" charset="-122"/>
-                <a:cs typeface="Calibri" pitchFamily="34" charset="-120"/>
-              </a:rPr>
-              <a:t>task + thread</a:t>
-            </a:r>
-            <a:endParaRPr lang="en-US" sz="870" dirty="0"/>
-          </a:p>
-        </p:txBody>
-      </p:sp>
-      <p:sp>
-        <p:nvSpPr>
-          <p:cNvPr id="20" name="Text 18"/>
-          <p:cNvSpPr/>
-          <p:nvPr/>
-        </p:nvSpPr>
-        <p:spPr>
-          <a:xfrm>
-            <a:off x="6400800" y="2807208"/>
-            <a:ext cx="1874520" cy="603504"/>
-          </a:xfrm>
-          <a:prstGeom prst="rect">
-            <a:avLst/>
-          </a:prstGeom>
-          <a:solidFill>
-            <a:srgbClr val="FFFAF1"/>
-          </a:solidFill>
-          <a:ln w="8890">
-            <a:solidFill>
-              <a:srgbClr val="D8CBB8"/>
-            </a:solidFill>
-          </a:ln>
-        </p:spPr>
-        <p:txBody>
-          <a:bodyPr wrap="square" lIns="381" tIns="381" rIns="381" bIns="381" rtlCol="0" anchor="ctr"/>
-          <a:lstStyle/>
-          <a:p>
-            <a:pPr indent="0" marL="0">
-              <a:buNone/>
-            </a:pPr>
-            <a:r>
-              <a:rPr lang="en-US" sz="870" dirty="0">
-                <a:solidFill>
-                  <a:srgbClr val="6B6375"/>
-                </a:solidFill>
-                <a:latin typeface="Calibri" pitchFamily="34" charset="0"/>
-                <a:ea typeface="Calibri" pitchFamily="34" charset="-122"/>
-                <a:cs typeface="Calibri" pitchFamily="34" charset="-120"/>
-              </a:rPr>
-              <a:t>conversation</a:t>
-            </a:r>
-            <a:endParaRPr lang="en-US" sz="870" dirty="0"/>
-          </a:p>
-        </p:txBody>
-      </p:sp>
-      <p:sp>
-        <p:nvSpPr>
-          <p:cNvPr id="21" name="Text 19"/>
-          <p:cNvSpPr/>
-          <p:nvPr/>
-        </p:nvSpPr>
-        <p:spPr>
-          <a:xfrm>
-            <a:off x="8275320" y="2807208"/>
-            <a:ext cx="1920240" cy="603504"/>
-          </a:xfrm>
-          <a:prstGeom prst="rect">
-            <a:avLst/>
-          </a:prstGeom>
-          <a:solidFill>
-            <a:srgbClr val="FFFAF1"/>
-          </a:solidFill>
-          <a:ln w="8890">
-            <a:solidFill>
-              <a:srgbClr val="D8CBB8"/>
-            </a:solidFill>
-          </a:ln>
-        </p:spPr>
-        <p:txBody>
-          <a:bodyPr wrap="square" lIns="381" tIns="381" rIns="381" bIns="381" rtlCol="0" anchor="ctr"/>
-          <a:lstStyle/>
-          <a:p>
-            <a:pPr indent="0" marL="0">
-              <a:buNone/>
-            </a:pPr>
-            <a:r>
-              <a:rPr lang="en-US" sz="870" dirty="0">
-                <a:solidFill>
-                  <a:srgbClr val="6B6375"/>
-                </a:solidFill>
-                <a:latin typeface="Calibri" pitchFamily="34" charset="0"/>
-                <a:ea typeface="Calibri" pitchFamily="34" charset="-122"/>
-                <a:cs typeface="Calibri" pitchFamily="34" charset="-120"/>
-              </a:rPr>
-              <a:t>pipeline</a:t>
-            </a:r>
-            <a:endParaRPr lang="en-US" sz="870" dirty="0"/>
-          </a:p>
-        </p:txBody>
-      </p:sp>
-      <p:sp>
-        <p:nvSpPr>
-          <p:cNvPr id="22" name="Text 20"/>
-          <p:cNvSpPr/>
-          <p:nvPr/>
-        </p:nvSpPr>
-        <p:spPr>
-          <a:xfrm>
-            <a:off x="10195560" y="2807208"/>
-            <a:ext cx="2377440" cy="603504"/>
-          </a:xfrm>
-          <a:prstGeom prst="rect">
-            <a:avLst/>
-          </a:prstGeom>
-          <a:solidFill>
-            <a:srgbClr val="FFFAF1"/>
-          </a:solidFill>
-          <a:ln w="8890">
-            <a:solidFill>
-              <a:srgbClr val="D8CBB8"/>
-            </a:solidFill>
-          </a:ln>
-        </p:spPr>
-        <p:txBody>
-          <a:bodyPr wrap="square" lIns="381" tIns="381" rIns="381" bIns="381" rtlCol="0" anchor="ctr"/>
-          <a:lstStyle/>
-          <a:p>
-            <a:pPr indent="0" marL="0">
-              <a:buNone/>
-            </a:pPr>
-            <a:r>
-              <a:rPr lang="en-US" sz="870" dirty="0">
-                <a:solidFill>
-                  <a:srgbClr val="6B6375"/>
-                </a:solidFill>
-                <a:latin typeface="Calibri" pitchFamily="34" charset="0"/>
-                <a:ea typeface="Calibri" pitchFamily="34" charset="-122"/>
-                <a:cs typeface="Calibri" pitchFamily="34" charset="-120"/>
-              </a:rPr>
-              <a:t>群内任务</a:t>
-            </a:r>
-            <a:endParaRPr lang="en-US" sz="870" dirty="0"/>
-          </a:p>
-        </p:txBody>
-      </p:sp>
-      <p:sp>
-        <p:nvSpPr>
-          <p:cNvPr id="23" name="Text 21"/>
-          <p:cNvSpPr/>
-          <p:nvPr/>
-        </p:nvSpPr>
-        <p:spPr>
-          <a:xfrm>
-            <a:off x="548640" y="3447288"/>
-            <a:ext cx="1325880" cy="603504"/>
-          </a:xfrm>
-          <a:prstGeom prst="rect">
-            <a:avLst/>
-          </a:prstGeom>
-          <a:solidFill>
-            <a:srgbClr val="FBF5EA"/>
-          </a:solidFill>
-          <a:ln w="8890">
-            <a:solidFill>
-              <a:srgbClr val="D8CBB8"/>
-            </a:solidFill>
-          </a:ln>
-        </p:spPr>
-        <p:txBody>
-          <a:bodyPr wrap="square" lIns="381" tIns="381" rIns="381" bIns="381" rtlCol="0" anchor="ctr"/>
-          <a:lstStyle/>
-          <a:p>
-            <a:pPr indent="0" marL="0">
-              <a:buNone/>
-            </a:pPr>
-            <a:r>
-              <a:rPr lang="en-US" sz="870" b="1" dirty="0">
-                <a:solidFill>
-                  <a:srgbClr val="6B6375"/>
-                </a:solidFill>
-                <a:latin typeface="Calibri" pitchFamily="34" charset="0"/>
-                <a:ea typeface="Calibri" pitchFamily="34" charset="-122"/>
-                <a:cs typeface="Calibri" pitchFamily="34" charset="-120"/>
-              </a:rPr>
-              <a:t>编排</a:t>
-            </a:r>
-            <a:endParaRPr lang="en-US" sz="870" dirty="0"/>
-          </a:p>
-        </p:txBody>
-      </p:sp>
-      <p:sp>
-        <p:nvSpPr>
-          <p:cNvPr id="24" name="Text 22"/>
-          <p:cNvSpPr/>
-          <p:nvPr/>
-        </p:nvSpPr>
-        <p:spPr>
-          <a:xfrm>
-            <a:off x="1874520" y="3447288"/>
-            <a:ext cx="2423160" cy="603504"/>
-          </a:xfrm>
-          <a:prstGeom prst="rect">
-            <a:avLst/>
-          </a:prstGeom>
-          <a:solidFill>
-            <a:srgbClr val="FFF4D6"/>
-          </a:solidFill>
-          <a:ln w="8890">
-            <a:solidFill>
-              <a:srgbClr val="D8CBB8"/>
-            </a:solidFill>
-          </a:ln>
-        </p:spPr>
-        <p:txBody>
-          <a:bodyPr wrap="square" lIns="381" tIns="381" rIns="381" bIns="381" rtlCol="0" anchor="ctr"/>
-          <a:lstStyle/>
-          <a:p>
-            <a:pPr indent="0" marL="0">
-              <a:buNone/>
-            </a:pPr>
-            <a:r>
-              <a:rPr lang="en-US" sz="870" b="1" dirty="0">
+              <a:t>角色跨任务、跨天连续工作，但任务间上下文不串味。</a:t>
+            </a:r>
+            <a:endParaRPr lang="en-US" sz="1050" dirty="0"/>
+          </a:p>
+        </p:txBody>
+      </p:sp>
+      <p:sp>
+        <p:nvSpPr>
+          <p:cNvPr id="41" name="Text 39"/>
+          <p:cNvSpPr/>
+          <p:nvPr/>
+        </p:nvSpPr>
+        <p:spPr>
+          <a:xfrm>
+            <a:off x="6172200" y="5897880"/>
+            <a:ext cx="5486400" cy="256032"/>
+          </a:xfrm>
+          <a:prstGeom prst="rect">
+            <a:avLst/>
+          </a:prstGeom>
+          <a:noFill/>
+          <a:ln/>
+        </p:spPr>
+        <p:txBody>
+          <a:bodyPr wrap="square" lIns="0" tIns="0" rIns="0" bIns="0" rtlCol="0" anchor="ctr"/>
+          <a:lstStyle/>
+          <a:p>
+            <a:pPr indent="0" marL="0">
+              <a:buNone/>
+            </a:pPr>
+            <a:r>
+              <a:rPr lang="en-US" sz="1050" b="1" dirty="0">
+                <a:solidFill>
+                  <a:srgbClr val="B91C1C"/>
+                </a:solidFill>
+                <a:latin typeface="Calibri" pitchFamily="34" charset="0"/>
+                <a:ea typeface="Calibri" pitchFamily="34" charset="-122"/>
+                <a:cs typeface="Calibri" pitchFamily="34" charset="-120"/>
+              </a:rPr>
+              <a:t>效果  </a:t>
+            </a:r>
+            <a:pPr indent="0" marL="0">
+              <a:buNone/>
+            </a:pPr>
+            <a:r>
+              <a:rPr lang="en-US" sz="1050" dirty="0">
                 <a:solidFill>
                   <a:srgbClr val="14131A"/>
                 </a:solidFill>
@@ -9760,768 +10573,9 @@
                 <a:ea typeface="Calibri" pitchFamily="34" charset="-122"/>
                 <a:cs typeface="Calibri" pitchFamily="34" charset="-120"/>
               </a:rPr>
-              <a:t>Cindy + DAG + HITL</a:t>
-            </a:r>
-            <a:endParaRPr lang="en-US" sz="870" dirty="0"/>
-          </a:p>
-        </p:txBody>
-      </p:sp>
-      <p:sp>
-        <p:nvSpPr>
-          <p:cNvPr id="25" name="Text 23"/>
-          <p:cNvSpPr/>
-          <p:nvPr/>
-        </p:nvSpPr>
-        <p:spPr>
-          <a:xfrm>
-            <a:off x="4297680" y="3447288"/>
-            <a:ext cx="2103120" cy="603504"/>
-          </a:xfrm>
-          <a:prstGeom prst="rect">
-            <a:avLst/>
-          </a:prstGeom>
-          <a:solidFill>
-            <a:srgbClr val="FBF5EA"/>
-          </a:solidFill>
-          <a:ln w="8890">
-            <a:solidFill>
-              <a:srgbClr val="D8CBB8"/>
-            </a:solidFill>
-          </a:ln>
-        </p:spPr>
-        <p:txBody>
-          <a:bodyPr wrap="square" lIns="381" tIns="381" rIns="381" bIns="381" rtlCol="0" anchor="ctr"/>
-          <a:lstStyle/>
-          <a:p>
-            <a:pPr indent="0" marL="0">
-              <a:buNone/>
-            </a:pPr>
-            <a:r>
-              <a:rPr lang="en-US" sz="870" dirty="0">
-                <a:solidFill>
-                  <a:srgbClr val="6B6375"/>
-                </a:solidFill>
-                <a:latin typeface="Calibri" pitchFamily="34" charset="0"/>
-                <a:ea typeface="Calibri" pitchFamily="34" charset="-122"/>
-                <a:cs typeface="Calibri" pitchFamily="34" charset="-120"/>
-              </a:rPr>
-              <a:t>@mention / 涌现</a:t>
-            </a:r>
-            <a:endParaRPr lang="en-US" sz="870" dirty="0"/>
-          </a:p>
-        </p:txBody>
-      </p:sp>
-      <p:sp>
-        <p:nvSpPr>
-          <p:cNvPr id="26" name="Text 24"/>
-          <p:cNvSpPr/>
-          <p:nvPr/>
-        </p:nvSpPr>
-        <p:spPr>
-          <a:xfrm>
-            <a:off x="6400800" y="3447288"/>
-            <a:ext cx="1874520" cy="603504"/>
-          </a:xfrm>
-          <a:prstGeom prst="rect">
-            <a:avLst/>
-          </a:prstGeom>
-          <a:solidFill>
-            <a:srgbClr val="FBF5EA"/>
-          </a:solidFill>
-          <a:ln w="8890">
-            <a:solidFill>
-              <a:srgbClr val="D8CBB8"/>
-            </a:solidFill>
-          </a:ln>
-        </p:spPr>
-        <p:txBody>
-          <a:bodyPr wrap="square" lIns="381" tIns="381" rIns="381" bIns="381" rtlCol="0" anchor="ctr"/>
-          <a:lstStyle/>
-          <a:p>
-            <a:pPr indent="0" marL="0">
-              <a:buNone/>
-            </a:pPr>
-            <a:r>
-              <a:rPr lang="en-US" sz="870" dirty="0">
-                <a:solidFill>
-                  <a:srgbClr val="6B6375"/>
-                </a:solidFill>
-                <a:latin typeface="Calibri" pitchFamily="34" charset="0"/>
-                <a:ea typeface="Calibri" pitchFamily="34" charset="-122"/>
-                <a:cs typeface="Calibri" pitchFamily="34" charset="-120"/>
-              </a:rPr>
-              <a:t>speaker selection</a:t>
-            </a:r>
-            <a:endParaRPr lang="en-US" sz="870" dirty="0"/>
-          </a:p>
-        </p:txBody>
-      </p:sp>
-      <p:sp>
-        <p:nvSpPr>
-          <p:cNvPr id="27" name="Text 25"/>
-          <p:cNvSpPr/>
-          <p:nvPr/>
-        </p:nvSpPr>
-        <p:spPr>
-          <a:xfrm>
-            <a:off x="8275320" y="3447288"/>
-            <a:ext cx="1920240" cy="603504"/>
-          </a:xfrm>
-          <a:prstGeom prst="rect">
-            <a:avLst/>
-          </a:prstGeom>
-          <a:solidFill>
-            <a:srgbClr val="FBF5EA"/>
-          </a:solidFill>
-          <a:ln w="8890">
-            <a:solidFill>
-              <a:srgbClr val="D8CBB8"/>
-            </a:solidFill>
-          </a:ln>
-        </p:spPr>
-        <p:txBody>
-          <a:bodyPr wrap="square" lIns="381" tIns="381" rIns="381" bIns="381" rtlCol="0" anchor="ctr"/>
-          <a:lstStyle/>
-          <a:p>
-            <a:pPr indent="0" marL="0">
-              <a:buNone/>
-            </a:pPr>
-            <a:r>
-              <a:rPr lang="en-US" sz="870" dirty="0">
-                <a:solidFill>
-                  <a:srgbClr val="6B6375"/>
-                </a:solidFill>
-                <a:latin typeface="Calibri" pitchFamily="34" charset="0"/>
-                <a:ea typeface="Calibri" pitchFamily="34" charset="-122"/>
-                <a:cs typeface="Calibri" pitchFamily="34" charset="-120"/>
-              </a:rPr>
-              <a:t>固定角色阶段</a:t>
-            </a:r>
-            <a:endParaRPr lang="en-US" sz="870" dirty="0"/>
-          </a:p>
-        </p:txBody>
-      </p:sp>
-      <p:sp>
-        <p:nvSpPr>
-          <p:cNvPr id="28" name="Text 26"/>
-          <p:cNvSpPr/>
-          <p:nvPr/>
-        </p:nvSpPr>
-        <p:spPr>
-          <a:xfrm>
-            <a:off x="10195560" y="3447288"/>
-            <a:ext cx="2377440" cy="603504"/>
-          </a:xfrm>
-          <a:prstGeom prst="rect">
-            <a:avLst/>
-          </a:prstGeom>
-          <a:solidFill>
-            <a:srgbClr val="FBF5EA"/>
-          </a:solidFill>
-          <a:ln w="8890">
-            <a:solidFill>
-              <a:srgbClr val="D8CBB8"/>
-            </a:solidFill>
-          </a:ln>
-        </p:spPr>
-        <p:txBody>
-          <a:bodyPr wrap="square" lIns="381" tIns="381" rIns="381" bIns="381" rtlCol="0" anchor="ctr"/>
-          <a:lstStyle/>
-          <a:p>
-            <a:pPr indent="0" marL="0">
-              <a:buNone/>
-            </a:pPr>
-            <a:r>
-              <a:rPr lang="en-US" sz="870" dirty="0">
-                <a:solidFill>
-                  <a:srgbClr val="6B6375"/>
-                </a:solidFill>
-                <a:latin typeface="Calibri" pitchFamily="34" charset="0"/>
-                <a:ea typeface="Calibri" pitchFamily="34" charset="-122"/>
-                <a:cs typeface="Calibri" pitchFamily="34" charset="-120"/>
-              </a:rPr>
-              <a:t>Leader / Worker</a:t>
-            </a:r>
-            <a:endParaRPr lang="en-US" sz="870" dirty="0"/>
-          </a:p>
-        </p:txBody>
-      </p:sp>
-      <p:sp>
-        <p:nvSpPr>
-          <p:cNvPr id="29" name="Text 27"/>
-          <p:cNvSpPr/>
-          <p:nvPr/>
-        </p:nvSpPr>
-        <p:spPr>
-          <a:xfrm>
-            <a:off x="548640" y="4087368"/>
-            <a:ext cx="1325880" cy="603504"/>
-          </a:xfrm>
-          <a:prstGeom prst="rect">
-            <a:avLst/>
-          </a:prstGeom>
-          <a:solidFill>
-            <a:srgbClr val="FFFAF1"/>
-          </a:solidFill>
-          <a:ln w="8890">
-            <a:solidFill>
-              <a:srgbClr val="D8CBB8"/>
-            </a:solidFill>
-          </a:ln>
-        </p:spPr>
-        <p:txBody>
-          <a:bodyPr wrap="square" lIns="381" tIns="381" rIns="381" bIns="381" rtlCol="0" anchor="ctr"/>
-          <a:lstStyle/>
-          <a:p>
-            <a:pPr indent="0" marL="0">
-              <a:buNone/>
-            </a:pPr>
-            <a:r>
-              <a:rPr lang="en-US" sz="870" b="1" dirty="0">
-                <a:solidFill>
-                  <a:srgbClr val="6B6375"/>
-                </a:solidFill>
-                <a:latin typeface="Calibri" pitchFamily="34" charset="0"/>
-                <a:ea typeface="Calibri" pitchFamily="34" charset="-122"/>
-                <a:cs typeface="Calibri" pitchFamily="34" charset="-120"/>
-              </a:rPr>
-              <a:t>知识</a:t>
-            </a:r>
-            <a:endParaRPr lang="en-US" sz="870" dirty="0"/>
-          </a:p>
-        </p:txBody>
-      </p:sp>
-      <p:sp>
-        <p:nvSpPr>
-          <p:cNvPr id="30" name="Text 28"/>
-          <p:cNvSpPr/>
-          <p:nvPr/>
-        </p:nvSpPr>
-        <p:spPr>
-          <a:xfrm>
-            <a:off x="1874520" y="4087368"/>
-            <a:ext cx="2423160" cy="603504"/>
-          </a:xfrm>
-          <a:prstGeom prst="rect">
-            <a:avLst/>
-          </a:prstGeom>
-          <a:solidFill>
-            <a:srgbClr val="FFF4D6"/>
-          </a:solidFill>
-          <a:ln w="8890">
-            <a:solidFill>
-              <a:srgbClr val="D8CBB8"/>
-            </a:solidFill>
-          </a:ln>
-        </p:spPr>
-        <p:txBody>
-          <a:bodyPr wrap="square" lIns="381" tIns="381" rIns="381" bIns="381" rtlCol="0" anchor="ctr"/>
-          <a:lstStyle/>
-          <a:p>
-            <a:pPr indent="0" marL="0">
-              <a:buNone/>
-            </a:pPr>
-            <a:r>
-              <a:rPr lang="en-US" sz="870" b="1" dirty="0">
-                <a:solidFill>
-                  <a:srgbClr val="14131A"/>
-                </a:solidFill>
-                <a:latin typeface="Calibri" pitchFamily="34" charset="0"/>
-                <a:ea typeface="Calibri" pitchFamily="34" charset="-122"/>
-                <a:cs typeface="Calibri" pitchFamily="34" charset="-120"/>
-              </a:rPr>
-              <a:t>4 层作用域</a:t>
-            </a:r>
-            <a:endParaRPr lang="en-US" sz="870" dirty="0"/>
-          </a:p>
-        </p:txBody>
-      </p:sp>
-      <p:sp>
-        <p:nvSpPr>
-          <p:cNvPr id="31" name="Text 29"/>
-          <p:cNvSpPr/>
-          <p:nvPr/>
-        </p:nvSpPr>
-        <p:spPr>
-          <a:xfrm>
-            <a:off x="4297680" y="4087368"/>
-            <a:ext cx="2103120" cy="603504"/>
-          </a:xfrm>
-          <a:prstGeom prst="rect">
-            <a:avLst/>
-          </a:prstGeom>
-          <a:solidFill>
-            <a:srgbClr val="FFFAF1"/>
-          </a:solidFill>
-          <a:ln w="8890">
-            <a:solidFill>
-              <a:srgbClr val="D8CBB8"/>
-            </a:solidFill>
-          </a:ln>
-        </p:spPr>
-        <p:txBody>
-          <a:bodyPr wrap="square" lIns="381" tIns="381" rIns="381" bIns="381" rtlCol="0" anchor="ctr"/>
-          <a:lstStyle/>
-          <a:p>
-            <a:pPr indent="0" marL="0">
-              <a:buNone/>
-            </a:pPr>
-            <a:r>
-              <a:rPr lang="en-US" sz="870" dirty="0">
-                <a:solidFill>
-                  <a:srgbClr val="6B6375"/>
-                </a:solidFill>
-                <a:latin typeface="Calibri" pitchFamily="34" charset="0"/>
-                <a:ea typeface="Calibri" pitchFamily="34" charset="-122"/>
-                <a:cs typeface="Calibri" pitchFamily="34" charset="-120"/>
-              </a:rPr>
-              <a:t>频道历史</a:t>
-            </a:r>
-            <a:endParaRPr lang="en-US" sz="870" dirty="0"/>
-          </a:p>
-        </p:txBody>
-      </p:sp>
-      <p:sp>
-        <p:nvSpPr>
-          <p:cNvPr id="32" name="Text 30"/>
-          <p:cNvSpPr/>
-          <p:nvPr/>
-        </p:nvSpPr>
-        <p:spPr>
-          <a:xfrm>
-            <a:off x="6400800" y="4087368"/>
-            <a:ext cx="1874520" cy="603504"/>
-          </a:xfrm>
-          <a:prstGeom prst="rect">
-            <a:avLst/>
-          </a:prstGeom>
-          <a:solidFill>
-            <a:srgbClr val="FFFAF1"/>
-          </a:solidFill>
-          <a:ln w="8890">
-            <a:solidFill>
-              <a:srgbClr val="D8CBB8"/>
-            </a:solidFill>
-          </a:ln>
-        </p:spPr>
-        <p:txBody>
-          <a:bodyPr wrap="square" lIns="381" tIns="381" rIns="381" bIns="381" rtlCol="0" anchor="ctr"/>
-          <a:lstStyle/>
-          <a:p>
-            <a:pPr indent="0" marL="0">
-              <a:buNone/>
-            </a:pPr>
-            <a:r>
-              <a:rPr lang="en-US" sz="870" dirty="0">
-                <a:solidFill>
-                  <a:srgbClr val="6B6375"/>
-                </a:solidFill>
-                <a:latin typeface="Calibri" pitchFamily="34" charset="0"/>
-                <a:ea typeface="Calibri" pitchFamily="34" charset="-122"/>
-                <a:cs typeface="Calibri" pitchFamily="34" charset="-120"/>
-              </a:rPr>
-              <a:t>共享会话</a:t>
-            </a:r>
-            <a:endParaRPr lang="en-US" sz="870" dirty="0"/>
-          </a:p>
-        </p:txBody>
-      </p:sp>
-      <p:sp>
-        <p:nvSpPr>
-          <p:cNvPr id="33" name="Text 31"/>
-          <p:cNvSpPr/>
-          <p:nvPr/>
-        </p:nvSpPr>
-        <p:spPr>
-          <a:xfrm>
-            <a:off x="8275320" y="4087368"/>
-            <a:ext cx="1920240" cy="603504"/>
-          </a:xfrm>
-          <a:prstGeom prst="rect">
-            <a:avLst/>
-          </a:prstGeom>
-          <a:solidFill>
-            <a:srgbClr val="FFFAF1"/>
-          </a:solidFill>
-          <a:ln w="8890">
-            <a:solidFill>
-              <a:srgbClr val="D8CBB8"/>
-            </a:solidFill>
-          </a:ln>
-        </p:spPr>
-        <p:txBody>
-          <a:bodyPr wrap="square" lIns="381" tIns="381" rIns="381" bIns="381" rtlCol="0" anchor="ctr"/>
-          <a:lstStyle/>
-          <a:p>
-            <a:pPr indent="0" marL="0">
-              <a:buNone/>
-            </a:pPr>
-            <a:r>
-              <a:rPr lang="en-US" sz="870" dirty="0">
-                <a:solidFill>
-                  <a:srgbClr val="6B6375"/>
-                </a:solidFill>
-                <a:latin typeface="Calibri" pitchFamily="34" charset="0"/>
-                <a:ea typeface="Calibri" pitchFamily="34" charset="-122"/>
-                <a:cs typeface="Calibri" pitchFamily="34" charset="-120"/>
-              </a:rPr>
-              <a:t>共享消息池</a:t>
-            </a:r>
-            <a:endParaRPr lang="en-US" sz="870" dirty="0"/>
-          </a:p>
-        </p:txBody>
-      </p:sp>
-      <p:sp>
-        <p:nvSpPr>
-          <p:cNvPr id="34" name="Text 32"/>
-          <p:cNvSpPr/>
-          <p:nvPr/>
-        </p:nvSpPr>
-        <p:spPr>
-          <a:xfrm>
-            <a:off x="10195560" y="4087368"/>
-            <a:ext cx="2377440" cy="603504"/>
-          </a:xfrm>
-          <a:prstGeom prst="rect">
-            <a:avLst/>
-          </a:prstGeom>
-          <a:solidFill>
-            <a:srgbClr val="FFFAF1"/>
-          </a:solidFill>
-          <a:ln w="8890">
-            <a:solidFill>
-              <a:srgbClr val="D8CBB8"/>
-            </a:solidFill>
-          </a:ln>
-        </p:spPr>
-        <p:txBody>
-          <a:bodyPr wrap="square" lIns="381" tIns="381" rIns="381" bIns="381" rtlCol="0" anchor="ctr"/>
-          <a:lstStyle/>
-          <a:p>
-            <a:pPr indent="0" marL="0">
-              <a:buNone/>
-            </a:pPr>
-            <a:r>
-              <a:rPr lang="en-US" sz="870" dirty="0">
-                <a:solidFill>
-                  <a:srgbClr val="6B6375"/>
-                </a:solidFill>
-                <a:latin typeface="Calibri" pitchFamily="34" charset="0"/>
-                <a:ea typeface="Calibri" pitchFamily="34" charset="-122"/>
-                <a:cs typeface="Calibri" pitchFamily="34" charset="-120"/>
-              </a:rPr>
-              <a:t>房间记忆</a:t>
-            </a:r>
-            <a:endParaRPr lang="en-US" sz="870" dirty="0"/>
-          </a:p>
-        </p:txBody>
-      </p:sp>
-      <p:sp>
-        <p:nvSpPr>
-          <p:cNvPr id="35" name="Text 33"/>
-          <p:cNvSpPr/>
-          <p:nvPr/>
-        </p:nvSpPr>
-        <p:spPr>
-          <a:xfrm>
-            <a:off x="548640" y="4727448"/>
-            <a:ext cx="1325880" cy="603504"/>
-          </a:xfrm>
-          <a:prstGeom prst="rect">
-            <a:avLst/>
-          </a:prstGeom>
-          <a:solidFill>
-            <a:srgbClr val="FBF5EA"/>
-          </a:solidFill>
-          <a:ln w="8890">
-            <a:solidFill>
-              <a:srgbClr val="D8CBB8"/>
-            </a:solidFill>
-          </a:ln>
-        </p:spPr>
-        <p:txBody>
-          <a:bodyPr wrap="square" lIns="381" tIns="381" rIns="381" bIns="381" rtlCol="0" anchor="ctr"/>
-          <a:lstStyle/>
-          <a:p>
-            <a:pPr indent="0" marL="0">
-              <a:buNone/>
-            </a:pPr>
-            <a:r>
-              <a:rPr lang="en-US" sz="870" b="1" dirty="0">
-                <a:solidFill>
-                  <a:srgbClr val="6B6375"/>
-                </a:solidFill>
-                <a:latin typeface="Calibri" pitchFamily="34" charset="0"/>
-                <a:ea typeface="Calibri" pitchFamily="34" charset="-122"/>
-                <a:cs typeface="Calibri" pitchFamily="34" charset="-120"/>
-              </a:rPr>
-              <a:t>治理</a:t>
-            </a:r>
-            <a:endParaRPr lang="en-US" sz="870" dirty="0"/>
-          </a:p>
-        </p:txBody>
-      </p:sp>
-      <p:sp>
-        <p:nvSpPr>
-          <p:cNvPr id="36" name="Text 34"/>
-          <p:cNvSpPr/>
-          <p:nvPr/>
-        </p:nvSpPr>
-        <p:spPr>
-          <a:xfrm>
-            <a:off x="1874520" y="4727448"/>
-            <a:ext cx="2423160" cy="603504"/>
-          </a:xfrm>
-          <a:prstGeom prst="rect">
-            <a:avLst/>
-          </a:prstGeom>
-          <a:solidFill>
-            <a:srgbClr val="FFF4D6"/>
-          </a:solidFill>
-          <a:ln w="8890">
-            <a:solidFill>
-              <a:srgbClr val="D8CBB8"/>
-            </a:solidFill>
-          </a:ln>
-        </p:spPr>
-        <p:txBody>
-          <a:bodyPr wrap="square" lIns="381" tIns="381" rIns="381" bIns="381" rtlCol="0" anchor="ctr"/>
-          <a:lstStyle/>
-          <a:p>
-            <a:pPr indent="0" marL="0">
-              <a:buNone/>
-            </a:pPr>
-            <a:r>
-              <a:rPr lang="en-US" sz="870" b="1" dirty="0">
-                <a:solidFill>
-                  <a:srgbClr val="14131A"/>
-                </a:solidFill>
-                <a:latin typeface="Calibri" pitchFamily="34" charset="0"/>
-                <a:ea typeface="Calibri" pitchFamily="34" charset="-122"/>
-                <a:cs typeface="Calibri" pitchFamily="34" charset="-120"/>
-              </a:rPr>
-              <a:t>lease + 审计 + 证据 HITL</a:t>
-            </a:r>
-            <a:endParaRPr lang="en-US" sz="870" dirty="0"/>
-          </a:p>
-        </p:txBody>
-      </p:sp>
-      <p:sp>
-        <p:nvSpPr>
-          <p:cNvPr id="37" name="Text 35"/>
-          <p:cNvSpPr/>
-          <p:nvPr/>
-        </p:nvSpPr>
-        <p:spPr>
-          <a:xfrm>
-            <a:off x="4297680" y="4727448"/>
-            <a:ext cx="2103120" cy="603504"/>
-          </a:xfrm>
-          <a:prstGeom prst="rect">
-            <a:avLst/>
-          </a:prstGeom>
-          <a:solidFill>
-            <a:srgbClr val="FBF5EA"/>
-          </a:solidFill>
-          <a:ln w="8890">
-            <a:solidFill>
-              <a:srgbClr val="D8CBB8"/>
-            </a:solidFill>
-          </a:ln>
-        </p:spPr>
-        <p:txBody>
-          <a:bodyPr wrap="square" lIns="381" tIns="381" rIns="381" bIns="381" rtlCol="0" anchor="ctr"/>
-          <a:lstStyle/>
-          <a:p>
-            <a:pPr indent="0" marL="0">
-              <a:buNone/>
-            </a:pPr>
-            <a:r>
-              <a:rPr lang="en-US" sz="870" dirty="0">
-                <a:solidFill>
-                  <a:srgbClr val="6B6375"/>
-                </a:solidFill>
-                <a:latin typeface="Calibri" pitchFamily="34" charset="0"/>
-                <a:ea typeface="Calibri" pitchFamily="34" charset="-122"/>
-                <a:cs typeface="Calibri" pitchFamily="34" charset="-120"/>
-              </a:rPr>
-              <a:t>较弱</a:t>
-            </a:r>
-            <a:endParaRPr lang="en-US" sz="870" dirty="0"/>
-          </a:p>
-        </p:txBody>
-      </p:sp>
-      <p:sp>
-        <p:nvSpPr>
-          <p:cNvPr id="38" name="Text 36"/>
-          <p:cNvSpPr/>
-          <p:nvPr/>
-        </p:nvSpPr>
-        <p:spPr>
-          <a:xfrm>
-            <a:off x="6400800" y="4727448"/>
-            <a:ext cx="1874520" cy="603504"/>
-          </a:xfrm>
-          <a:prstGeom prst="rect">
-            <a:avLst/>
-          </a:prstGeom>
-          <a:solidFill>
-            <a:srgbClr val="FBF5EA"/>
-          </a:solidFill>
-          <a:ln w="8890">
-            <a:solidFill>
-              <a:srgbClr val="D8CBB8"/>
-            </a:solidFill>
-          </a:ln>
-        </p:spPr>
-        <p:txBody>
-          <a:bodyPr wrap="square" lIns="381" tIns="381" rIns="381" bIns="381" rtlCol="0" anchor="ctr"/>
-          <a:lstStyle/>
-          <a:p>
-            <a:pPr indent="0" marL="0">
-              <a:buNone/>
-            </a:pPr>
-            <a:r>
-              <a:rPr lang="en-US" sz="870" dirty="0">
-                <a:solidFill>
-                  <a:srgbClr val="6B6375"/>
-                </a:solidFill>
-                <a:latin typeface="Calibri" pitchFamily="34" charset="0"/>
-                <a:ea typeface="Calibri" pitchFamily="34" charset="-122"/>
-                <a:cs typeface="Calibri" pitchFamily="34" charset="-120"/>
-              </a:rPr>
-              <a:t>较弱</a:t>
-            </a:r>
-            <a:endParaRPr lang="en-US" sz="870" dirty="0"/>
-          </a:p>
-        </p:txBody>
-      </p:sp>
-      <p:sp>
-        <p:nvSpPr>
-          <p:cNvPr id="39" name="Text 37"/>
-          <p:cNvSpPr/>
-          <p:nvPr/>
-        </p:nvSpPr>
-        <p:spPr>
-          <a:xfrm>
-            <a:off x="8275320" y="4727448"/>
-            <a:ext cx="1920240" cy="603504"/>
-          </a:xfrm>
-          <a:prstGeom prst="rect">
-            <a:avLst/>
-          </a:prstGeom>
-          <a:solidFill>
-            <a:srgbClr val="FBF5EA"/>
-          </a:solidFill>
-          <a:ln w="8890">
-            <a:solidFill>
-              <a:srgbClr val="D8CBB8"/>
-            </a:solidFill>
-          </a:ln>
-        </p:spPr>
-        <p:txBody>
-          <a:bodyPr wrap="square" lIns="381" tIns="381" rIns="381" bIns="381" rtlCol="0" anchor="ctr"/>
-          <a:lstStyle/>
-          <a:p>
-            <a:pPr indent="0" marL="0">
-              <a:buNone/>
-            </a:pPr>
-            <a:r>
-              <a:rPr lang="en-US" sz="870" dirty="0">
-                <a:solidFill>
-                  <a:srgbClr val="6B6375"/>
-                </a:solidFill>
-                <a:latin typeface="Calibri" pitchFamily="34" charset="0"/>
-                <a:ea typeface="Calibri" pitchFamily="34" charset="-122"/>
-                <a:cs typeface="Calibri" pitchFamily="34" charset="-120"/>
-              </a:rPr>
-              <a:t>较弱</a:t>
-            </a:r>
-            <a:endParaRPr lang="en-US" sz="870" dirty="0"/>
-          </a:p>
-        </p:txBody>
-      </p:sp>
-      <p:sp>
-        <p:nvSpPr>
-          <p:cNvPr id="40" name="Text 38"/>
-          <p:cNvSpPr/>
-          <p:nvPr/>
-        </p:nvSpPr>
-        <p:spPr>
-          <a:xfrm>
-            <a:off x="10195560" y="4727448"/>
-            <a:ext cx="2377440" cy="603504"/>
-          </a:xfrm>
-          <a:prstGeom prst="rect">
-            <a:avLst/>
-          </a:prstGeom>
-          <a:solidFill>
-            <a:srgbClr val="FBF5EA"/>
-          </a:solidFill>
-          <a:ln w="8890">
-            <a:solidFill>
-              <a:srgbClr val="D8CBB8"/>
-            </a:solidFill>
-          </a:ln>
-        </p:spPr>
-        <p:txBody>
-          <a:bodyPr wrap="square" lIns="381" tIns="381" rIns="381" bIns="381" rtlCol="0" anchor="ctr"/>
-          <a:lstStyle/>
-          <a:p>
-            <a:pPr indent="0" marL="0">
-              <a:buNone/>
-            </a:pPr>
-            <a:r>
-              <a:rPr lang="en-US" sz="870" dirty="0">
-                <a:solidFill>
-                  <a:srgbClr val="6B6375"/>
-                </a:solidFill>
-                <a:latin typeface="Calibri" pitchFamily="34" charset="0"/>
-                <a:ea typeface="Calibri" pitchFamily="34" charset="-122"/>
-                <a:cs typeface="Calibri" pitchFamily="34" charset="-120"/>
-              </a:rPr>
-              <a:t>组织/RBAC 较强</a:t>
-            </a:r>
-            <a:endParaRPr lang="en-US" sz="870" dirty="0"/>
-          </a:p>
-        </p:txBody>
-      </p:sp>
-      <p:sp>
-        <p:nvSpPr>
-          <p:cNvPr id="41" name="Text 39"/>
-          <p:cNvSpPr/>
-          <p:nvPr/>
-        </p:nvSpPr>
-        <p:spPr>
-          <a:xfrm>
-            <a:off x="548640" y="5943600"/>
-            <a:ext cx="10972800" cy="228600"/>
-          </a:xfrm>
-          <a:prstGeom prst="rect">
-            <a:avLst/>
-          </a:prstGeom>
-          <a:noFill/>
-          <a:ln/>
-        </p:spPr>
-        <p:txBody>
-          <a:bodyPr wrap="square" lIns="0" tIns="0" rIns="0" bIns="0" rtlCol="0" anchor="ctr"/>
-          <a:lstStyle/>
-          <a:p>
-            <a:pPr indent="0" marL="0">
-              <a:buNone/>
-            </a:pPr>
-            <a:r>
-              <a:rPr lang="en-US" sz="820" dirty="0">
-                <a:solidFill>
-                  <a:srgbClr val="6B6375"/>
-                </a:solidFill>
-                <a:latin typeface="Calibri" pitchFamily="34" charset="0"/>
-                <a:ea typeface="Calibri" pitchFamily="34" charset="-122"/>
-                <a:cs typeface="Calibri" pitchFamily="34" charset="-120"/>
-              </a:rPr>
-              <a:t>来源：docs/v1.30-channel-knowledge.md §A.2–A.3；按交互、任务、编排、知识、治理分层对比。</a:t>
-            </a:r>
-            <a:endParaRPr lang="en-US" sz="820" dirty="0"/>
+              <a:t>切换可预期、可恢复；代价是 turn 边界切换与槽元数据维护。</a:t>
+            </a:r>
+            <a:endParaRPr lang="en-US" sz="1050" dirty="0"/>
           </a:p>
         </p:txBody>
       </p:sp>
@@ -10558,7 +10612,7 @@
                 <a:ea typeface="Calibri" pitchFamily="34" charset="-122"/>
                 <a:cs typeface="Calibri" pitchFamily="34" charset="-120"/>
               </a:rPr>
-              <a:t>Anvil roadmap · v1.0 → v1.30.7</a:t>
+              <a:t>Anvil roadmap · v1.0 → v1.30.8</a:t>
             </a:r>
             <a:endParaRPr lang="en-US" sz="850" dirty="0"/>
           </a:p>
@@ -10614,6 +10668,4117 @@
 <file path=ppt/slides/slide15.xml><?xml version="1.0" encoding="utf-8"?>
 <p:sld xmlns:a="http://schemas.openxmlformats.org/drawingml/2006/main" xmlns:r="http://schemas.openxmlformats.org/officeDocument/2006/relationships" xmlns:p="http://schemas.openxmlformats.org/presentationml/2006/main">
   <p:cSld name="Slide 15">
+    <p:bg>
+      <p:bgPr>
+        <a:solidFill>
+          <a:srgbClr val="F7EFE3"/>
+        </a:solidFill>
+      </p:bgPr>
+    </p:bg>
+    <p:spTree>
+      <p:nvGrpSpPr>
+        <p:cNvPr id="1" name=""/>
+        <p:cNvGrpSpPr/>
+        <p:nvPr/>
+      </p:nvGrpSpPr>
+      <p:grpSpPr>
+        <a:xfrm>
+          <a:off x="0" y="0"/>
+          <a:ext cx="0" cy="0"/>
+          <a:chOff x="0" y="0"/>
+          <a:chExt cx="0" cy="0"/>
+        </a:xfrm>
+      </p:grpSpPr>
+      <p:sp>
+        <p:nvSpPr>
+          <p:cNvPr id="2" name="Text 0"/>
+          <p:cNvSpPr/>
+          <p:nvPr/>
+        </p:nvSpPr>
+        <p:spPr>
+          <a:xfrm>
+            <a:off x="548640" y="310896"/>
+            <a:ext cx="7315200" cy="201168"/>
+          </a:xfrm>
+          <a:prstGeom prst="rect">
+            <a:avLst/>
+          </a:prstGeom>
+          <a:noFill/>
+          <a:ln/>
+        </p:spPr>
+        <p:txBody>
+          <a:bodyPr wrap="square" lIns="0" tIns="0" rIns="0" bIns="0" rtlCol="0" anchor="ctr"/>
+          <a:lstStyle/>
+          <a:p>
+            <a:pPr indent="0" marL="0">
+              <a:buNone/>
+            </a:pPr>
+            <a:r>
+              <a:rPr lang="en-US" sz="950" b="1" spc="220" kern="0" dirty="0">
+                <a:solidFill>
+                  <a:srgbClr val="0E7490"/>
+                </a:solidFill>
+                <a:latin typeface="Calibri" pitchFamily="34" charset="0"/>
+                <a:ea typeface="Calibri" pitchFamily="34" charset="-122"/>
+                <a:cs typeface="Calibri" pitchFamily="34" charset="-120"/>
+              </a:rPr>
+              <a:t>RUNTIME · CONTEXT CONTINUITY</a:t>
+            </a:r>
+            <a:endParaRPr lang="en-US" sz="950" dirty="0"/>
+          </a:p>
+        </p:txBody>
+      </p:sp>
+      <p:sp>
+        <p:nvSpPr>
+          <p:cNvPr id="3" name="Text 1"/>
+          <p:cNvSpPr/>
+          <p:nvPr/>
+        </p:nvSpPr>
+        <p:spPr>
+          <a:xfrm>
+            <a:off x="548640" y="548640"/>
+            <a:ext cx="11064240" cy="694944"/>
+          </a:xfrm>
+          <a:prstGeom prst="rect">
+            <a:avLst/>
+          </a:prstGeom>
+          <a:noFill/>
+          <a:ln/>
+        </p:spPr>
+        <p:txBody>
+          <a:bodyPr wrap="square" lIns="0" tIns="0" rIns="0" bIns="0" rtlCol="0" anchor="ctr"/>
+          <a:lstStyle/>
+          <a:p>
+            <a:pPr indent="0" marL="0">
+              <a:buNone/>
+            </a:pPr>
+            <a:r>
+              <a:rPr lang="en-US" sz="2700" b="1" dirty="0">
+                <a:solidFill>
+                  <a:srgbClr val="14131A"/>
+                </a:solidFill>
+                <a:latin typeface="Cambria" pitchFamily="34" charset="0"/>
+                <a:ea typeface="Cambria" pitchFamily="34" charset="-122"/>
+                <a:cs typeface="Cambria" pitchFamily="34" charset="-120"/>
+              </a:rPr>
+              <a:t>上下文续命：80% 换会话，90% 硬重置，CIC 重建</a:t>
+            </a:r>
+            <a:endParaRPr lang="en-US" sz="2700" dirty="0"/>
+          </a:p>
+        </p:txBody>
+      </p:sp>
+      <p:sp>
+        <p:nvSpPr>
+          <p:cNvPr id="4" name="Text 2"/>
+          <p:cNvSpPr/>
+          <p:nvPr/>
+        </p:nvSpPr>
+        <p:spPr>
+          <a:xfrm>
+            <a:off x="566928" y="1225296"/>
+            <a:ext cx="10789920" cy="365760"/>
+          </a:xfrm>
+          <a:prstGeom prst="rect">
+            <a:avLst/>
+          </a:prstGeom>
+          <a:noFill/>
+          <a:ln/>
+        </p:spPr>
+        <p:txBody>
+          <a:bodyPr wrap="square" lIns="0" tIns="0" rIns="0" bIns="0" rtlCol="0" anchor="ctr"/>
+          <a:lstStyle/>
+          <a:p>
+            <a:pPr indent="0" marL="0">
+              <a:buNone/>
+            </a:pPr>
+            <a:r>
+              <a:rPr lang="en-US" sz="1250" dirty="0">
+                <a:solidFill>
+                  <a:srgbClr val="6B6375"/>
+                </a:solidFill>
+                <a:latin typeface="Calibri" pitchFamily="34" charset="0"/>
+                <a:ea typeface="Calibri" pitchFamily="34" charset="-122"/>
+                <a:cs typeface="Calibri" pitchFamily="34" charset="-120"/>
+              </a:rPr>
+              <a:t>不依赖模型写摘要：阈值触发、只清当前任务槽、从权威状态重建。</a:t>
+            </a:r>
+            <a:endParaRPr lang="en-US" sz="1250" dirty="0"/>
+          </a:p>
+        </p:txBody>
+      </p:sp>
+      <p:sp>
+        <p:nvSpPr>
+          <p:cNvPr id="5" name="Shape 3"/>
+          <p:cNvSpPr/>
+          <p:nvPr/>
+        </p:nvSpPr>
+        <p:spPr>
+          <a:xfrm>
+            <a:off x="548640" y="1691640"/>
+            <a:ext cx="5486400" cy="2697480"/>
+          </a:xfrm>
+          <a:prstGeom prst="roundRect">
+            <a:avLst>
+              <a:gd name="adj" fmla="val 2712"/>
+            </a:avLst>
+          </a:prstGeom>
+          <a:solidFill>
+            <a:srgbClr val="FFFAF1"/>
+          </a:solidFill>
+          <a:ln w="12700">
+            <a:solidFill>
+              <a:srgbClr val="D8CBB8"/>
+            </a:solidFill>
+            <a:prstDash val="solid"/>
+          </a:ln>
+          <a:effectLst>
+            <a:outerShdw sx="100000" sy="100000" kx="0" ky="0" algn="bl" rotWithShape="0" blurRad="50800" dist="12700" dir="5400000">
+              <a:srgbClr val="000000">
+                <a:alpha val="7000"/>
+              </a:srgbClr>
+            </a:outerShdw>
+          </a:effectLst>
+        </p:spPr>
+      </p:sp>
+      <p:sp>
+        <p:nvSpPr>
+          <p:cNvPr id="6" name="Text 4"/>
+          <p:cNvSpPr/>
+          <p:nvPr/>
+        </p:nvSpPr>
+        <p:spPr>
+          <a:xfrm>
+            <a:off x="731520" y="1810512"/>
+            <a:ext cx="2377440" cy="274320"/>
+          </a:xfrm>
+          <a:prstGeom prst="rect">
+            <a:avLst/>
+          </a:prstGeom>
+          <a:noFill/>
+          <a:ln/>
+        </p:spPr>
+        <p:txBody>
+          <a:bodyPr wrap="square" lIns="0" tIns="0" rIns="0" bIns="0" rtlCol="0" anchor="ctr"/>
+          <a:lstStyle/>
+          <a:p>
+            <a:pPr indent="0" marL="0">
+              <a:buNone/>
+            </a:pPr>
+            <a:r>
+              <a:rPr lang="en-US" sz="1250" b="1" dirty="0">
+                <a:solidFill>
+                  <a:srgbClr val="14131A"/>
+                </a:solidFill>
+                <a:latin typeface="Calibri" pitchFamily="34" charset="0"/>
+                <a:ea typeface="Calibri" pitchFamily="34" charset="-122"/>
+                <a:cs typeface="Calibri" pitchFamily="34" charset="-120"/>
+              </a:rPr>
+              <a:t>什么时候换上下文</a:t>
+            </a:r>
+            <a:endParaRPr lang="en-US" sz="1250" dirty="0"/>
+          </a:p>
+        </p:txBody>
+      </p:sp>
+      <p:sp>
+        <p:nvSpPr>
+          <p:cNvPr id="7" name="Shape 5"/>
+          <p:cNvSpPr/>
+          <p:nvPr/>
+        </p:nvSpPr>
+        <p:spPr>
+          <a:xfrm>
+            <a:off x="731520" y="2212848"/>
+            <a:ext cx="566928" cy="310896"/>
+          </a:xfrm>
+          <a:prstGeom prst="roundRect">
+            <a:avLst>
+              <a:gd name="adj" fmla="val 23529"/>
+            </a:avLst>
+          </a:prstGeom>
+          <a:solidFill>
+            <a:srgbClr val="E6F6F9"/>
+          </a:solidFill>
+          <a:ln w="12700">
+            <a:solidFill>
+              <a:srgbClr val="B7DCE5"/>
+            </a:solidFill>
+            <a:prstDash val="solid"/>
+          </a:ln>
+          <a:effectLst>
+            <a:outerShdw sx="100000" sy="100000" kx="0" ky="0" algn="bl" rotWithShape="0" blurRad="50800" dist="12700" dir="5400000">
+              <a:srgbClr val="000000">
+                <a:alpha val="7000"/>
+              </a:srgbClr>
+            </a:outerShdw>
+          </a:effectLst>
+        </p:spPr>
+      </p:sp>
+      <p:sp>
+        <p:nvSpPr>
+          <p:cNvPr id="8" name="Text 6"/>
+          <p:cNvSpPr/>
+          <p:nvPr/>
+        </p:nvSpPr>
+        <p:spPr>
+          <a:xfrm>
+            <a:off x="731520" y="2258568"/>
+            <a:ext cx="566928" cy="201168"/>
+          </a:xfrm>
+          <a:prstGeom prst="rect">
+            <a:avLst/>
+          </a:prstGeom>
+          <a:noFill/>
+          <a:ln/>
+        </p:spPr>
+        <p:txBody>
+          <a:bodyPr wrap="square" lIns="0" tIns="0" rIns="0" bIns="0" rtlCol="0" anchor="ctr"/>
+          <a:lstStyle/>
+          <a:p>
+            <a:pPr algn="ctr" indent="0" marL="0">
+              <a:buNone/>
+            </a:pPr>
+            <a:r>
+              <a:rPr lang="en-US" sz="900" b="1" dirty="0">
+                <a:solidFill>
+                  <a:srgbClr val="0E7490"/>
+                </a:solidFill>
+                <a:latin typeface="Calibri" pitchFamily="34" charset="0"/>
+                <a:ea typeface="Calibri" pitchFamily="34" charset="-122"/>
+                <a:cs typeface="Calibri" pitchFamily="34" charset="-120"/>
+              </a:rPr>
+              <a:t>80%</a:t>
+            </a:r>
+            <a:endParaRPr lang="en-US" sz="900" dirty="0"/>
+          </a:p>
+        </p:txBody>
+      </p:sp>
+      <p:sp>
+        <p:nvSpPr>
+          <p:cNvPr id="9" name="Text 7"/>
+          <p:cNvSpPr/>
+          <p:nvPr/>
+        </p:nvSpPr>
+        <p:spPr>
+          <a:xfrm>
+            <a:off x="1417320" y="2231136"/>
+            <a:ext cx="4434840" cy="310896"/>
+          </a:xfrm>
+          <a:prstGeom prst="rect">
+            <a:avLst/>
+          </a:prstGeom>
+          <a:noFill/>
+          <a:ln/>
+        </p:spPr>
+        <p:txBody>
+          <a:bodyPr wrap="square" lIns="0" tIns="0" rIns="0" bIns="0" rtlCol="0" anchor="ctr"/>
+          <a:lstStyle/>
+          <a:p>
+            <a:pPr indent="0" marL="0">
+              <a:buNone/>
+            </a:pPr>
+            <a:r>
+              <a:rPr lang="en-US" sz="920" dirty="0">
+                <a:solidFill>
+                  <a:srgbClr val="14131A"/>
+                </a:solidFill>
+                <a:latin typeface="Calibri" pitchFamily="34" charset="0"/>
+                <a:ea typeface="Calibri" pitchFamily="34" charset="-122"/>
+                <a:cs typeface="Calibri" pitchFamily="34" charset="-120"/>
+              </a:rPr>
+              <a:t>轮末 ≥ 窗口 80% → 释放进程；下次 new + CIC</a:t>
+            </a:r>
+            <a:endParaRPr lang="en-US" sz="920" dirty="0"/>
+          </a:p>
+        </p:txBody>
+      </p:sp>
+      <p:sp>
+        <p:nvSpPr>
+          <p:cNvPr id="10" name="Shape 8"/>
+          <p:cNvSpPr/>
+          <p:nvPr/>
+        </p:nvSpPr>
+        <p:spPr>
+          <a:xfrm>
+            <a:off x="731520" y="2706624"/>
+            <a:ext cx="566928" cy="310896"/>
+          </a:xfrm>
+          <a:prstGeom prst="roundRect">
+            <a:avLst>
+              <a:gd name="adj" fmla="val 23529"/>
+            </a:avLst>
+          </a:prstGeom>
+          <a:solidFill>
+            <a:srgbClr val="E6F6F9"/>
+          </a:solidFill>
+          <a:ln w="12700">
+            <a:solidFill>
+              <a:srgbClr val="B7DCE5"/>
+            </a:solidFill>
+            <a:prstDash val="solid"/>
+          </a:ln>
+          <a:effectLst>
+            <a:outerShdw sx="100000" sy="100000" kx="0" ky="0" algn="bl" rotWithShape="0" blurRad="50800" dist="12700" dir="5400000">
+              <a:srgbClr val="000000">
+                <a:alpha val="7000"/>
+              </a:srgbClr>
+            </a:outerShdw>
+          </a:effectLst>
+        </p:spPr>
+      </p:sp>
+      <p:sp>
+        <p:nvSpPr>
+          <p:cNvPr id="11" name="Text 9"/>
+          <p:cNvSpPr/>
+          <p:nvPr/>
+        </p:nvSpPr>
+        <p:spPr>
+          <a:xfrm>
+            <a:off x="731520" y="2752344"/>
+            <a:ext cx="566928" cy="201168"/>
+          </a:xfrm>
+          <a:prstGeom prst="rect">
+            <a:avLst/>
+          </a:prstGeom>
+          <a:noFill/>
+          <a:ln/>
+        </p:spPr>
+        <p:txBody>
+          <a:bodyPr wrap="square" lIns="0" tIns="0" rIns="0" bIns="0" rtlCol="0" anchor="ctr"/>
+          <a:lstStyle/>
+          <a:p>
+            <a:pPr algn="ctr" indent="0" marL="0">
+              <a:buNone/>
+            </a:pPr>
+            <a:r>
+              <a:rPr lang="en-US" sz="900" b="1" dirty="0">
+                <a:solidFill>
+                  <a:srgbClr val="0E7490"/>
+                </a:solidFill>
+                <a:latin typeface="Calibri" pitchFamily="34" charset="0"/>
+                <a:ea typeface="Calibri" pitchFamily="34" charset="-122"/>
+                <a:cs typeface="Calibri" pitchFamily="34" charset="-120"/>
+              </a:rPr>
+              <a:t>90%</a:t>
+            </a:r>
+            <a:endParaRPr lang="en-US" sz="900" dirty="0"/>
+          </a:p>
+        </p:txBody>
+      </p:sp>
+      <p:sp>
+        <p:nvSpPr>
+          <p:cNvPr id="12" name="Text 10"/>
+          <p:cNvSpPr/>
+          <p:nvPr/>
+        </p:nvSpPr>
+        <p:spPr>
+          <a:xfrm>
+            <a:off x="1417320" y="2724912"/>
+            <a:ext cx="4434840" cy="310896"/>
+          </a:xfrm>
+          <a:prstGeom prst="rect">
+            <a:avLst/>
+          </a:prstGeom>
+          <a:noFill/>
+          <a:ln/>
+        </p:spPr>
+        <p:txBody>
+          <a:bodyPr wrap="square" lIns="0" tIns="0" rIns="0" bIns="0" rtlCol="0" anchor="ctr"/>
+          <a:lstStyle/>
+          <a:p>
+            <a:pPr indent="0" marL="0">
+              <a:buNone/>
+            </a:pPr>
+            <a:r>
+              <a:rPr lang="en-US" sz="920" dirty="0">
+                <a:solidFill>
+                  <a:srgbClr val="14131A"/>
+                </a:solidFill>
+                <a:latin typeface="Calibri" pitchFamily="34" charset="0"/>
+                <a:ea typeface="Calibri" pitchFamily="34" charset="-122"/>
+                <a:cs typeface="Calibri" pitchFamily="34" charset="-120"/>
+              </a:rPr>
+              <a:t>单轮内 ≥ 90% → 终止会话；写快照；CIC 重投当前 run</a:t>
+            </a:r>
+            <a:endParaRPr lang="en-US" sz="920" dirty="0"/>
+          </a:p>
+        </p:txBody>
+      </p:sp>
+      <p:sp>
+        <p:nvSpPr>
+          <p:cNvPr id="13" name="Shape 11"/>
+          <p:cNvSpPr/>
+          <p:nvPr/>
+        </p:nvSpPr>
+        <p:spPr>
+          <a:xfrm>
+            <a:off x="731520" y="3200400"/>
+            <a:ext cx="566928" cy="310896"/>
+          </a:xfrm>
+          <a:prstGeom prst="roundRect">
+            <a:avLst>
+              <a:gd name="adj" fmla="val 23529"/>
+            </a:avLst>
+          </a:prstGeom>
+          <a:solidFill>
+            <a:srgbClr val="E6F6F9"/>
+          </a:solidFill>
+          <a:ln w="12700">
+            <a:solidFill>
+              <a:srgbClr val="B7DCE5"/>
+            </a:solidFill>
+            <a:prstDash val="solid"/>
+          </a:ln>
+          <a:effectLst>
+            <a:outerShdw sx="100000" sy="100000" kx="0" ky="0" algn="bl" rotWithShape="0" blurRad="50800" dist="12700" dir="5400000">
+              <a:srgbClr val="000000">
+                <a:alpha val="7000"/>
+              </a:srgbClr>
+            </a:outerShdw>
+          </a:effectLst>
+        </p:spPr>
+      </p:sp>
+      <p:sp>
+        <p:nvSpPr>
+          <p:cNvPr id="14" name="Text 12"/>
+          <p:cNvSpPr/>
+          <p:nvPr/>
+        </p:nvSpPr>
+        <p:spPr>
+          <a:xfrm>
+            <a:off x="731520" y="3246120"/>
+            <a:ext cx="566928" cy="201168"/>
+          </a:xfrm>
+          <a:prstGeom prst="rect">
+            <a:avLst/>
+          </a:prstGeom>
+          <a:noFill/>
+          <a:ln/>
+        </p:spPr>
+        <p:txBody>
+          <a:bodyPr wrap="square" lIns="0" tIns="0" rIns="0" bIns="0" rtlCol="0" anchor="ctr"/>
+          <a:lstStyle/>
+          <a:p>
+            <a:pPr algn="ctr" indent="0" marL="0">
+              <a:buNone/>
+            </a:pPr>
+            <a:r>
+              <a:rPr lang="en-US" sz="900" b="1" dirty="0">
+                <a:solidFill>
+                  <a:srgbClr val="0E7490"/>
+                </a:solidFill>
+                <a:latin typeface="Calibri" pitchFamily="34" charset="0"/>
+                <a:ea typeface="Calibri" pitchFamily="34" charset="-122"/>
+                <a:cs typeface="Calibri" pitchFamily="34" charset="-120"/>
+              </a:rPr>
+              <a:t>API</a:t>
+            </a:r>
+            <a:endParaRPr lang="en-US" sz="900" dirty="0"/>
+          </a:p>
+        </p:txBody>
+      </p:sp>
+      <p:sp>
+        <p:nvSpPr>
+          <p:cNvPr id="15" name="Text 13"/>
+          <p:cNvSpPr/>
+          <p:nvPr/>
+        </p:nvSpPr>
+        <p:spPr>
+          <a:xfrm>
+            <a:off x="1417320" y="3218688"/>
+            <a:ext cx="4434840" cy="310896"/>
+          </a:xfrm>
+          <a:prstGeom prst="rect">
+            <a:avLst/>
+          </a:prstGeom>
+          <a:noFill/>
+          <a:ln/>
+        </p:spPr>
+        <p:txBody>
+          <a:bodyPr wrap="square" lIns="0" tIns="0" rIns="0" bIns="0" rtlCol="0" anchor="ctr"/>
+          <a:lstStyle/>
+          <a:p>
+            <a:pPr indent="0" marL="0">
+              <a:buNone/>
+            </a:pPr>
+            <a:r>
+              <a:rPr lang="en-US" sz="920" dirty="0">
+                <a:solidFill>
+                  <a:srgbClr val="14131A"/>
+                </a:solidFill>
+                <a:latin typeface="Calibri" pitchFamily="34" charset="0"/>
+                <a:ea typeface="Calibri" pitchFamily="34" charset="-122"/>
+                <a:cs typeface="Calibri" pitchFamily="34" charset="-120"/>
+              </a:rPr>
+              <a:t>真实溢出 → 按最后成功上下文 ×95% 收紧；重试 ≤3</a:t>
+            </a:r>
+            <a:endParaRPr lang="en-US" sz="920" dirty="0"/>
+          </a:p>
+        </p:txBody>
+      </p:sp>
+      <p:sp>
+        <p:nvSpPr>
+          <p:cNvPr id="16" name="Shape 14"/>
+          <p:cNvSpPr/>
+          <p:nvPr/>
+        </p:nvSpPr>
+        <p:spPr>
+          <a:xfrm>
+            <a:off x="731520" y="3694176"/>
+            <a:ext cx="566928" cy="310896"/>
+          </a:xfrm>
+          <a:prstGeom prst="roundRect">
+            <a:avLst>
+              <a:gd name="adj" fmla="val 23529"/>
+            </a:avLst>
+          </a:prstGeom>
+          <a:solidFill>
+            <a:srgbClr val="E6F6F9"/>
+          </a:solidFill>
+          <a:ln w="12700">
+            <a:solidFill>
+              <a:srgbClr val="B7DCE5"/>
+            </a:solidFill>
+            <a:prstDash val="solid"/>
+          </a:ln>
+          <a:effectLst>
+            <a:outerShdw sx="100000" sy="100000" kx="0" ky="0" algn="bl" rotWithShape="0" blurRad="50800" dist="12700" dir="5400000">
+              <a:srgbClr val="000000">
+                <a:alpha val="7000"/>
+              </a:srgbClr>
+            </a:outerShdw>
+          </a:effectLst>
+        </p:spPr>
+      </p:sp>
+      <p:sp>
+        <p:nvSpPr>
+          <p:cNvPr id="17" name="Text 15"/>
+          <p:cNvSpPr/>
+          <p:nvPr/>
+        </p:nvSpPr>
+        <p:spPr>
+          <a:xfrm>
+            <a:off x="731520" y="3739896"/>
+            <a:ext cx="566928" cy="201168"/>
+          </a:xfrm>
+          <a:prstGeom prst="rect">
+            <a:avLst/>
+          </a:prstGeom>
+          <a:noFill/>
+          <a:ln/>
+        </p:spPr>
+        <p:txBody>
+          <a:bodyPr wrap="square" lIns="0" tIns="0" rIns="0" bIns="0" rtlCol="0" anchor="ctr"/>
+          <a:lstStyle/>
+          <a:p>
+            <a:pPr algn="ctr" indent="0" marL="0">
+              <a:buNone/>
+            </a:pPr>
+            <a:r>
+              <a:rPr lang="en-US" sz="900" b="1" dirty="0">
+                <a:solidFill>
+                  <a:srgbClr val="0E7490"/>
+                </a:solidFill>
+                <a:latin typeface="Calibri" pitchFamily="34" charset="0"/>
+                <a:ea typeface="Calibri" pitchFamily="34" charset="-122"/>
+                <a:cs typeface="Calibri" pitchFamily="34" charset="-120"/>
+              </a:rPr>
+              <a:t>24MB</a:t>
+            </a:r>
+            <a:endParaRPr lang="en-US" sz="900" dirty="0"/>
+          </a:p>
+        </p:txBody>
+      </p:sp>
+      <p:sp>
+        <p:nvSpPr>
+          <p:cNvPr id="18" name="Text 16"/>
+          <p:cNvSpPr/>
+          <p:nvPr/>
+        </p:nvSpPr>
+        <p:spPr>
+          <a:xfrm>
+            <a:off x="1417320" y="3712464"/>
+            <a:ext cx="4434840" cy="310896"/>
+          </a:xfrm>
+          <a:prstGeom prst="rect">
+            <a:avLst/>
+          </a:prstGeom>
+          <a:noFill/>
+          <a:ln/>
+        </p:spPr>
+        <p:txBody>
+          <a:bodyPr wrap="square" lIns="0" tIns="0" rIns="0" bIns="0" rtlCol="0" anchor="ctr"/>
+          <a:lstStyle/>
+          <a:p>
+            <a:pPr indent="0" marL="0">
+              <a:buNone/>
+            </a:pPr>
+            <a:r>
+              <a:rPr lang="en-US" sz="920" dirty="0">
+                <a:solidFill>
+                  <a:srgbClr val="14131A"/>
+                </a:solidFill>
+                <a:latin typeface="Calibri" pitchFamily="34" charset="0"/>
+                <a:ea typeface="Calibri" pitchFamily="34" charset="-122"/>
+                <a:cs typeface="Calibri" pitchFamily="34" charset="-120"/>
+              </a:rPr>
+              <a:t>请求体超限 → 保存知识快照 + 新 CIC</a:t>
+            </a:r>
+            <a:endParaRPr lang="en-US" sz="920" dirty="0"/>
+          </a:p>
+        </p:txBody>
+      </p:sp>
+      <p:sp>
+        <p:nvSpPr>
+          <p:cNvPr id="19" name="Text 17"/>
+          <p:cNvSpPr/>
+          <p:nvPr/>
+        </p:nvSpPr>
+        <p:spPr>
+          <a:xfrm>
+            <a:off x="731520" y="4041648"/>
+            <a:ext cx="5120640" cy="219456"/>
+          </a:xfrm>
+          <a:prstGeom prst="rect">
+            <a:avLst/>
+          </a:prstGeom>
+          <a:noFill/>
+          <a:ln/>
+        </p:spPr>
+        <p:txBody>
+          <a:bodyPr wrap="square" lIns="0" tIns="0" rIns="0" bIns="0" rtlCol="0" anchor="ctr"/>
+          <a:lstStyle/>
+          <a:p>
+            <a:pPr indent="0" marL="0">
+              <a:buNone/>
+            </a:pPr>
+            <a:r>
+              <a:rPr lang="en-US" sz="830" i="1" dirty="0">
+                <a:solidFill>
+                  <a:srgbClr val="6B6375"/>
+                </a:solidFill>
+                <a:latin typeface="Calibri" pitchFamily="34" charset="0"/>
+                <a:ea typeface="Calibri" pitchFamily="34" charset="-122"/>
+                <a:cs typeface="Calibri" pitchFamily="34" charset="-120"/>
+              </a:rPr>
+              <a:t>只清当前 (role, task) 槽；其它任务槽、MEMORY、notes 不动。</a:t>
+            </a:r>
+            <a:endParaRPr lang="en-US" sz="830" dirty="0"/>
+          </a:p>
+        </p:txBody>
+      </p:sp>
+      <p:sp>
+        <p:nvSpPr>
+          <p:cNvPr id="20" name="Shape 18"/>
+          <p:cNvSpPr/>
+          <p:nvPr/>
+        </p:nvSpPr>
+        <p:spPr>
+          <a:xfrm>
+            <a:off x="6217920" y="1691640"/>
+            <a:ext cx="5440680" cy="2697480"/>
+          </a:xfrm>
+          <a:prstGeom prst="roundRect">
+            <a:avLst>
+              <a:gd name="adj" fmla="val 2712"/>
+            </a:avLst>
+          </a:prstGeom>
+          <a:solidFill>
+            <a:srgbClr val="E6F6F9"/>
+          </a:solidFill>
+          <a:ln w="12700">
+            <a:solidFill>
+              <a:srgbClr val="B7DCE5"/>
+            </a:solidFill>
+            <a:prstDash val="solid"/>
+          </a:ln>
+          <a:effectLst>
+            <a:outerShdw sx="100000" sy="100000" kx="0" ky="0" algn="bl" rotWithShape="0" blurRad="50800" dist="12700" dir="5400000">
+              <a:srgbClr val="000000">
+                <a:alpha val="7000"/>
+              </a:srgbClr>
+            </a:outerShdw>
+          </a:effectLst>
+        </p:spPr>
+      </p:sp>
+      <p:sp>
+        <p:nvSpPr>
+          <p:cNvPr id="21" name="Text 19"/>
+          <p:cNvSpPr/>
+          <p:nvPr/>
+        </p:nvSpPr>
+        <p:spPr>
+          <a:xfrm>
+            <a:off x="6382512" y="1810512"/>
+            <a:ext cx="5029200" cy="274320"/>
+          </a:xfrm>
+          <a:prstGeom prst="rect">
+            <a:avLst/>
+          </a:prstGeom>
+          <a:noFill/>
+          <a:ln/>
+        </p:spPr>
+        <p:txBody>
+          <a:bodyPr wrap="square" lIns="0" tIns="0" rIns="0" bIns="0" rtlCol="0" anchor="ctr"/>
+          <a:lstStyle/>
+          <a:p>
+            <a:pPr indent="0" marL="0">
+              <a:buNone/>
+            </a:pPr>
+            <a:r>
+              <a:rPr lang="en-US" sz="1250" b="1" dirty="0">
+                <a:solidFill>
+                  <a:srgbClr val="14131A"/>
+                </a:solidFill>
+                <a:latin typeface="Calibri" pitchFamily="34" charset="0"/>
+                <a:ea typeface="Calibri" pitchFamily="34" charset="-122"/>
+                <a:cs typeface="Calibri" pitchFamily="34" charset="-120"/>
+              </a:rPr>
+              <a:t>CIC：确定性重建（32k 字符预算）</a:t>
+            </a:r>
+            <a:endParaRPr lang="en-US" sz="1250" dirty="0"/>
+          </a:p>
+        </p:txBody>
+      </p:sp>
+      <p:sp>
+        <p:nvSpPr>
+          <p:cNvPr id="22" name="Text 20"/>
+          <p:cNvSpPr/>
+          <p:nvPr/>
+        </p:nvSpPr>
+        <p:spPr>
+          <a:xfrm>
+            <a:off x="6382512" y="2176272"/>
+            <a:ext cx="2331720" cy="182880"/>
+          </a:xfrm>
+          <a:prstGeom prst="rect">
+            <a:avLst/>
+          </a:prstGeom>
+          <a:noFill/>
+          <a:ln/>
+        </p:spPr>
+        <p:txBody>
+          <a:bodyPr wrap="square" lIns="0" tIns="0" rIns="0" bIns="0" rtlCol="0" anchor="ctr"/>
+          <a:lstStyle/>
+          <a:p>
+            <a:pPr indent="0" marL="0">
+              <a:buNone/>
+            </a:pPr>
+            <a:r>
+              <a:rPr lang="en-US" sz="840" dirty="0">
+                <a:solidFill>
+                  <a:srgbClr val="14131A"/>
+                </a:solidFill>
+                <a:latin typeface="Calibri" pitchFamily="34" charset="0"/>
+                <a:ea typeface="Calibri" pitchFamily="34" charset="-122"/>
+                <a:cs typeface="Calibri" pitchFamily="34" charset="-120"/>
+              </a:rPr>
+              <a:t>MEMORY.md 尾部</a:t>
+            </a:r>
+            <a:endParaRPr lang="en-US" sz="840" dirty="0"/>
+          </a:p>
+        </p:txBody>
+      </p:sp>
+      <p:sp>
+        <p:nvSpPr>
+          <p:cNvPr id="23" name="Shape 21"/>
+          <p:cNvSpPr/>
+          <p:nvPr/>
+        </p:nvSpPr>
+        <p:spPr>
+          <a:xfrm>
+            <a:off x="8823960" y="2212848"/>
+            <a:ext cx="2331720" cy="118872"/>
+          </a:xfrm>
+          <a:prstGeom prst="roundRect">
+            <a:avLst>
+              <a:gd name="adj" fmla="val 46154"/>
+            </a:avLst>
+          </a:prstGeom>
+          <a:solidFill>
+            <a:srgbClr val="0E7490"/>
+          </a:solidFill>
+          <a:ln w="5080">
+            <a:solidFill>
+              <a:srgbClr val="0E7490"/>
+            </a:solidFill>
+            <a:prstDash val="solid"/>
+          </a:ln>
+        </p:spPr>
+      </p:sp>
+      <p:sp>
+        <p:nvSpPr>
+          <p:cNvPr id="24" name="Text 22"/>
+          <p:cNvSpPr/>
+          <p:nvPr/>
+        </p:nvSpPr>
+        <p:spPr>
+          <a:xfrm>
+            <a:off x="11228832" y="2167128"/>
+            <a:ext cx="320040" cy="182880"/>
+          </a:xfrm>
+          <a:prstGeom prst="rect">
+            <a:avLst/>
+          </a:prstGeom>
+          <a:noFill/>
+          <a:ln/>
+        </p:spPr>
+        <p:txBody>
+          <a:bodyPr wrap="square" lIns="0" tIns="0" rIns="0" bIns="0" rtlCol="0" anchor="ctr"/>
+          <a:lstStyle/>
+          <a:p>
+            <a:pPr algn="r" indent="0" marL="0">
+              <a:buNone/>
+            </a:pPr>
+            <a:r>
+              <a:rPr lang="en-US" sz="750" dirty="0">
+                <a:solidFill>
+                  <a:srgbClr val="6B6375"/>
+                </a:solidFill>
+                <a:latin typeface="Calibri" pitchFamily="34" charset="0"/>
+                <a:ea typeface="Calibri" pitchFamily="34" charset="-122"/>
+                <a:cs typeface="Calibri" pitchFamily="34" charset="-120"/>
+              </a:rPr>
+              <a:t>4k</a:t>
+            </a:r>
+            <a:endParaRPr lang="en-US" sz="750" dirty="0"/>
+          </a:p>
+        </p:txBody>
+      </p:sp>
+      <p:sp>
+        <p:nvSpPr>
+          <p:cNvPr id="25" name="Text 23"/>
+          <p:cNvSpPr/>
+          <p:nvPr/>
+        </p:nvSpPr>
+        <p:spPr>
+          <a:xfrm>
+            <a:off x="6382512" y="2441448"/>
+            <a:ext cx="2331720" cy="182880"/>
+          </a:xfrm>
+          <a:prstGeom prst="rect">
+            <a:avLst/>
+          </a:prstGeom>
+          <a:noFill/>
+          <a:ln/>
+        </p:spPr>
+        <p:txBody>
+          <a:bodyPr wrap="square" lIns="0" tIns="0" rIns="0" bIns="0" rtlCol="0" anchor="ctr"/>
+          <a:lstStyle/>
+          <a:p>
+            <a:pPr indent="0" marL="0">
+              <a:buNone/>
+            </a:pPr>
+            <a:r>
+              <a:rPr lang="en-US" sz="840" dirty="0">
+                <a:solidFill>
+                  <a:srgbClr val="14131A"/>
+                </a:solidFill>
+                <a:latin typeface="Calibri" pitchFamily="34" charset="0"/>
+                <a:ea typeface="Calibri" pitchFamily="34" charset="-122"/>
+                <a:cs typeface="Calibri" pitchFamily="34" charset="-120"/>
+              </a:rPr>
+              <a:t>工作流进度 / 决策</a:t>
+            </a:r>
+            <a:endParaRPr lang="en-US" sz="840" dirty="0"/>
+          </a:p>
+        </p:txBody>
+      </p:sp>
+      <p:sp>
+        <p:nvSpPr>
+          <p:cNvPr id="26" name="Shape 24"/>
+          <p:cNvSpPr/>
+          <p:nvPr/>
+        </p:nvSpPr>
+        <p:spPr>
+          <a:xfrm>
+            <a:off x="8823960" y="2478024"/>
+            <a:ext cx="2331720" cy="118872"/>
+          </a:xfrm>
+          <a:prstGeom prst="roundRect">
+            <a:avLst>
+              <a:gd name="adj" fmla="val 46154"/>
+            </a:avLst>
+          </a:prstGeom>
+          <a:solidFill>
+            <a:srgbClr val="0E7490"/>
+          </a:solidFill>
+          <a:ln w="5080">
+            <a:solidFill>
+              <a:srgbClr val="0E7490"/>
+            </a:solidFill>
+            <a:prstDash val="solid"/>
+          </a:ln>
+        </p:spPr>
+      </p:sp>
+      <p:sp>
+        <p:nvSpPr>
+          <p:cNvPr id="27" name="Text 25"/>
+          <p:cNvSpPr/>
+          <p:nvPr/>
+        </p:nvSpPr>
+        <p:spPr>
+          <a:xfrm>
+            <a:off x="11228832" y="2432304"/>
+            <a:ext cx="320040" cy="182880"/>
+          </a:xfrm>
+          <a:prstGeom prst="rect">
+            <a:avLst/>
+          </a:prstGeom>
+          <a:noFill/>
+          <a:ln/>
+        </p:spPr>
+        <p:txBody>
+          <a:bodyPr wrap="square" lIns="0" tIns="0" rIns="0" bIns="0" rtlCol="0" anchor="ctr"/>
+          <a:lstStyle/>
+          <a:p>
+            <a:pPr algn="r" indent="0" marL="0">
+              <a:buNone/>
+            </a:pPr>
+            <a:r>
+              <a:rPr lang="en-US" sz="750" dirty="0">
+                <a:solidFill>
+                  <a:srgbClr val="6B6375"/>
+                </a:solidFill>
+                <a:latin typeface="Calibri" pitchFamily="34" charset="0"/>
+                <a:ea typeface="Calibri" pitchFamily="34" charset="-122"/>
+                <a:cs typeface="Calibri" pitchFamily="34" charset="-120"/>
+              </a:rPr>
+              <a:t>4k</a:t>
+            </a:r>
+            <a:endParaRPr lang="en-US" sz="750" dirty="0"/>
+          </a:p>
+        </p:txBody>
+      </p:sp>
+      <p:sp>
+        <p:nvSpPr>
+          <p:cNvPr id="28" name="Text 26"/>
+          <p:cNvSpPr/>
+          <p:nvPr/>
+        </p:nvSpPr>
+        <p:spPr>
+          <a:xfrm>
+            <a:off x="6382512" y="2706624"/>
+            <a:ext cx="2331720" cy="182880"/>
+          </a:xfrm>
+          <a:prstGeom prst="rect">
+            <a:avLst/>
+          </a:prstGeom>
+          <a:noFill/>
+          <a:ln/>
+        </p:spPr>
+        <p:txBody>
+          <a:bodyPr wrap="square" lIns="0" tIns="0" rIns="0" bIns="0" rtlCol="0" anchor="ctr"/>
+          <a:lstStyle/>
+          <a:p>
+            <a:pPr indent="0" marL="0">
+              <a:buNone/>
+            </a:pPr>
+            <a:r>
+              <a:rPr lang="en-US" sz="840" dirty="0">
+                <a:solidFill>
+                  <a:srgbClr val="14131A"/>
+                </a:solidFill>
+                <a:latin typeface="Calibri" pitchFamily="34" charset="0"/>
+                <a:ea typeface="Calibri" pitchFamily="34" charset="-122"/>
+                <a:cs typeface="Calibri" pitchFamily="34" charset="-120"/>
+              </a:rPr>
+              <a:t>最近知识快照</a:t>
+            </a:r>
+            <a:endParaRPr lang="en-US" sz="840" dirty="0"/>
+          </a:p>
+        </p:txBody>
+      </p:sp>
+      <p:sp>
+        <p:nvSpPr>
+          <p:cNvPr id="29" name="Shape 27"/>
+          <p:cNvSpPr/>
+          <p:nvPr/>
+        </p:nvSpPr>
+        <p:spPr>
+          <a:xfrm>
+            <a:off x="8823960" y="2743200"/>
+            <a:ext cx="2331720" cy="118872"/>
+          </a:xfrm>
+          <a:prstGeom prst="roundRect">
+            <a:avLst>
+              <a:gd name="adj" fmla="val 46154"/>
+            </a:avLst>
+          </a:prstGeom>
+          <a:solidFill>
+            <a:srgbClr val="0E7490"/>
+          </a:solidFill>
+          <a:ln w="5080">
+            <a:solidFill>
+              <a:srgbClr val="0E7490"/>
+            </a:solidFill>
+            <a:prstDash val="solid"/>
+          </a:ln>
+        </p:spPr>
+      </p:sp>
+      <p:sp>
+        <p:nvSpPr>
+          <p:cNvPr id="30" name="Text 28"/>
+          <p:cNvSpPr/>
+          <p:nvPr/>
+        </p:nvSpPr>
+        <p:spPr>
+          <a:xfrm>
+            <a:off x="11228832" y="2697480"/>
+            <a:ext cx="320040" cy="182880"/>
+          </a:xfrm>
+          <a:prstGeom prst="rect">
+            <a:avLst/>
+          </a:prstGeom>
+          <a:noFill/>
+          <a:ln/>
+        </p:spPr>
+        <p:txBody>
+          <a:bodyPr wrap="square" lIns="0" tIns="0" rIns="0" bIns="0" rtlCol="0" anchor="ctr"/>
+          <a:lstStyle/>
+          <a:p>
+            <a:pPr algn="r" indent="0" marL="0">
+              <a:buNone/>
+            </a:pPr>
+            <a:r>
+              <a:rPr lang="en-US" sz="750" dirty="0">
+                <a:solidFill>
+                  <a:srgbClr val="6B6375"/>
+                </a:solidFill>
+                <a:latin typeface="Calibri" pitchFamily="34" charset="0"/>
+                <a:ea typeface="Calibri" pitchFamily="34" charset="-122"/>
+                <a:cs typeface="Calibri" pitchFamily="34" charset="-120"/>
+              </a:rPr>
+              <a:t>4k</a:t>
+            </a:r>
+            <a:endParaRPr lang="en-US" sz="750" dirty="0"/>
+          </a:p>
+        </p:txBody>
+      </p:sp>
+      <p:sp>
+        <p:nvSpPr>
+          <p:cNvPr id="31" name="Text 29"/>
+          <p:cNvSpPr/>
+          <p:nvPr/>
+        </p:nvSpPr>
+        <p:spPr>
+          <a:xfrm>
+            <a:off x="6382512" y="2971800"/>
+            <a:ext cx="2331720" cy="182880"/>
+          </a:xfrm>
+          <a:prstGeom prst="rect">
+            <a:avLst/>
+          </a:prstGeom>
+          <a:noFill/>
+          <a:ln/>
+        </p:spPr>
+        <p:txBody>
+          <a:bodyPr wrap="square" lIns="0" tIns="0" rIns="0" bIns="0" rtlCol="0" anchor="ctr"/>
+          <a:lstStyle/>
+          <a:p>
+            <a:pPr indent="0" marL="0">
+              <a:buNone/>
+            </a:pPr>
+            <a:r>
+              <a:rPr lang="en-US" sz="840" dirty="0">
+                <a:solidFill>
+                  <a:srgbClr val="14131A"/>
+                </a:solidFill>
+                <a:latin typeface="Calibri" pitchFamily="34" charset="0"/>
+                <a:ea typeface="Calibri" pitchFamily="34" charset="-122"/>
+                <a:cs typeface="Calibri" pitchFamily="34" charset="-120"/>
+              </a:rPr>
+              <a:t>最近 25 条消息</a:t>
+            </a:r>
+            <a:endParaRPr lang="en-US" sz="840" dirty="0"/>
+          </a:p>
+        </p:txBody>
+      </p:sp>
+      <p:sp>
+        <p:nvSpPr>
+          <p:cNvPr id="32" name="Shape 30"/>
+          <p:cNvSpPr/>
+          <p:nvPr/>
+        </p:nvSpPr>
+        <p:spPr>
+          <a:xfrm>
+            <a:off x="8823960" y="3008376"/>
+            <a:ext cx="2331720" cy="118872"/>
+          </a:xfrm>
+          <a:prstGeom prst="roundRect">
+            <a:avLst>
+              <a:gd name="adj" fmla="val 46154"/>
+            </a:avLst>
+          </a:prstGeom>
+          <a:solidFill>
+            <a:srgbClr val="0E7490"/>
+          </a:solidFill>
+          <a:ln w="5080">
+            <a:solidFill>
+              <a:srgbClr val="0E7490"/>
+            </a:solidFill>
+            <a:prstDash val="solid"/>
+          </a:ln>
+        </p:spPr>
+      </p:sp>
+      <p:sp>
+        <p:nvSpPr>
+          <p:cNvPr id="33" name="Text 31"/>
+          <p:cNvSpPr/>
+          <p:nvPr/>
+        </p:nvSpPr>
+        <p:spPr>
+          <a:xfrm>
+            <a:off x="11228832" y="2962656"/>
+            <a:ext cx="320040" cy="182880"/>
+          </a:xfrm>
+          <a:prstGeom prst="rect">
+            <a:avLst/>
+          </a:prstGeom>
+          <a:noFill/>
+          <a:ln/>
+        </p:spPr>
+        <p:txBody>
+          <a:bodyPr wrap="square" lIns="0" tIns="0" rIns="0" bIns="0" rtlCol="0" anchor="ctr"/>
+          <a:lstStyle/>
+          <a:p>
+            <a:pPr algn="r" indent="0" marL="0">
+              <a:buNone/>
+            </a:pPr>
+            <a:r>
+              <a:rPr lang="en-US" sz="750" dirty="0">
+                <a:solidFill>
+                  <a:srgbClr val="6B6375"/>
+                </a:solidFill>
+                <a:latin typeface="Calibri" pitchFamily="34" charset="0"/>
+                <a:ea typeface="Calibri" pitchFamily="34" charset="-122"/>
+                <a:cs typeface="Calibri" pitchFamily="34" charset="-120"/>
+              </a:rPr>
+              <a:t>4k</a:t>
+            </a:r>
+            <a:endParaRPr lang="en-US" sz="750" dirty="0"/>
+          </a:p>
+        </p:txBody>
+      </p:sp>
+      <p:sp>
+        <p:nvSpPr>
+          <p:cNvPr id="34" name="Text 32"/>
+          <p:cNvSpPr/>
+          <p:nvPr/>
+        </p:nvSpPr>
+        <p:spPr>
+          <a:xfrm>
+            <a:off x="6382512" y="3236976"/>
+            <a:ext cx="2331720" cy="182880"/>
+          </a:xfrm>
+          <a:prstGeom prst="rect">
+            <a:avLst/>
+          </a:prstGeom>
+          <a:noFill/>
+          <a:ln/>
+        </p:spPr>
+        <p:txBody>
+          <a:bodyPr wrap="square" lIns="0" tIns="0" rIns="0" bIns="0" rtlCol="0" anchor="ctr"/>
+          <a:lstStyle/>
+          <a:p>
+            <a:pPr indent="0" marL="0">
+              <a:buNone/>
+            </a:pPr>
+            <a:r>
+              <a:rPr lang="en-US" sz="840" dirty="0">
+                <a:solidFill>
+                  <a:srgbClr val="14131A"/>
+                </a:solidFill>
+                <a:latin typeface="Calibri" pitchFamily="34" charset="0"/>
+                <a:ea typeface="Calibri" pitchFamily="34" charset="-122"/>
+                <a:cs typeface="Calibri" pitchFamily="34" charset="-120"/>
+              </a:rPr>
+              <a:t>按任务检索的知识</a:t>
+            </a:r>
+            <a:endParaRPr lang="en-US" sz="840" dirty="0"/>
+          </a:p>
+        </p:txBody>
+      </p:sp>
+      <p:sp>
+        <p:nvSpPr>
+          <p:cNvPr id="35" name="Shape 33"/>
+          <p:cNvSpPr/>
+          <p:nvPr/>
+        </p:nvSpPr>
+        <p:spPr>
+          <a:xfrm>
+            <a:off x="8823960" y="3273552"/>
+            <a:ext cx="2331720" cy="118872"/>
+          </a:xfrm>
+          <a:prstGeom prst="roundRect">
+            <a:avLst>
+              <a:gd name="adj" fmla="val 46154"/>
+            </a:avLst>
+          </a:prstGeom>
+          <a:solidFill>
+            <a:srgbClr val="0E7490"/>
+          </a:solidFill>
+          <a:ln w="5080">
+            <a:solidFill>
+              <a:srgbClr val="0E7490"/>
+            </a:solidFill>
+            <a:prstDash val="solid"/>
+          </a:ln>
+        </p:spPr>
+      </p:sp>
+      <p:sp>
+        <p:nvSpPr>
+          <p:cNvPr id="36" name="Text 34"/>
+          <p:cNvSpPr/>
+          <p:nvPr/>
+        </p:nvSpPr>
+        <p:spPr>
+          <a:xfrm>
+            <a:off x="11228832" y="3227832"/>
+            <a:ext cx="320040" cy="182880"/>
+          </a:xfrm>
+          <a:prstGeom prst="rect">
+            <a:avLst/>
+          </a:prstGeom>
+          <a:noFill/>
+          <a:ln/>
+        </p:spPr>
+        <p:txBody>
+          <a:bodyPr wrap="square" lIns="0" tIns="0" rIns="0" bIns="0" rtlCol="0" anchor="ctr"/>
+          <a:lstStyle/>
+          <a:p>
+            <a:pPr algn="r" indent="0" marL="0">
+              <a:buNone/>
+            </a:pPr>
+            <a:r>
+              <a:rPr lang="en-US" sz="750" dirty="0">
+                <a:solidFill>
+                  <a:srgbClr val="6B6375"/>
+                </a:solidFill>
+                <a:latin typeface="Calibri" pitchFamily="34" charset="0"/>
+                <a:ea typeface="Calibri" pitchFamily="34" charset="-122"/>
+                <a:cs typeface="Calibri" pitchFamily="34" charset="-120"/>
+              </a:rPr>
+              <a:t>4k</a:t>
+            </a:r>
+            <a:endParaRPr lang="en-US" sz="750" dirty="0"/>
+          </a:p>
+        </p:txBody>
+      </p:sp>
+      <p:sp>
+        <p:nvSpPr>
+          <p:cNvPr id="37" name="Text 35"/>
+          <p:cNvSpPr/>
+          <p:nvPr/>
+        </p:nvSpPr>
+        <p:spPr>
+          <a:xfrm>
+            <a:off x="6382512" y="3502152"/>
+            <a:ext cx="2331720" cy="182880"/>
+          </a:xfrm>
+          <a:prstGeom prst="rect">
+            <a:avLst/>
+          </a:prstGeom>
+          <a:noFill/>
+          <a:ln/>
+        </p:spPr>
+        <p:txBody>
+          <a:bodyPr wrap="square" lIns="0" tIns="0" rIns="0" bIns="0" rtlCol="0" anchor="ctr"/>
+          <a:lstStyle/>
+          <a:p>
+            <a:pPr indent="0" marL="0">
+              <a:buNone/>
+            </a:pPr>
+            <a:r>
+              <a:rPr lang="en-US" sz="840" dirty="0">
+                <a:solidFill>
+                  <a:srgbClr val="14131A"/>
+                </a:solidFill>
+                <a:latin typeface="Calibri" pitchFamily="34" charset="0"/>
+                <a:ea typeface="Calibri" pitchFamily="34" charset="-122"/>
+                <a:cs typeface="Calibri" pitchFamily="34" charset="-120"/>
+              </a:rPr>
+              <a:t>频道 + 任务知识</a:t>
+            </a:r>
+            <a:endParaRPr lang="en-US" sz="840" dirty="0"/>
+          </a:p>
+        </p:txBody>
+      </p:sp>
+      <p:sp>
+        <p:nvSpPr>
+          <p:cNvPr id="38" name="Shape 36"/>
+          <p:cNvSpPr/>
+          <p:nvPr/>
+        </p:nvSpPr>
+        <p:spPr>
+          <a:xfrm>
+            <a:off x="8823960" y="3538728"/>
+            <a:ext cx="1165860" cy="118872"/>
+          </a:xfrm>
+          <a:prstGeom prst="roundRect">
+            <a:avLst>
+              <a:gd name="adj" fmla="val 46154"/>
+            </a:avLst>
+          </a:prstGeom>
+          <a:solidFill>
+            <a:srgbClr val="7FB6C4"/>
+          </a:solidFill>
+          <a:ln w="5080">
+            <a:solidFill>
+              <a:srgbClr val="0E7490"/>
+            </a:solidFill>
+            <a:prstDash val="solid"/>
+          </a:ln>
+        </p:spPr>
+      </p:sp>
+      <p:sp>
+        <p:nvSpPr>
+          <p:cNvPr id="39" name="Text 37"/>
+          <p:cNvSpPr/>
+          <p:nvPr/>
+        </p:nvSpPr>
+        <p:spPr>
+          <a:xfrm>
+            <a:off x="11228832" y="3493008"/>
+            <a:ext cx="320040" cy="182880"/>
+          </a:xfrm>
+          <a:prstGeom prst="rect">
+            <a:avLst/>
+          </a:prstGeom>
+          <a:noFill/>
+          <a:ln/>
+        </p:spPr>
+        <p:txBody>
+          <a:bodyPr wrap="square" lIns="0" tIns="0" rIns="0" bIns="0" rtlCol="0" anchor="ctr"/>
+          <a:lstStyle/>
+          <a:p>
+            <a:pPr algn="r" indent="0" marL="0">
+              <a:buNone/>
+            </a:pPr>
+            <a:r>
+              <a:rPr lang="en-US" sz="750" dirty="0">
+                <a:solidFill>
+                  <a:srgbClr val="6B6375"/>
+                </a:solidFill>
+                <a:latin typeface="Calibri" pitchFamily="34" charset="0"/>
+                <a:ea typeface="Calibri" pitchFamily="34" charset="-122"/>
+                <a:cs typeface="Calibri" pitchFamily="34" charset="-120"/>
+              </a:rPr>
+              <a:t>2k</a:t>
+            </a:r>
+            <a:endParaRPr lang="en-US" sz="750" dirty="0"/>
+          </a:p>
+        </p:txBody>
+      </p:sp>
+      <p:sp>
+        <p:nvSpPr>
+          <p:cNvPr id="40" name="Text 38"/>
+          <p:cNvSpPr/>
+          <p:nvPr/>
+        </p:nvSpPr>
+        <p:spPr>
+          <a:xfrm>
+            <a:off x="6382512" y="3767328"/>
+            <a:ext cx="2331720" cy="182880"/>
+          </a:xfrm>
+          <a:prstGeom prst="rect">
+            <a:avLst/>
+          </a:prstGeom>
+          <a:noFill/>
+          <a:ln/>
+        </p:spPr>
+        <p:txBody>
+          <a:bodyPr wrap="square" lIns="0" tIns="0" rIns="0" bIns="0" rtlCol="0" anchor="ctr"/>
+          <a:lstStyle/>
+          <a:p>
+            <a:pPr indent="0" marL="0">
+              <a:buNone/>
+            </a:pPr>
+            <a:r>
+              <a:rPr lang="en-US" sz="840" dirty="0">
+                <a:solidFill>
+                  <a:srgbClr val="14131A"/>
+                </a:solidFill>
+                <a:latin typeface="Calibri" pitchFamily="34" charset="0"/>
+                <a:ea typeface="Calibri" pitchFamily="34" charset="-122"/>
+                <a:cs typeface="Calibri" pitchFamily="34" charset="-120"/>
+              </a:rPr>
+              <a:t>共享经验</a:t>
+            </a:r>
+            <a:endParaRPr lang="en-US" sz="840" dirty="0"/>
+          </a:p>
+        </p:txBody>
+      </p:sp>
+      <p:sp>
+        <p:nvSpPr>
+          <p:cNvPr id="41" name="Shape 39"/>
+          <p:cNvSpPr/>
+          <p:nvPr/>
+        </p:nvSpPr>
+        <p:spPr>
+          <a:xfrm>
+            <a:off x="8823960" y="3803904"/>
+            <a:ext cx="874395" cy="118872"/>
+          </a:xfrm>
+          <a:prstGeom prst="roundRect">
+            <a:avLst>
+              <a:gd name="adj" fmla="val 46154"/>
+            </a:avLst>
+          </a:prstGeom>
+          <a:solidFill>
+            <a:srgbClr val="7FB6C4"/>
+          </a:solidFill>
+          <a:ln w="5080">
+            <a:solidFill>
+              <a:srgbClr val="0E7490"/>
+            </a:solidFill>
+            <a:prstDash val="solid"/>
+          </a:ln>
+        </p:spPr>
+      </p:sp>
+      <p:sp>
+        <p:nvSpPr>
+          <p:cNvPr id="42" name="Text 40"/>
+          <p:cNvSpPr/>
+          <p:nvPr/>
+        </p:nvSpPr>
+        <p:spPr>
+          <a:xfrm>
+            <a:off x="11228832" y="3758184"/>
+            <a:ext cx="320040" cy="182880"/>
+          </a:xfrm>
+          <a:prstGeom prst="rect">
+            <a:avLst/>
+          </a:prstGeom>
+          <a:noFill/>
+          <a:ln/>
+        </p:spPr>
+        <p:txBody>
+          <a:bodyPr wrap="square" lIns="0" tIns="0" rIns="0" bIns="0" rtlCol="0" anchor="ctr"/>
+          <a:lstStyle/>
+          <a:p>
+            <a:pPr algn="r" indent="0" marL="0">
+              <a:buNone/>
+            </a:pPr>
+            <a:r>
+              <a:rPr lang="en-US" sz="750" dirty="0">
+                <a:solidFill>
+                  <a:srgbClr val="6B6375"/>
+                </a:solidFill>
+                <a:latin typeface="Calibri" pitchFamily="34" charset="0"/>
+                <a:ea typeface="Calibri" pitchFamily="34" charset="-122"/>
+                <a:cs typeface="Calibri" pitchFamily="34" charset="-120"/>
+              </a:rPr>
+              <a:t>1.5k</a:t>
+            </a:r>
+            <a:endParaRPr lang="en-US" sz="750" dirty="0"/>
+          </a:p>
+        </p:txBody>
+      </p:sp>
+      <p:sp>
+        <p:nvSpPr>
+          <p:cNvPr id="43" name="Text 41"/>
+          <p:cNvSpPr/>
+          <p:nvPr/>
+        </p:nvSpPr>
+        <p:spPr>
+          <a:xfrm>
+            <a:off x="6382512" y="4032504"/>
+            <a:ext cx="2331720" cy="182880"/>
+          </a:xfrm>
+          <a:prstGeom prst="rect">
+            <a:avLst/>
+          </a:prstGeom>
+          <a:noFill/>
+          <a:ln/>
+        </p:spPr>
+        <p:txBody>
+          <a:bodyPr wrap="square" lIns="0" tIns="0" rIns="0" bIns="0" rtlCol="0" anchor="ctr"/>
+          <a:lstStyle/>
+          <a:p>
+            <a:pPr indent="0" marL="0">
+              <a:buNone/>
+            </a:pPr>
+            <a:r>
+              <a:rPr lang="en-US" sz="840" dirty="0">
+                <a:solidFill>
+                  <a:srgbClr val="14131A"/>
+                </a:solidFill>
+                <a:latin typeface="Calibri" pitchFamily="34" charset="0"/>
+                <a:ea typeface="Calibri" pitchFamily="34" charset="-122"/>
+                <a:cs typeface="Calibri" pitchFamily="34" charset="-120"/>
+              </a:rPr>
+              <a:t>知识库索引</a:t>
+            </a:r>
+            <a:endParaRPr lang="en-US" sz="840" dirty="0"/>
+          </a:p>
+        </p:txBody>
+      </p:sp>
+      <p:sp>
+        <p:nvSpPr>
+          <p:cNvPr id="44" name="Shape 42"/>
+          <p:cNvSpPr/>
+          <p:nvPr/>
+        </p:nvSpPr>
+        <p:spPr>
+          <a:xfrm>
+            <a:off x="8823960" y="4069080"/>
+            <a:ext cx="699516" cy="118872"/>
+          </a:xfrm>
+          <a:prstGeom prst="roundRect">
+            <a:avLst>
+              <a:gd name="adj" fmla="val 46154"/>
+            </a:avLst>
+          </a:prstGeom>
+          <a:solidFill>
+            <a:srgbClr val="7FB6C4"/>
+          </a:solidFill>
+          <a:ln w="5080">
+            <a:solidFill>
+              <a:srgbClr val="0E7490"/>
+            </a:solidFill>
+            <a:prstDash val="solid"/>
+          </a:ln>
+        </p:spPr>
+      </p:sp>
+      <p:sp>
+        <p:nvSpPr>
+          <p:cNvPr id="45" name="Text 43"/>
+          <p:cNvSpPr/>
+          <p:nvPr/>
+        </p:nvSpPr>
+        <p:spPr>
+          <a:xfrm>
+            <a:off x="11228832" y="4023360"/>
+            <a:ext cx="320040" cy="182880"/>
+          </a:xfrm>
+          <a:prstGeom prst="rect">
+            <a:avLst/>
+          </a:prstGeom>
+          <a:noFill/>
+          <a:ln/>
+        </p:spPr>
+        <p:txBody>
+          <a:bodyPr wrap="square" lIns="0" tIns="0" rIns="0" bIns="0" rtlCol="0" anchor="ctr"/>
+          <a:lstStyle/>
+          <a:p>
+            <a:pPr algn="r" indent="0" marL="0">
+              <a:buNone/>
+            </a:pPr>
+            <a:r>
+              <a:rPr lang="en-US" sz="750" dirty="0">
+                <a:solidFill>
+                  <a:srgbClr val="6B6375"/>
+                </a:solidFill>
+                <a:latin typeface="Calibri" pitchFamily="34" charset="0"/>
+                <a:ea typeface="Calibri" pitchFamily="34" charset="-122"/>
+                <a:cs typeface="Calibri" pitchFamily="34" charset="-120"/>
+              </a:rPr>
+              <a:t>1.2k</a:t>
+            </a:r>
+            <a:endParaRPr lang="en-US" sz="750" dirty="0"/>
+          </a:p>
+        </p:txBody>
+      </p:sp>
+      <p:sp>
+        <p:nvSpPr>
+          <p:cNvPr id="46" name="Text 44"/>
+          <p:cNvSpPr/>
+          <p:nvPr/>
+        </p:nvSpPr>
+        <p:spPr>
+          <a:xfrm>
+            <a:off x="6382512" y="4242816"/>
+            <a:ext cx="4937760" cy="137160"/>
+          </a:xfrm>
+          <a:prstGeom prst="rect">
+            <a:avLst/>
+          </a:prstGeom>
+          <a:noFill/>
+          <a:ln/>
+        </p:spPr>
+        <p:txBody>
+          <a:bodyPr wrap="square" lIns="0" tIns="0" rIns="0" bIns="0" rtlCol="0" anchor="ctr"/>
+          <a:lstStyle/>
+          <a:p>
+            <a:pPr indent="0" marL="0">
+              <a:buNone/>
+            </a:pPr>
+            <a:r>
+              <a:rPr lang="en-US" sz="780" i="1" dirty="0">
+                <a:solidFill>
+                  <a:srgbClr val="6B6375"/>
+                </a:solidFill>
+                <a:latin typeface="Calibri" pitchFamily="34" charset="0"/>
+                <a:ea typeface="Calibri" pitchFamily="34" charset="-122"/>
+                <a:cs typeface="Calibri" pitchFamily="34" charset="-120"/>
+              </a:rPr>
+              <a:t>按优先级打包，预算不足先丢低优先级块</a:t>
+            </a:r>
+            <a:endParaRPr lang="en-US" sz="780" dirty="0"/>
+          </a:p>
+        </p:txBody>
+      </p:sp>
+      <p:sp>
+        <p:nvSpPr>
+          <p:cNvPr id="47" name="Shape 45"/>
+          <p:cNvSpPr/>
+          <p:nvPr/>
+        </p:nvSpPr>
+        <p:spPr>
+          <a:xfrm>
+            <a:off x="548640" y="4526280"/>
+            <a:ext cx="11109960" cy="292608"/>
+          </a:xfrm>
+          <a:prstGeom prst="roundRect">
+            <a:avLst>
+              <a:gd name="adj" fmla="val 25000"/>
+            </a:avLst>
+          </a:prstGeom>
+          <a:solidFill>
+            <a:srgbClr val="FFF4D6"/>
+          </a:solidFill>
+          <a:ln w="12700">
+            <a:solidFill>
+              <a:srgbClr val="E7D39B"/>
+            </a:solidFill>
+            <a:prstDash val="solid"/>
+          </a:ln>
+          <a:effectLst>
+            <a:outerShdw sx="100000" sy="100000" kx="0" ky="0" algn="bl" rotWithShape="0" blurRad="50800" dist="12700" dir="5400000">
+              <a:srgbClr val="000000">
+                <a:alpha val="7000"/>
+              </a:srgbClr>
+            </a:outerShdw>
+          </a:effectLst>
+        </p:spPr>
+      </p:sp>
+      <p:sp>
+        <p:nvSpPr>
+          <p:cNvPr id="48" name="Text 46"/>
+          <p:cNvSpPr/>
+          <p:nvPr/>
+        </p:nvSpPr>
+        <p:spPr>
+          <a:xfrm>
+            <a:off x="731520" y="4572000"/>
+            <a:ext cx="10789920" cy="201168"/>
+          </a:xfrm>
+          <a:prstGeom prst="rect">
+            <a:avLst/>
+          </a:prstGeom>
+          <a:noFill/>
+          <a:ln/>
+        </p:spPr>
+        <p:txBody>
+          <a:bodyPr wrap="square" lIns="0" tIns="0" rIns="0" bIns="0" rtlCol="0" anchor="ctr"/>
+          <a:lstStyle/>
+          <a:p>
+            <a:pPr indent="0" marL="0">
+              <a:buNone/>
+            </a:pPr>
+            <a:r>
+              <a:rPr lang="en-US" sz="900" dirty="0">
+                <a:solidFill>
+                  <a:srgbClr val="14131A"/>
+                </a:solidFill>
+                <a:latin typeface="Calibri" pitchFamily="34" charset="0"/>
+                <a:ea typeface="Calibri" pitchFamily="34" charset="-122"/>
+                <a:cs typeface="Calibri" pitchFamily="34" charset="-120"/>
+              </a:rPr>
+              <a:t>恢复已有会话：按 last_seen_activity_id 注入「离开期间增量」+ 当前 run prompt；不重放整段历史。</a:t>
+            </a:r>
+            <a:endParaRPr lang="en-US" sz="900" dirty="0"/>
+          </a:p>
+        </p:txBody>
+      </p:sp>
+      <p:sp>
+        <p:nvSpPr>
+          <p:cNvPr id="49" name="Shape 47"/>
+          <p:cNvSpPr/>
+          <p:nvPr/>
+        </p:nvSpPr>
+        <p:spPr>
+          <a:xfrm>
+            <a:off x="548640" y="4937760"/>
+            <a:ext cx="11109960" cy="841248"/>
+          </a:xfrm>
+          <a:prstGeom prst="roundRect">
+            <a:avLst>
+              <a:gd name="adj" fmla="val 8696"/>
+            </a:avLst>
+          </a:prstGeom>
+          <a:solidFill>
+            <a:srgbClr val="E6F6F9"/>
+          </a:solidFill>
+          <a:ln w="12700">
+            <a:solidFill>
+              <a:srgbClr val="B7DCE5"/>
+            </a:solidFill>
+            <a:prstDash val="solid"/>
+          </a:ln>
+          <a:effectLst>
+            <a:outerShdw sx="100000" sy="100000" kx="0" ky="0" algn="bl" rotWithShape="0" blurRad="50800" dist="12700" dir="5400000">
+              <a:srgbClr val="000000">
+                <a:alpha val="7000"/>
+              </a:srgbClr>
+            </a:outerShdw>
+          </a:effectLst>
+        </p:spPr>
+      </p:sp>
+      <p:sp>
+        <p:nvSpPr>
+          <p:cNvPr id="50" name="Text 48"/>
+          <p:cNvSpPr/>
+          <p:nvPr/>
+        </p:nvSpPr>
+        <p:spPr>
+          <a:xfrm>
+            <a:off x="713232" y="5029200"/>
+            <a:ext cx="1143000" cy="201168"/>
+          </a:xfrm>
+          <a:prstGeom prst="rect">
+            <a:avLst/>
+          </a:prstGeom>
+          <a:noFill/>
+          <a:ln/>
+        </p:spPr>
+        <p:txBody>
+          <a:bodyPr wrap="square" lIns="0" tIns="0" rIns="0" bIns="0" rtlCol="0" anchor="ctr"/>
+          <a:lstStyle/>
+          <a:p>
+            <a:pPr indent="0" marL="0">
+              <a:buNone/>
+            </a:pPr>
+            <a:r>
+              <a:rPr lang="en-US" sz="950" b="1" dirty="0">
+                <a:solidFill>
+                  <a:srgbClr val="0E7490"/>
+                </a:solidFill>
+                <a:latin typeface="Calibri" pitchFamily="34" charset="0"/>
+                <a:ea typeface="Calibri" pitchFamily="34" charset="-122"/>
+                <a:cs typeface="Calibri" pitchFamily="34" charset="-120"/>
+              </a:rPr>
+              <a:t>同行对比</a:t>
+            </a:r>
+            <a:endParaRPr lang="en-US" sz="950" dirty="0"/>
+          </a:p>
+        </p:txBody>
+      </p:sp>
+      <p:sp>
+        <p:nvSpPr>
+          <p:cNvPr id="51" name="Text 49"/>
+          <p:cNvSpPr/>
+          <p:nvPr/>
+        </p:nvSpPr>
+        <p:spPr>
+          <a:xfrm>
+            <a:off x="1920240" y="5020056"/>
+            <a:ext cx="3075432" cy="201168"/>
+          </a:xfrm>
+          <a:prstGeom prst="rect">
+            <a:avLst/>
+          </a:prstGeom>
+          <a:noFill/>
+          <a:ln/>
+        </p:spPr>
+        <p:txBody>
+          <a:bodyPr wrap="square" lIns="0" tIns="0" rIns="0" bIns="0" rtlCol="0" anchor="ctr"/>
+          <a:lstStyle/>
+          <a:p>
+            <a:pPr indent="0" marL="0">
+              <a:buNone/>
+            </a:pPr>
+            <a:r>
+              <a:rPr lang="en-US" sz="950" b="1" dirty="0">
+                <a:solidFill>
+                  <a:srgbClr val="14131A"/>
+                </a:solidFill>
+                <a:latin typeface="Calibri" pitchFamily="34" charset="0"/>
+                <a:ea typeface="Calibri" pitchFamily="34" charset="-122"/>
+                <a:cs typeface="Calibri" pitchFamily="34" charset="-120"/>
+              </a:rPr>
+              <a:t>Claude Code auto-compact</a:t>
+            </a:r>
+            <a:endParaRPr lang="en-US" sz="950" dirty="0"/>
+          </a:p>
+        </p:txBody>
+      </p:sp>
+      <p:sp>
+        <p:nvSpPr>
+          <p:cNvPr id="52" name="Text 50"/>
+          <p:cNvSpPr/>
+          <p:nvPr/>
+        </p:nvSpPr>
+        <p:spPr>
+          <a:xfrm>
+            <a:off x="1920240" y="5212080"/>
+            <a:ext cx="3075432" cy="475488"/>
+          </a:xfrm>
+          <a:prstGeom prst="rect">
+            <a:avLst/>
+          </a:prstGeom>
+          <a:noFill/>
+          <a:ln/>
+        </p:spPr>
+        <p:txBody>
+          <a:bodyPr wrap="square" lIns="0" tIns="0" rIns="0" bIns="0" rtlCol="0" anchor="t"/>
+          <a:lstStyle/>
+          <a:p>
+            <a:pPr indent="0" marL="0">
+              <a:buNone/>
+            </a:pPr>
+            <a:r>
+              <a:rPr lang="en-US" sz="820" dirty="0">
+                <a:solidFill>
+                  <a:srgbClr val="6B6375"/>
+                </a:solidFill>
+                <a:latin typeface="Calibri" pitchFamily="34" charset="0"/>
+                <a:ea typeface="Calibri" pitchFamily="34" charset="-122"/>
+                <a:cs typeface="Calibri" pitchFamily="34" charset="-120"/>
+              </a:rPr>
+              <a:t>轮次边界在同一会话内摘要压缩；Anvil 到阈值直接换会话 + 确定性 CIC。</a:t>
+            </a:r>
+            <a:endParaRPr lang="en-US" sz="820" dirty="0"/>
+          </a:p>
+        </p:txBody>
+      </p:sp>
+      <p:sp>
+        <p:nvSpPr>
+          <p:cNvPr id="53" name="Text 51"/>
+          <p:cNvSpPr/>
+          <p:nvPr/>
+        </p:nvSpPr>
+        <p:spPr>
+          <a:xfrm>
+            <a:off x="5160264" y="5020056"/>
+            <a:ext cx="3075432" cy="201168"/>
+          </a:xfrm>
+          <a:prstGeom prst="rect">
+            <a:avLst/>
+          </a:prstGeom>
+          <a:noFill/>
+          <a:ln/>
+        </p:spPr>
+        <p:txBody>
+          <a:bodyPr wrap="square" lIns="0" tIns="0" rIns="0" bIns="0" rtlCol="0" anchor="ctr"/>
+          <a:lstStyle/>
+          <a:p>
+            <a:pPr indent="0" marL="0">
+              <a:buNone/>
+            </a:pPr>
+            <a:r>
+              <a:rPr lang="en-US" sz="950" b="1" dirty="0">
+                <a:solidFill>
+                  <a:srgbClr val="14131A"/>
+                </a:solidFill>
+                <a:latin typeface="Calibri" pitchFamily="34" charset="0"/>
+                <a:ea typeface="Calibri" pitchFamily="34" charset="-122"/>
+                <a:cs typeface="Calibri" pitchFamily="34" charset="-120"/>
+              </a:rPr>
+              <a:t>Raft CIC</a:t>
+            </a:r>
+            <a:endParaRPr lang="en-US" sz="950" dirty="0"/>
+          </a:p>
+        </p:txBody>
+      </p:sp>
+      <p:sp>
+        <p:nvSpPr>
+          <p:cNvPr id="54" name="Text 52"/>
+          <p:cNvSpPr/>
+          <p:nvPr/>
+        </p:nvSpPr>
+        <p:spPr>
+          <a:xfrm>
+            <a:off x="5160264" y="5212080"/>
+            <a:ext cx="3075432" cy="475488"/>
+          </a:xfrm>
+          <a:prstGeom prst="rect">
+            <a:avLst/>
+          </a:prstGeom>
+          <a:noFill/>
+          <a:ln/>
+        </p:spPr>
+        <p:txBody>
+          <a:bodyPr wrap="square" lIns="0" tIns="0" rIns="0" bIns="0" rtlCol="0" anchor="t"/>
+          <a:lstStyle/>
+          <a:p>
+            <a:pPr indent="0" marL="0">
+              <a:buNone/>
+            </a:pPr>
+            <a:r>
+              <a:rPr lang="en-US" sz="820" dirty="0">
+                <a:solidFill>
+                  <a:srgbClr val="6B6375"/>
+                </a:solidFill>
+                <a:latin typeface="Calibri" pitchFamily="34" charset="0"/>
+                <a:ea typeface="Calibri" pitchFamily="34" charset="-122"/>
+                <a:cs typeface="Calibri" pitchFamily="34" charset="-120"/>
+              </a:rPr>
+              <a:t>冷唤醒用构造初始上下文重建；Anvil 增加任务/工作流/知识快照与槽隔离。</a:t>
+            </a:r>
+            <a:endParaRPr lang="en-US" sz="820" dirty="0"/>
+          </a:p>
+        </p:txBody>
+      </p:sp>
+      <p:sp>
+        <p:nvSpPr>
+          <p:cNvPr id="55" name="Text 53"/>
+          <p:cNvSpPr/>
+          <p:nvPr/>
+        </p:nvSpPr>
+        <p:spPr>
+          <a:xfrm>
+            <a:off x="8400288" y="5020056"/>
+            <a:ext cx="3075432" cy="201168"/>
+          </a:xfrm>
+          <a:prstGeom prst="rect">
+            <a:avLst/>
+          </a:prstGeom>
+          <a:noFill/>
+          <a:ln/>
+        </p:spPr>
+        <p:txBody>
+          <a:bodyPr wrap="square" lIns="0" tIns="0" rIns="0" bIns="0" rtlCol="0" anchor="ctr"/>
+          <a:lstStyle/>
+          <a:p>
+            <a:pPr indent="0" marL="0">
+              <a:buNone/>
+            </a:pPr>
+            <a:r>
+              <a:rPr lang="en-US" sz="950" b="1" dirty="0">
+                <a:solidFill>
+                  <a:srgbClr val="14131A"/>
+                </a:solidFill>
+                <a:latin typeface="Calibri" pitchFamily="34" charset="0"/>
+                <a:ea typeface="Calibri" pitchFamily="34" charset="-122"/>
+                <a:cs typeface="Calibri" pitchFamily="34" charset="-120"/>
+              </a:rPr>
+              <a:t>MemGPT / Mem0</a:t>
+            </a:r>
+            <a:endParaRPr lang="en-US" sz="950" dirty="0"/>
+          </a:p>
+        </p:txBody>
+      </p:sp>
+      <p:sp>
+        <p:nvSpPr>
+          <p:cNvPr id="56" name="Text 54"/>
+          <p:cNvSpPr/>
+          <p:nvPr/>
+        </p:nvSpPr>
+        <p:spPr>
+          <a:xfrm>
+            <a:off x="8400288" y="5212080"/>
+            <a:ext cx="3075432" cy="475488"/>
+          </a:xfrm>
+          <a:prstGeom prst="rect">
+            <a:avLst/>
+          </a:prstGeom>
+          <a:noFill/>
+          <a:ln/>
+        </p:spPr>
+        <p:txBody>
+          <a:bodyPr wrap="square" lIns="0" tIns="0" rIns="0" bIns="0" rtlCol="0" anchor="t"/>
+          <a:lstStyle/>
+          <a:p>
+            <a:pPr indent="0" marL="0">
+              <a:buNone/>
+            </a:pPr>
+            <a:r>
+              <a:rPr lang="en-US" sz="820" dirty="0">
+                <a:solidFill>
+                  <a:srgbClr val="6B6375"/>
+                </a:solidFill>
+                <a:latin typeface="Calibri" pitchFamily="34" charset="0"/>
+                <a:ea typeface="Calibri" pitchFamily="34" charset="-122"/>
+                <a:cs typeface="Calibri" pitchFamily="34" charset="-120"/>
+              </a:rPr>
+              <a:t>分层记忆与自动摘要；Anvil 以文件/DB 为权威源，避免摘要漂移。</a:t>
+            </a:r>
+            <a:endParaRPr lang="en-US" sz="820" dirty="0"/>
+          </a:p>
+        </p:txBody>
+      </p:sp>
+      <p:sp>
+        <p:nvSpPr>
+          <p:cNvPr id="57" name="Text 55"/>
+          <p:cNvSpPr/>
+          <p:nvPr/>
+        </p:nvSpPr>
+        <p:spPr>
+          <a:xfrm>
+            <a:off x="548640" y="5897880"/>
+            <a:ext cx="5486400" cy="256032"/>
+          </a:xfrm>
+          <a:prstGeom prst="rect">
+            <a:avLst/>
+          </a:prstGeom>
+          <a:noFill/>
+          <a:ln/>
+        </p:spPr>
+        <p:txBody>
+          <a:bodyPr wrap="square" lIns="0" tIns="0" rIns="0" bIns="0" rtlCol="0" anchor="ctr"/>
+          <a:lstStyle/>
+          <a:p>
+            <a:pPr indent="0" marL="0">
+              <a:buNone/>
+            </a:pPr>
+            <a:r>
+              <a:rPr lang="en-US" sz="1050" b="1" dirty="0">
+                <a:solidFill>
+                  <a:srgbClr val="0E7490"/>
+                </a:solidFill>
+                <a:latin typeface="Calibri" pitchFamily="34" charset="0"/>
+                <a:ea typeface="Calibri" pitchFamily="34" charset="-122"/>
+                <a:cs typeface="Calibri" pitchFamily="34" charset="-120"/>
+              </a:rPr>
+              <a:t>目标  </a:t>
+            </a:r>
+            <a:pPr indent="0" marL="0">
+              <a:buNone/>
+            </a:pPr>
+            <a:r>
+              <a:rPr lang="en-US" sz="1050" dirty="0">
+                <a:solidFill>
+                  <a:srgbClr val="14131A"/>
+                </a:solidFill>
+                <a:latin typeface="Calibri" pitchFamily="34" charset="0"/>
+                <a:ea typeface="Calibri" pitchFamily="34" charset="-122"/>
+                <a:cs typeface="Calibri" pitchFamily="34" charset="-120"/>
+              </a:rPr>
+              <a:t>长任务不被上下文窗口截断，也不依赖模型摘要保真。</a:t>
+            </a:r>
+            <a:endParaRPr lang="en-US" sz="1050" dirty="0"/>
+          </a:p>
+        </p:txBody>
+      </p:sp>
+      <p:sp>
+        <p:nvSpPr>
+          <p:cNvPr id="58" name="Text 56"/>
+          <p:cNvSpPr/>
+          <p:nvPr/>
+        </p:nvSpPr>
+        <p:spPr>
+          <a:xfrm>
+            <a:off x="6172200" y="5897880"/>
+            <a:ext cx="5486400" cy="256032"/>
+          </a:xfrm>
+          <a:prstGeom prst="rect">
+            <a:avLst/>
+          </a:prstGeom>
+          <a:noFill/>
+          <a:ln/>
+        </p:spPr>
+        <p:txBody>
+          <a:bodyPr wrap="square" lIns="0" tIns="0" rIns="0" bIns="0" rtlCol="0" anchor="ctr"/>
+          <a:lstStyle/>
+          <a:p>
+            <a:pPr indent="0" marL="0">
+              <a:buNone/>
+            </a:pPr>
+            <a:r>
+              <a:rPr lang="en-US" sz="1050" b="1" dirty="0">
+                <a:solidFill>
+                  <a:srgbClr val="B91C1C"/>
+                </a:solidFill>
+                <a:latin typeface="Calibri" pitchFamily="34" charset="0"/>
+                <a:ea typeface="Calibri" pitchFamily="34" charset="-122"/>
+                <a:cs typeface="Calibri" pitchFamily="34" charset="-120"/>
+              </a:rPr>
+              <a:t>效果  </a:t>
+            </a:r>
+            <a:pPr indent="0" marL="0">
+              <a:buNone/>
+            </a:pPr>
+            <a:r>
+              <a:rPr lang="en-US" sz="1050" dirty="0">
+                <a:solidFill>
+                  <a:srgbClr val="14131A"/>
+                </a:solidFill>
+                <a:latin typeface="Calibri" pitchFamily="34" charset="0"/>
+                <a:ea typeface="Calibri" pitchFamily="34" charset="-122"/>
+                <a:cs typeface="Calibri" pitchFamily="34" charset="-120"/>
+              </a:rPr>
+              <a:t>崩溃/溢出可重建；代价是 CIC token 预算与知识快照维护。</a:t>
+            </a:r>
+            <a:endParaRPr lang="en-US" sz="1050" dirty="0"/>
+          </a:p>
+        </p:txBody>
+      </p:sp>
+      <p:sp>
+        <p:nvSpPr>
+          <p:cNvPr id="59" name="Text 57"/>
+          <p:cNvSpPr/>
+          <p:nvPr/>
+        </p:nvSpPr>
+        <p:spPr>
+          <a:xfrm>
+            <a:off x="548640" y="6528816"/>
+            <a:ext cx="7315200" cy="182880"/>
+          </a:xfrm>
+          <a:prstGeom prst="rect">
+            <a:avLst/>
+          </a:prstGeom>
+          <a:noFill/>
+          <a:ln/>
+        </p:spPr>
+        <p:txBody>
+          <a:bodyPr wrap="square" lIns="0" tIns="0" rIns="0" bIns="0" rtlCol="0" anchor="ctr"/>
+          <a:lstStyle/>
+          <a:p>
+            <a:pPr indent="0" marL="0">
+              <a:buNone/>
+            </a:pPr>
+            <a:r>
+              <a:rPr lang="en-US" sz="850" dirty="0">
+                <a:solidFill>
+                  <a:srgbClr val="6B6375"/>
+                </a:solidFill>
+                <a:latin typeface="Calibri" pitchFamily="34" charset="0"/>
+                <a:ea typeface="Calibri" pitchFamily="34" charset="-122"/>
+                <a:cs typeface="Calibri" pitchFamily="34" charset="-120"/>
+              </a:rPr>
+              <a:t>Anvil roadmap · v1.0 → v1.30.8</a:t>
+            </a:r>
+            <a:endParaRPr lang="en-US" sz="850" dirty="0"/>
+          </a:p>
+        </p:txBody>
+      </p:sp>
+      <p:sp>
+        <p:nvSpPr>
+          <p:cNvPr id="60" name="Text 58"/>
+          <p:cNvSpPr/>
+          <p:nvPr/>
+        </p:nvSpPr>
+        <p:spPr>
+          <a:xfrm>
+            <a:off x="11155680" y="6528816"/>
+            <a:ext cx="457200" cy="182880"/>
+          </a:xfrm>
+          <a:prstGeom prst="rect">
+            <a:avLst/>
+          </a:prstGeom>
+          <a:noFill/>
+          <a:ln/>
+        </p:spPr>
+        <p:txBody>
+          <a:bodyPr wrap="square" lIns="0" tIns="0" rIns="0" bIns="0" rtlCol="0" anchor="ctr"/>
+          <a:lstStyle/>
+          <a:p>
+            <a:pPr algn="r" indent="0" marL="0">
+              <a:buNone/>
+            </a:pPr>
+            <a:r>
+              <a:rPr lang="en-US" sz="850" dirty="0">
+                <a:solidFill>
+                  <a:srgbClr val="6B6375"/>
+                </a:solidFill>
+                <a:latin typeface="Calibri" pitchFamily="34" charset="0"/>
+                <a:ea typeface="Calibri" pitchFamily="34" charset="-122"/>
+                <a:cs typeface="Calibri" pitchFamily="34" charset="-120"/>
+              </a:rPr>
+              <a:t>15</a:t>
+            </a:r>
+            <a:endParaRPr lang="en-US" sz="850" dirty="0"/>
+          </a:p>
+        </p:txBody>
+      </p:sp>
+    </p:spTree>
+  </p:cSld>
+  <p:clrMapOvr>
+    <a:masterClrMapping/>
+  </p:clrMapOvr>
+</p:sld>
+</file>
+
+<file path=ppt/slides/slide16.xml><?xml version="1.0" encoding="utf-8"?>
+<p:sld xmlns:a="http://schemas.openxmlformats.org/drawingml/2006/main" xmlns:r="http://schemas.openxmlformats.org/officeDocument/2006/relationships" xmlns:p="http://schemas.openxmlformats.org/presentationml/2006/main">
+  <p:cSld name="Slide 16">
+    <p:bg>
+      <p:bgPr>
+        <a:solidFill>
+          <a:srgbClr val="F7EFE3"/>
+        </a:solidFill>
+      </p:bgPr>
+    </p:bg>
+    <p:spTree>
+      <p:nvGrpSpPr>
+        <p:cNvPr id="1" name=""/>
+        <p:cNvGrpSpPr/>
+        <p:nvPr/>
+      </p:nvGrpSpPr>
+      <p:grpSpPr>
+        <a:xfrm>
+          <a:off x="0" y="0"/>
+          <a:ext cx="0" cy="0"/>
+          <a:chOff x="0" y="0"/>
+          <a:chExt cx="0" cy="0"/>
+        </a:xfrm>
+      </p:grpSpPr>
+      <p:sp>
+        <p:nvSpPr>
+          <p:cNvPr id="2" name="Text 0"/>
+          <p:cNvSpPr/>
+          <p:nvPr/>
+        </p:nvSpPr>
+        <p:spPr>
+          <a:xfrm>
+            <a:off x="548640" y="310896"/>
+            <a:ext cx="7315200" cy="201168"/>
+          </a:xfrm>
+          <a:prstGeom prst="rect">
+            <a:avLst/>
+          </a:prstGeom>
+          <a:noFill/>
+          <a:ln/>
+        </p:spPr>
+        <p:txBody>
+          <a:bodyPr wrap="square" lIns="0" tIns="0" rIns="0" bIns="0" rtlCol="0" anchor="ctr"/>
+          <a:lstStyle/>
+          <a:p>
+            <a:pPr indent="0" marL="0">
+              <a:buNone/>
+            </a:pPr>
+            <a:r>
+              <a:rPr lang="en-US" sz="950" b="1" spc="220" kern="0" dirty="0">
+                <a:solidFill>
+                  <a:srgbClr val="0E7490"/>
+                </a:solidFill>
+                <a:latin typeface="Calibri" pitchFamily="34" charset="0"/>
+                <a:ea typeface="Calibri" pitchFamily="34" charset="-122"/>
+                <a:cs typeface="Calibri" pitchFamily="34" charset="-120"/>
+              </a:rPr>
+              <a:t>PEER COMPARISON</a:t>
+            </a:r>
+            <a:endParaRPr lang="en-US" sz="950" dirty="0"/>
+          </a:p>
+        </p:txBody>
+      </p:sp>
+      <p:sp>
+        <p:nvSpPr>
+          <p:cNvPr id="3" name="Text 1"/>
+          <p:cNvSpPr/>
+          <p:nvPr/>
+        </p:nvSpPr>
+        <p:spPr>
+          <a:xfrm>
+            <a:off x="548640" y="548640"/>
+            <a:ext cx="11064240" cy="694944"/>
+          </a:xfrm>
+          <a:prstGeom prst="rect">
+            <a:avLst/>
+          </a:prstGeom>
+          <a:noFill/>
+          <a:ln/>
+        </p:spPr>
+        <p:txBody>
+          <a:bodyPr wrap="square" lIns="0" tIns="0" rIns="0" bIns="0" rtlCol="0" anchor="ctr"/>
+          <a:lstStyle/>
+          <a:p>
+            <a:pPr indent="0" marL="0">
+              <a:buNone/>
+            </a:pPr>
+            <a:r>
+              <a:rPr lang="en-US" sz="2700" b="1" dirty="0">
+                <a:solidFill>
+                  <a:srgbClr val="14131A"/>
+                </a:solidFill>
+                <a:latin typeface="Cambria" pitchFamily="34" charset="0"/>
+                <a:ea typeface="Cambria" pitchFamily="34" charset="-122"/>
+                <a:cs typeface="Cambria" pitchFamily="34" charset="-120"/>
+              </a:rPr>
+              <a:t>整体架构对比：Anvil 选的是“任务级 + 可审计”路线</a:t>
+            </a:r>
+            <a:endParaRPr lang="en-US" sz="2700" dirty="0"/>
+          </a:p>
+        </p:txBody>
+      </p:sp>
+      <p:sp>
+        <p:nvSpPr>
+          <p:cNvPr id="4" name="Text 2"/>
+          <p:cNvSpPr/>
+          <p:nvPr/>
+        </p:nvSpPr>
+        <p:spPr>
+          <a:xfrm>
+            <a:off x="566928" y="1225296"/>
+            <a:ext cx="10789920" cy="365760"/>
+          </a:xfrm>
+          <a:prstGeom prst="rect">
+            <a:avLst/>
+          </a:prstGeom>
+          <a:noFill/>
+          <a:ln/>
+        </p:spPr>
+        <p:txBody>
+          <a:bodyPr wrap="square" lIns="0" tIns="0" rIns="0" bIns="0" rtlCol="0" anchor="ctr"/>
+          <a:lstStyle/>
+          <a:p>
+            <a:pPr indent="0" marL="0">
+              <a:buNone/>
+            </a:pPr>
+            <a:r>
+              <a:rPr lang="en-US" sz="1250" dirty="0">
+                <a:solidFill>
+                  <a:srgbClr val="6B6375"/>
+                </a:solidFill>
+                <a:latin typeface="Calibri" pitchFamily="34" charset="0"/>
+                <a:ea typeface="Calibri" pitchFamily="34" charset="-122"/>
+                <a:cs typeface="Calibri" pitchFamily="34" charset="-120"/>
+              </a:rPr>
+              <a:t>不是比谁更像聊天软件，而是比谁能把执行与知识治理闭环。</a:t>
+            </a:r>
+            <a:endParaRPr lang="en-US" sz="1250" dirty="0"/>
+          </a:p>
+        </p:txBody>
+      </p:sp>
+      <p:sp>
+        <p:nvSpPr>
+          <p:cNvPr id="5" name="Text 3"/>
+          <p:cNvSpPr/>
+          <p:nvPr/>
+        </p:nvSpPr>
+        <p:spPr>
+          <a:xfrm>
+            <a:off x="548640" y="1783080"/>
+            <a:ext cx="1325880" cy="347472"/>
+          </a:xfrm>
+          <a:prstGeom prst="rect">
+            <a:avLst/>
+          </a:prstGeom>
+          <a:solidFill>
+            <a:srgbClr val="FFFAF1"/>
+          </a:solidFill>
+          <a:ln w="12700">
+            <a:solidFill>
+              <a:srgbClr val="D8CBB8"/>
+            </a:solidFill>
+          </a:ln>
+        </p:spPr>
+        <p:txBody>
+          <a:bodyPr wrap="square" lIns="381" tIns="381" rIns="381" bIns="381" rtlCol="0" anchor="ctr"/>
+          <a:lstStyle/>
+          <a:p>
+            <a:pPr indent="0" marL="0">
+              <a:buNone/>
+            </a:pPr>
+            <a:r>
+              <a:rPr lang="en-US" sz="920" b="1" dirty="0">
+                <a:solidFill>
+                  <a:srgbClr val="6B6375"/>
+                </a:solidFill>
+                <a:latin typeface="Calibri" pitchFamily="34" charset="0"/>
+                <a:ea typeface="Calibri" pitchFamily="34" charset="-122"/>
+                <a:cs typeface="Calibri" pitchFamily="34" charset="-120"/>
+              </a:rPr>
+              <a:t>维度</a:t>
+            </a:r>
+            <a:endParaRPr lang="en-US" sz="920" dirty="0"/>
+          </a:p>
+        </p:txBody>
+      </p:sp>
+      <p:sp>
+        <p:nvSpPr>
+          <p:cNvPr id="6" name="Text 4"/>
+          <p:cNvSpPr/>
+          <p:nvPr/>
+        </p:nvSpPr>
+        <p:spPr>
+          <a:xfrm>
+            <a:off x="1874520" y="1783080"/>
+            <a:ext cx="2423160" cy="347472"/>
+          </a:xfrm>
+          <a:prstGeom prst="rect">
+            <a:avLst/>
+          </a:prstGeom>
+          <a:solidFill>
+            <a:srgbClr val="FACC15"/>
+          </a:solidFill>
+          <a:ln w="12700">
+            <a:solidFill>
+              <a:srgbClr val="D8CBB8"/>
+            </a:solidFill>
+          </a:ln>
+        </p:spPr>
+        <p:txBody>
+          <a:bodyPr wrap="square" lIns="381" tIns="381" rIns="381" bIns="381" rtlCol="0" anchor="ctr"/>
+          <a:lstStyle/>
+          <a:p>
+            <a:pPr indent="0" marL="0">
+              <a:buNone/>
+            </a:pPr>
+            <a:r>
+              <a:rPr lang="en-US" sz="920" b="1" dirty="0">
+                <a:solidFill>
+                  <a:srgbClr val="14131A"/>
+                </a:solidFill>
+                <a:latin typeface="Calibri" pitchFamily="34" charset="0"/>
+                <a:ea typeface="Calibri" pitchFamily="34" charset="-122"/>
+                <a:cs typeface="Calibri" pitchFamily="34" charset="-120"/>
+              </a:rPr>
+              <a:t>Anvil</a:t>
+            </a:r>
+            <a:endParaRPr lang="en-US" sz="920" dirty="0"/>
+          </a:p>
+        </p:txBody>
+      </p:sp>
+      <p:sp>
+        <p:nvSpPr>
+          <p:cNvPr id="7" name="Text 5"/>
+          <p:cNvSpPr/>
+          <p:nvPr/>
+        </p:nvSpPr>
+        <p:spPr>
+          <a:xfrm>
+            <a:off x="4297680" y="1783080"/>
+            <a:ext cx="2103120" cy="347472"/>
+          </a:xfrm>
+          <a:prstGeom prst="rect">
+            <a:avLst/>
+          </a:prstGeom>
+          <a:solidFill>
+            <a:srgbClr val="FFFAF1"/>
+          </a:solidFill>
+          <a:ln w="12700">
+            <a:solidFill>
+              <a:srgbClr val="D8CBB8"/>
+            </a:solidFill>
+          </a:ln>
+        </p:spPr>
+        <p:txBody>
+          <a:bodyPr wrap="square" lIns="381" tIns="381" rIns="381" bIns="381" rtlCol="0" anchor="ctr"/>
+          <a:lstStyle/>
+          <a:p>
+            <a:pPr indent="0" marL="0">
+              <a:buNone/>
+            </a:pPr>
+            <a:r>
+              <a:rPr lang="en-US" sz="920" b="1" dirty="0">
+                <a:solidFill>
+                  <a:srgbClr val="6B6375"/>
+                </a:solidFill>
+                <a:latin typeface="Calibri" pitchFamily="34" charset="0"/>
+                <a:ea typeface="Calibri" pitchFamily="34" charset="-122"/>
+                <a:cs typeface="Calibri" pitchFamily="34" charset="-120"/>
+              </a:rPr>
+              <a:t>Raft / Poco</a:t>
+            </a:r>
+            <a:endParaRPr lang="en-US" sz="920" dirty="0"/>
+          </a:p>
+        </p:txBody>
+      </p:sp>
+      <p:sp>
+        <p:nvSpPr>
+          <p:cNvPr id="8" name="Text 6"/>
+          <p:cNvSpPr/>
+          <p:nvPr/>
+        </p:nvSpPr>
+        <p:spPr>
+          <a:xfrm>
+            <a:off x="6400800" y="1783080"/>
+            <a:ext cx="1874520" cy="347472"/>
+          </a:xfrm>
+          <a:prstGeom prst="rect">
+            <a:avLst/>
+          </a:prstGeom>
+          <a:solidFill>
+            <a:srgbClr val="FFFAF1"/>
+          </a:solidFill>
+          <a:ln w="12700">
+            <a:solidFill>
+              <a:srgbClr val="D8CBB8"/>
+            </a:solidFill>
+          </a:ln>
+        </p:spPr>
+        <p:txBody>
+          <a:bodyPr wrap="square" lIns="381" tIns="381" rIns="381" bIns="381" rtlCol="0" anchor="ctr"/>
+          <a:lstStyle/>
+          <a:p>
+            <a:pPr indent="0" marL="0">
+              <a:buNone/>
+            </a:pPr>
+            <a:r>
+              <a:rPr lang="en-US" sz="920" b="1" dirty="0">
+                <a:solidFill>
+                  <a:srgbClr val="6B6375"/>
+                </a:solidFill>
+                <a:latin typeface="Calibri" pitchFamily="34" charset="0"/>
+                <a:ea typeface="Calibri" pitchFamily="34" charset="-122"/>
+                <a:cs typeface="Calibri" pitchFamily="34" charset="-120"/>
+              </a:rPr>
+              <a:t>AutoGen</a:t>
+            </a:r>
+            <a:endParaRPr lang="en-US" sz="920" dirty="0"/>
+          </a:p>
+        </p:txBody>
+      </p:sp>
+      <p:sp>
+        <p:nvSpPr>
+          <p:cNvPr id="9" name="Text 7"/>
+          <p:cNvSpPr/>
+          <p:nvPr/>
+        </p:nvSpPr>
+        <p:spPr>
+          <a:xfrm>
+            <a:off x="8275320" y="1783080"/>
+            <a:ext cx="1920240" cy="347472"/>
+          </a:xfrm>
+          <a:prstGeom prst="rect">
+            <a:avLst/>
+          </a:prstGeom>
+          <a:solidFill>
+            <a:srgbClr val="FFFAF1"/>
+          </a:solidFill>
+          <a:ln w="12700">
+            <a:solidFill>
+              <a:srgbClr val="D8CBB8"/>
+            </a:solidFill>
+          </a:ln>
+        </p:spPr>
+        <p:txBody>
+          <a:bodyPr wrap="square" lIns="381" tIns="381" rIns="381" bIns="381" rtlCol="0" anchor="ctr"/>
+          <a:lstStyle/>
+          <a:p>
+            <a:pPr indent="0" marL="0">
+              <a:buNone/>
+            </a:pPr>
+            <a:r>
+              <a:rPr lang="en-US" sz="920" b="1" dirty="0">
+                <a:solidFill>
+                  <a:srgbClr val="6B6375"/>
+                </a:solidFill>
+                <a:latin typeface="Calibri" pitchFamily="34" charset="0"/>
+                <a:ea typeface="Calibri" pitchFamily="34" charset="-122"/>
+                <a:cs typeface="Calibri" pitchFamily="34" charset="-120"/>
+              </a:rPr>
+              <a:t>MetaGPT / ChatDev</a:t>
+            </a:r>
+            <a:endParaRPr lang="en-US" sz="920" dirty="0"/>
+          </a:p>
+        </p:txBody>
+      </p:sp>
+      <p:sp>
+        <p:nvSpPr>
+          <p:cNvPr id="10" name="Text 8"/>
+          <p:cNvSpPr/>
+          <p:nvPr/>
+        </p:nvSpPr>
+        <p:spPr>
+          <a:xfrm>
+            <a:off x="10195560" y="1783080"/>
+            <a:ext cx="2377440" cy="347472"/>
+          </a:xfrm>
+          <a:prstGeom prst="rect">
+            <a:avLst/>
+          </a:prstGeom>
+          <a:solidFill>
+            <a:srgbClr val="FFFAF1"/>
+          </a:solidFill>
+          <a:ln w="12700">
+            <a:solidFill>
+              <a:srgbClr val="D8CBB8"/>
+            </a:solidFill>
+          </a:ln>
+        </p:spPr>
+        <p:txBody>
+          <a:bodyPr wrap="square" lIns="381" tIns="381" rIns="381" bIns="381" rtlCol="0" anchor="ctr"/>
+          <a:lstStyle/>
+          <a:p>
+            <a:pPr indent="0" marL="0">
+              <a:buNone/>
+            </a:pPr>
+            <a:r>
+              <a:rPr lang="en-US" sz="920" b="1" dirty="0">
+                <a:solidFill>
+                  <a:srgbClr val="6B6375"/>
+                </a:solidFill>
+                <a:latin typeface="Calibri" pitchFamily="34" charset="0"/>
+                <a:ea typeface="Calibri" pitchFamily="34" charset="-122"/>
+                <a:cs typeface="Calibri" pitchFamily="34" charset="-120"/>
+              </a:rPr>
+              <a:t>AgentTeams / Claude Tag</a:t>
+            </a:r>
+            <a:endParaRPr lang="en-US" sz="920" dirty="0"/>
+          </a:p>
+        </p:txBody>
+      </p:sp>
+      <p:sp>
+        <p:nvSpPr>
+          <p:cNvPr id="11" name="Text 9"/>
+          <p:cNvSpPr/>
+          <p:nvPr/>
+        </p:nvSpPr>
+        <p:spPr>
+          <a:xfrm>
+            <a:off x="548640" y="2167128"/>
+            <a:ext cx="1325880" cy="603504"/>
+          </a:xfrm>
+          <a:prstGeom prst="rect">
+            <a:avLst/>
+          </a:prstGeom>
+          <a:solidFill>
+            <a:srgbClr val="FBF5EA"/>
+          </a:solidFill>
+          <a:ln w="8890">
+            <a:solidFill>
+              <a:srgbClr val="D8CBB8"/>
+            </a:solidFill>
+          </a:ln>
+        </p:spPr>
+        <p:txBody>
+          <a:bodyPr wrap="square" lIns="381" tIns="381" rIns="381" bIns="381" rtlCol="0" anchor="ctr"/>
+          <a:lstStyle/>
+          <a:p>
+            <a:pPr indent="0" marL="0">
+              <a:buNone/>
+            </a:pPr>
+            <a:r>
+              <a:rPr lang="en-US" sz="870" b="1" dirty="0">
+                <a:solidFill>
+                  <a:srgbClr val="6B6375"/>
+                </a:solidFill>
+                <a:latin typeface="Calibri" pitchFamily="34" charset="0"/>
+                <a:ea typeface="Calibri" pitchFamily="34" charset="-122"/>
+                <a:cs typeface="Calibri" pitchFamily="34" charset="-120"/>
+              </a:rPr>
+              <a:t>交互场所</a:t>
+            </a:r>
+            <a:endParaRPr lang="en-US" sz="870" dirty="0"/>
+          </a:p>
+        </p:txBody>
+      </p:sp>
+      <p:sp>
+        <p:nvSpPr>
+          <p:cNvPr id="12" name="Text 10"/>
+          <p:cNvSpPr/>
+          <p:nvPr/>
+        </p:nvSpPr>
+        <p:spPr>
+          <a:xfrm>
+            <a:off x="1874520" y="2167128"/>
+            <a:ext cx="2423160" cy="603504"/>
+          </a:xfrm>
+          <a:prstGeom prst="rect">
+            <a:avLst/>
+          </a:prstGeom>
+          <a:solidFill>
+            <a:srgbClr val="FFF4D6"/>
+          </a:solidFill>
+          <a:ln w="8890">
+            <a:solidFill>
+              <a:srgbClr val="D8CBB8"/>
+            </a:solidFill>
+          </a:ln>
+        </p:spPr>
+        <p:txBody>
+          <a:bodyPr wrap="square" lIns="381" tIns="381" rIns="381" bIns="381" rtlCol="0" anchor="ctr"/>
+          <a:lstStyle/>
+          <a:p>
+            <a:pPr indent="0" marL="0">
+              <a:buNone/>
+            </a:pPr>
+            <a:r>
+              <a:rPr lang="en-US" sz="870" b="1" dirty="0">
+                <a:solidFill>
+                  <a:srgbClr val="14131A"/>
+                </a:solidFill>
+                <a:latin typeface="Calibri" pitchFamily="34" charset="0"/>
+                <a:ea typeface="Calibri" pitchFamily="34" charset="-122"/>
+                <a:cs typeface="Calibri" pitchFamily="34" charset="-120"/>
+              </a:rPr>
+              <a:t>任务时间线</a:t>
+            </a:r>
+            <a:endParaRPr lang="en-US" sz="870" dirty="0"/>
+          </a:p>
+        </p:txBody>
+      </p:sp>
+      <p:sp>
+        <p:nvSpPr>
+          <p:cNvPr id="13" name="Text 11"/>
+          <p:cNvSpPr/>
+          <p:nvPr/>
+        </p:nvSpPr>
+        <p:spPr>
+          <a:xfrm>
+            <a:off x="4297680" y="2167128"/>
+            <a:ext cx="2103120" cy="603504"/>
+          </a:xfrm>
+          <a:prstGeom prst="rect">
+            <a:avLst/>
+          </a:prstGeom>
+          <a:solidFill>
+            <a:srgbClr val="FBF5EA"/>
+          </a:solidFill>
+          <a:ln w="8890">
+            <a:solidFill>
+              <a:srgbClr val="D8CBB8"/>
+            </a:solidFill>
+          </a:ln>
+        </p:spPr>
+        <p:txBody>
+          <a:bodyPr wrap="square" lIns="381" tIns="381" rIns="381" bIns="381" rtlCol="0" anchor="ctr"/>
+          <a:lstStyle/>
+          <a:p>
+            <a:pPr indent="0" marL="0">
+              <a:buNone/>
+            </a:pPr>
+            <a:r>
+              <a:rPr lang="en-US" sz="870" dirty="0">
+                <a:solidFill>
+                  <a:srgbClr val="6B6375"/>
+                </a:solidFill>
+                <a:latin typeface="Calibri" pitchFamily="34" charset="0"/>
+                <a:ea typeface="Calibri" pitchFamily="34" charset="-122"/>
+                <a:cs typeface="Calibri" pitchFamily="34" charset="-120"/>
+              </a:rPr>
+              <a:t>channel / thread</a:t>
+            </a:r>
+            <a:endParaRPr lang="en-US" sz="870" dirty="0"/>
+          </a:p>
+        </p:txBody>
+      </p:sp>
+      <p:sp>
+        <p:nvSpPr>
+          <p:cNvPr id="14" name="Text 12"/>
+          <p:cNvSpPr/>
+          <p:nvPr/>
+        </p:nvSpPr>
+        <p:spPr>
+          <a:xfrm>
+            <a:off x="6400800" y="2167128"/>
+            <a:ext cx="1874520" cy="603504"/>
+          </a:xfrm>
+          <a:prstGeom prst="rect">
+            <a:avLst/>
+          </a:prstGeom>
+          <a:solidFill>
+            <a:srgbClr val="FBF5EA"/>
+          </a:solidFill>
+          <a:ln w="8890">
+            <a:solidFill>
+              <a:srgbClr val="D8CBB8"/>
+            </a:solidFill>
+          </a:ln>
+        </p:spPr>
+        <p:txBody>
+          <a:bodyPr wrap="square" lIns="381" tIns="381" rIns="381" bIns="381" rtlCol="0" anchor="ctr"/>
+          <a:lstStyle/>
+          <a:p>
+            <a:pPr indent="0" marL="0">
+              <a:buNone/>
+            </a:pPr>
+            <a:r>
+              <a:rPr lang="en-US" sz="870" dirty="0">
+                <a:solidFill>
+                  <a:srgbClr val="6B6375"/>
+                </a:solidFill>
+                <a:latin typeface="Calibri" pitchFamily="34" charset="0"/>
+                <a:ea typeface="Calibri" pitchFamily="34" charset="-122"/>
+                <a:cs typeface="Calibri" pitchFamily="34" charset="-120"/>
+              </a:rPr>
+              <a:t>任务内群聊</a:t>
+            </a:r>
+            <a:endParaRPr lang="en-US" sz="870" dirty="0"/>
+          </a:p>
+        </p:txBody>
+      </p:sp>
+      <p:sp>
+        <p:nvSpPr>
+          <p:cNvPr id="15" name="Text 13"/>
+          <p:cNvSpPr/>
+          <p:nvPr/>
+        </p:nvSpPr>
+        <p:spPr>
+          <a:xfrm>
+            <a:off x="8275320" y="2167128"/>
+            <a:ext cx="1920240" cy="603504"/>
+          </a:xfrm>
+          <a:prstGeom prst="rect">
+            <a:avLst/>
+          </a:prstGeom>
+          <a:solidFill>
+            <a:srgbClr val="FBF5EA"/>
+          </a:solidFill>
+          <a:ln w="8890">
+            <a:solidFill>
+              <a:srgbClr val="D8CBB8"/>
+            </a:solidFill>
+          </a:ln>
+        </p:spPr>
+        <p:txBody>
+          <a:bodyPr wrap="square" lIns="381" tIns="381" rIns="381" bIns="381" rtlCol="0" anchor="ctr"/>
+          <a:lstStyle/>
+          <a:p>
+            <a:pPr indent="0" marL="0">
+              <a:buNone/>
+            </a:pPr>
+            <a:r>
+              <a:rPr lang="en-US" sz="870" dirty="0">
+                <a:solidFill>
+                  <a:srgbClr val="6B6375"/>
+                </a:solidFill>
+                <a:latin typeface="Calibri" pitchFamily="34" charset="0"/>
+                <a:ea typeface="Calibri" pitchFamily="34" charset="-122"/>
+                <a:cs typeface="Calibri" pitchFamily="34" charset="-120"/>
+              </a:rPr>
+              <a:t>SOP / pipeline</a:t>
+            </a:r>
+            <a:endParaRPr lang="en-US" sz="870" dirty="0"/>
+          </a:p>
+        </p:txBody>
+      </p:sp>
+      <p:sp>
+        <p:nvSpPr>
+          <p:cNvPr id="16" name="Text 14"/>
+          <p:cNvSpPr/>
+          <p:nvPr/>
+        </p:nvSpPr>
+        <p:spPr>
+          <a:xfrm>
+            <a:off x="10195560" y="2167128"/>
+            <a:ext cx="2377440" cy="603504"/>
+          </a:xfrm>
+          <a:prstGeom prst="rect">
+            <a:avLst/>
+          </a:prstGeom>
+          <a:solidFill>
+            <a:srgbClr val="FBF5EA"/>
+          </a:solidFill>
+          <a:ln w="8890">
+            <a:solidFill>
+              <a:srgbClr val="D8CBB8"/>
+            </a:solidFill>
+          </a:ln>
+        </p:spPr>
+        <p:txBody>
+          <a:bodyPr wrap="square" lIns="381" tIns="381" rIns="381" bIns="381" rtlCol="0" anchor="ctr"/>
+          <a:lstStyle/>
+          <a:p>
+            <a:pPr indent="0" marL="0">
+              <a:buNone/>
+            </a:pPr>
+            <a:r>
+              <a:rPr lang="en-US" sz="870" dirty="0">
+                <a:solidFill>
+                  <a:srgbClr val="6B6375"/>
+                </a:solidFill>
+                <a:latin typeface="Calibri" pitchFamily="34" charset="0"/>
+                <a:ea typeface="Calibri" pitchFamily="34" charset="-122"/>
+                <a:cs typeface="Calibri" pitchFamily="34" charset="-120"/>
+              </a:rPr>
+              <a:t>群聊 / 组织</a:t>
+            </a:r>
+            <a:endParaRPr lang="en-US" sz="870" dirty="0"/>
+          </a:p>
+        </p:txBody>
+      </p:sp>
+      <p:sp>
+        <p:nvSpPr>
+          <p:cNvPr id="17" name="Text 15"/>
+          <p:cNvSpPr/>
+          <p:nvPr/>
+        </p:nvSpPr>
+        <p:spPr>
+          <a:xfrm>
+            <a:off x="548640" y="2807208"/>
+            <a:ext cx="1325880" cy="603504"/>
+          </a:xfrm>
+          <a:prstGeom prst="rect">
+            <a:avLst/>
+          </a:prstGeom>
+          <a:solidFill>
+            <a:srgbClr val="FFFAF1"/>
+          </a:solidFill>
+          <a:ln w="8890">
+            <a:solidFill>
+              <a:srgbClr val="D8CBB8"/>
+            </a:solidFill>
+          </a:ln>
+        </p:spPr>
+        <p:txBody>
+          <a:bodyPr wrap="square" lIns="381" tIns="381" rIns="381" bIns="381" rtlCol="0" anchor="ctr"/>
+          <a:lstStyle/>
+          <a:p>
+            <a:pPr indent="0" marL="0">
+              <a:buNone/>
+            </a:pPr>
+            <a:r>
+              <a:rPr lang="en-US" sz="870" b="1" dirty="0">
+                <a:solidFill>
+                  <a:srgbClr val="6B6375"/>
+                </a:solidFill>
+                <a:latin typeface="Calibri" pitchFamily="34" charset="0"/>
+                <a:ea typeface="Calibri" pitchFamily="34" charset="-122"/>
+                <a:cs typeface="Calibri" pitchFamily="34" charset="-120"/>
+              </a:rPr>
+              <a:t>工作单元</a:t>
+            </a:r>
+            <a:endParaRPr lang="en-US" sz="870" dirty="0"/>
+          </a:p>
+        </p:txBody>
+      </p:sp>
+      <p:sp>
+        <p:nvSpPr>
+          <p:cNvPr id="18" name="Text 16"/>
+          <p:cNvSpPr/>
+          <p:nvPr/>
+        </p:nvSpPr>
+        <p:spPr>
+          <a:xfrm>
+            <a:off x="1874520" y="2807208"/>
+            <a:ext cx="2423160" cy="603504"/>
+          </a:xfrm>
+          <a:prstGeom prst="rect">
+            <a:avLst/>
+          </a:prstGeom>
+          <a:solidFill>
+            <a:srgbClr val="FFF4D6"/>
+          </a:solidFill>
+          <a:ln w="8890">
+            <a:solidFill>
+              <a:srgbClr val="D8CBB8"/>
+            </a:solidFill>
+          </a:ln>
+        </p:spPr>
+        <p:txBody>
+          <a:bodyPr wrap="square" lIns="381" tIns="381" rIns="381" bIns="381" rtlCol="0" anchor="ctr"/>
+          <a:lstStyle/>
+          <a:p>
+            <a:pPr indent="0" marL="0">
+              <a:buNone/>
+            </a:pPr>
+            <a:r>
+              <a:rPr lang="en-US" sz="870" b="1" dirty="0">
+                <a:solidFill>
+                  <a:srgbClr val="14131A"/>
+                </a:solidFill>
+                <a:latin typeface="Calibri" pitchFamily="34" charset="0"/>
+                <a:ea typeface="Calibri" pitchFamily="34" charset="-122"/>
+                <a:cs typeface="Calibri" pitchFamily="34" charset="-120"/>
+              </a:rPr>
+              <a:t>Task + step</a:t>
+            </a:r>
+            <a:endParaRPr lang="en-US" sz="870" dirty="0"/>
+          </a:p>
+        </p:txBody>
+      </p:sp>
+      <p:sp>
+        <p:nvSpPr>
+          <p:cNvPr id="19" name="Text 17"/>
+          <p:cNvSpPr/>
+          <p:nvPr/>
+        </p:nvSpPr>
+        <p:spPr>
+          <a:xfrm>
+            <a:off x="4297680" y="2807208"/>
+            <a:ext cx="2103120" cy="603504"/>
+          </a:xfrm>
+          <a:prstGeom prst="rect">
+            <a:avLst/>
+          </a:prstGeom>
+          <a:solidFill>
+            <a:srgbClr val="FFFAF1"/>
+          </a:solidFill>
+          <a:ln w="8890">
+            <a:solidFill>
+              <a:srgbClr val="D8CBB8"/>
+            </a:solidFill>
+          </a:ln>
+        </p:spPr>
+        <p:txBody>
+          <a:bodyPr wrap="square" lIns="381" tIns="381" rIns="381" bIns="381" rtlCol="0" anchor="ctr"/>
+          <a:lstStyle/>
+          <a:p>
+            <a:pPr indent="0" marL="0">
+              <a:buNone/>
+            </a:pPr>
+            <a:r>
+              <a:rPr lang="en-US" sz="870" dirty="0">
+                <a:solidFill>
+                  <a:srgbClr val="6B6375"/>
+                </a:solidFill>
+                <a:latin typeface="Calibri" pitchFamily="34" charset="0"/>
+                <a:ea typeface="Calibri" pitchFamily="34" charset="-122"/>
+                <a:cs typeface="Calibri" pitchFamily="34" charset="-120"/>
+              </a:rPr>
+              <a:t>task + thread</a:t>
+            </a:r>
+            <a:endParaRPr lang="en-US" sz="870" dirty="0"/>
+          </a:p>
+        </p:txBody>
+      </p:sp>
+      <p:sp>
+        <p:nvSpPr>
+          <p:cNvPr id="20" name="Text 18"/>
+          <p:cNvSpPr/>
+          <p:nvPr/>
+        </p:nvSpPr>
+        <p:spPr>
+          <a:xfrm>
+            <a:off x="6400800" y="2807208"/>
+            <a:ext cx="1874520" cy="603504"/>
+          </a:xfrm>
+          <a:prstGeom prst="rect">
+            <a:avLst/>
+          </a:prstGeom>
+          <a:solidFill>
+            <a:srgbClr val="FFFAF1"/>
+          </a:solidFill>
+          <a:ln w="8890">
+            <a:solidFill>
+              <a:srgbClr val="D8CBB8"/>
+            </a:solidFill>
+          </a:ln>
+        </p:spPr>
+        <p:txBody>
+          <a:bodyPr wrap="square" lIns="381" tIns="381" rIns="381" bIns="381" rtlCol="0" anchor="ctr"/>
+          <a:lstStyle/>
+          <a:p>
+            <a:pPr indent="0" marL="0">
+              <a:buNone/>
+            </a:pPr>
+            <a:r>
+              <a:rPr lang="en-US" sz="870" dirty="0">
+                <a:solidFill>
+                  <a:srgbClr val="6B6375"/>
+                </a:solidFill>
+                <a:latin typeface="Calibri" pitchFamily="34" charset="0"/>
+                <a:ea typeface="Calibri" pitchFamily="34" charset="-122"/>
+                <a:cs typeface="Calibri" pitchFamily="34" charset="-120"/>
+              </a:rPr>
+              <a:t>conversation</a:t>
+            </a:r>
+            <a:endParaRPr lang="en-US" sz="870" dirty="0"/>
+          </a:p>
+        </p:txBody>
+      </p:sp>
+      <p:sp>
+        <p:nvSpPr>
+          <p:cNvPr id="21" name="Text 19"/>
+          <p:cNvSpPr/>
+          <p:nvPr/>
+        </p:nvSpPr>
+        <p:spPr>
+          <a:xfrm>
+            <a:off x="8275320" y="2807208"/>
+            <a:ext cx="1920240" cy="603504"/>
+          </a:xfrm>
+          <a:prstGeom prst="rect">
+            <a:avLst/>
+          </a:prstGeom>
+          <a:solidFill>
+            <a:srgbClr val="FFFAF1"/>
+          </a:solidFill>
+          <a:ln w="8890">
+            <a:solidFill>
+              <a:srgbClr val="D8CBB8"/>
+            </a:solidFill>
+          </a:ln>
+        </p:spPr>
+        <p:txBody>
+          <a:bodyPr wrap="square" lIns="381" tIns="381" rIns="381" bIns="381" rtlCol="0" anchor="ctr"/>
+          <a:lstStyle/>
+          <a:p>
+            <a:pPr indent="0" marL="0">
+              <a:buNone/>
+            </a:pPr>
+            <a:r>
+              <a:rPr lang="en-US" sz="870" dirty="0">
+                <a:solidFill>
+                  <a:srgbClr val="6B6375"/>
+                </a:solidFill>
+                <a:latin typeface="Calibri" pitchFamily="34" charset="0"/>
+                <a:ea typeface="Calibri" pitchFamily="34" charset="-122"/>
+                <a:cs typeface="Calibri" pitchFamily="34" charset="-120"/>
+              </a:rPr>
+              <a:t>pipeline</a:t>
+            </a:r>
+            <a:endParaRPr lang="en-US" sz="870" dirty="0"/>
+          </a:p>
+        </p:txBody>
+      </p:sp>
+      <p:sp>
+        <p:nvSpPr>
+          <p:cNvPr id="22" name="Text 20"/>
+          <p:cNvSpPr/>
+          <p:nvPr/>
+        </p:nvSpPr>
+        <p:spPr>
+          <a:xfrm>
+            <a:off x="10195560" y="2807208"/>
+            <a:ext cx="2377440" cy="603504"/>
+          </a:xfrm>
+          <a:prstGeom prst="rect">
+            <a:avLst/>
+          </a:prstGeom>
+          <a:solidFill>
+            <a:srgbClr val="FFFAF1"/>
+          </a:solidFill>
+          <a:ln w="8890">
+            <a:solidFill>
+              <a:srgbClr val="D8CBB8"/>
+            </a:solidFill>
+          </a:ln>
+        </p:spPr>
+        <p:txBody>
+          <a:bodyPr wrap="square" lIns="381" tIns="381" rIns="381" bIns="381" rtlCol="0" anchor="ctr"/>
+          <a:lstStyle/>
+          <a:p>
+            <a:pPr indent="0" marL="0">
+              <a:buNone/>
+            </a:pPr>
+            <a:r>
+              <a:rPr lang="en-US" sz="870" dirty="0">
+                <a:solidFill>
+                  <a:srgbClr val="6B6375"/>
+                </a:solidFill>
+                <a:latin typeface="Calibri" pitchFamily="34" charset="0"/>
+                <a:ea typeface="Calibri" pitchFamily="34" charset="-122"/>
+                <a:cs typeface="Calibri" pitchFamily="34" charset="-120"/>
+              </a:rPr>
+              <a:t>群内任务</a:t>
+            </a:r>
+            <a:endParaRPr lang="en-US" sz="870" dirty="0"/>
+          </a:p>
+        </p:txBody>
+      </p:sp>
+      <p:sp>
+        <p:nvSpPr>
+          <p:cNvPr id="23" name="Text 21"/>
+          <p:cNvSpPr/>
+          <p:nvPr/>
+        </p:nvSpPr>
+        <p:spPr>
+          <a:xfrm>
+            <a:off x="548640" y="3447288"/>
+            <a:ext cx="1325880" cy="603504"/>
+          </a:xfrm>
+          <a:prstGeom prst="rect">
+            <a:avLst/>
+          </a:prstGeom>
+          <a:solidFill>
+            <a:srgbClr val="FBF5EA"/>
+          </a:solidFill>
+          <a:ln w="8890">
+            <a:solidFill>
+              <a:srgbClr val="D8CBB8"/>
+            </a:solidFill>
+          </a:ln>
+        </p:spPr>
+        <p:txBody>
+          <a:bodyPr wrap="square" lIns="381" tIns="381" rIns="381" bIns="381" rtlCol="0" anchor="ctr"/>
+          <a:lstStyle/>
+          <a:p>
+            <a:pPr indent="0" marL="0">
+              <a:buNone/>
+            </a:pPr>
+            <a:r>
+              <a:rPr lang="en-US" sz="870" b="1" dirty="0">
+                <a:solidFill>
+                  <a:srgbClr val="6B6375"/>
+                </a:solidFill>
+                <a:latin typeface="Calibri" pitchFamily="34" charset="0"/>
+                <a:ea typeface="Calibri" pitchFamily="34" charset="-122"/>
+                <a:cs typeface="Calibri" pitchFamily="34" charset="-120"/>
+              </a:rPr>
+              <a:t>编排</a:t>
+            </a:r>
+            <a:endParaRPr lang="en-US" sz="870" dirty="0"/>
+          </a:p>
+        </p:txBody>
+      </p:sp>
+      <p:sp>
+        <p:nvSpPr>
+          <p:cNvPr id="24" name="Text 22"/>
+          <p:cNvSpPr/>
+          <p:nvPr/>
+        </p:nvSpPr>
+        <p:spPr>
+          <a:xfrm>
+            <a:off x="1874520" y="3447288"/>
+            <a:ext cx="2423160" cy="603504"/>
+          </a:xfrm>
+          <a:prstGeom prst="rect">
+            <a:avLst/>
+          </a:prstGeom>
+          <a:solidFill>
+            <a:srgbClr val="FFF4D6"/>
+          </a:solidFill>
+          <a:ln w="8890">
+            <a:solidFill>
+              <a:srgbClr val="D8CBB8"/>
+            </a:solidFill>
+          </a:ln>
+        </p:spPr>
+        <p:txBody>
+          <a:bodyPr wrap="square" lIns="381" tIns="381" rIns="381" bIns="381" rtlCol="0" anchor="ctr"/>
+          <a:lstStyle/>
+          <a:p>
+            <a:pPr indent="0" marL="0">
+              <a:buNone/>
+            </a:pPr>
+            <a:r>
+              <a:rPr lang="en-US" sz="870" b="1" dirty="0">
+                <a:solidFill>
+                  <a:srgbClr val="14131A"/>
+                </a:solidFill>
+                <a:latin typeface="Calibri" pitchFamily="34" charset="0"/>
+                <a:ea typeface="Calibri" pitchFamily="34" charset="-122"/>
+                <a:cs typeface="Calibri" pitchFamily="34" charset="-120"/>
+              </a:rPr>
+              <a:t>Cindy + DAG + HITL</a:t>
+            </a:r>
+            <a:endParaRPr lang="en-US" sz="870" dirty="0"/>
+          </a:p>
+        </p:txBody>
+      </p:sp>
+      <p:sp>
+        <p:nvSpPr>
+          <p:cNvPr id="25" name="Text 23"/>
+          <p:cNvSpPr/>
+          <p:nvPr/>
+        </p:nvSpPr>
+        <p:spPr>
+          <a:xfrm>
+            <a:off x="4297680" y="3447288"/>
+            <a:ext cx="2103120" cy="603504"/>
+          </a:xfrm>
+          <a:prstGeom prst="rect">
+            <a:avLst/>
+          </a:prstGeom>
+          <a:solidFill>
+            <a:srgbClr val="FBF5EA"/>
+          </a:solidFill>
+          <a:ln w="8890">
+            <a:solidFill>
+              <a:srgbClr val="D8CBB8"/>
+            </a:solidFill>
+          </a:ln>
+        </p:spPr>
+        <p:txBody>
+          <a:bodyPr wrap="square" lIns="381" tIns="381" rIns="381" bIns="381" rtlCol="0" anchor="ctr"/>
+          <a:lstStyle/>
+          <a:p>
+            <a:pPr indent="0" marL="0">
+              <a:buNone/>
+            </a:pPr>
+            <a:r>
+              <a:rPr lang="en-US" sz="870" dirty="0">
+                <a:solidFill>
+                  <a:srgbClr val="6B6375"/>
+                </a:solidFill>
+                <a:latin typeface="Calibri" pitchFamily="34" charset="0"/>
+                <a:ea typeface="Calibri" pitchFamily="34" charset="-122"/>
+                <a:cs typeface="Calibri" pitchFamily="34" charset="-120"/>
+              </a:rPr>
+              <a:t>@mention / 涌现</a:t>
+            </a:r>
+            <a:endParaRPr lang="en-US" sz="870" dirty="0"/>
+          </a:p>
+        </p:txBody>
+      </p:sp>
+      <p:sp>
+        <p:nvSpPr>
+          <p:cNvPr id="26" name="Text 24"/>
+          <p:cNvSpPr/>
+          <p:nvPr/>
+        </p:nvSpPr>
+        <p:spPr>
+          <a:xfrm>
+            <a:off x="6400800" y="3447288"/>
+            <a:ext cx="1874520" cy="603504"/>
+          </a:xfrm>
+          <a:prstGeom prst="rect">
+            <a:avLst/>
+          </a:prstGeom>
+          <a:solidFill>
+            <a:srgbClr val="FBF5EA"/>
+          </a:solidFill>
+          <a:ln w="8890">
+            <a:solidFill>
+              <a:srgbClr val="D8CBB8"/>
+            </a:solidFill>
+          </a:ln>
+        </p:spPr>
+        <p:txBody>
+          <a:bodyPr wrap="square" lIns="381" tIns="381" rIns="381" bIns="381" rtlCol="0" anchor="ctr"/>
+          <a:lstStyle/>
+          <a:p>
+            <a:pPr indent="0" marL="0">
+              <a:buNone/>
+            </a:pPr>
+            <a:r>
+              <a:rPr lang="en-US" sz="870" dirty="0">
+                <a:solidFill>
+                  <a:srgbClr val="6B6375"/>
+                </a:solidFill>
+                <a:latin typeface="Calibri" pitchFamily="34" charset="0"/>
+                <a:ea typeface="Calibri" pitchFamily="34" charset="-122"/>
+                <a:cs typeface="Calibri" pitchFamily="34" charset="-120"/>
+              </a:rPr>
+              <a:t>speaker selection</a:t>
+            </a:r>
+            <a:endParaRPr lang="en-US" sz="870" dirty="0"/>
+          </a:p>
+        </p:txBody>
+      </p:sp>
+      <p:sp>
+        <p:nvSpPr>
+          <p:cNvPr id="27" name="Text 25"/>
+          <p:cNvSpPr/>
+          <p:nvPr/>
+        </p:nvSpPr>
+        <p:spPr>
+          <a:xfrm>
+            <a:off x="8275320" y="3447288"/>
+            <a:ext cx="1920240" cy="603504"/>
+          </a:xfrm>
+          <a:prstGeom prst="rect">
+            <a:avLst/>
+          </a:prstGeom>
+          <a:solidFill>
+            <a:srgbClr val="FBF5EA"/>
+          </a:solidFill>
+          <a:ln w="8890">
+            <a:solidFill>
+              <a:srgbClr val="D8CBB8"/>
+            </a:solidFill>
+          </a:ln>
+        </p:spPr>
+        <p:txBody>
+          <a:bodyPr wrap="square" lIns="381" tIns="381" rIns="381" bIns="381" rtlCol="0" anchor="ctr"/>
+          <a:lstStyle/>
+          <a:p>
+            <a:pPr indent="0" marL="0">
+              <a:buNone/>
+            </a:pPr>
+            <a:r>
+              <a:rPr lang="en-US" sz="870" dirty="0">
+                <a:solidFill>
+                  <a:srgbClr val="6B6375"/>
+                </a:solidFill>
+                <a:latin typeface="Calibri" pitchFamily="34" charset="0"/>
+                <a:ea typeface="Calibri" pitchFamily="34" charset="-122"/>
+                <a:cs typeface="Calibri" pitchFamily="34" charset="-120"/>
+              </a:rPr>
+              <a:t>固定角色阶段</a:t>
+            </a:r>
+            <a:endParaRPr lang="en-US" sz="870" dirty="0"/>
+          </a:p>
+        </p:txBody>
+      </p:sp>
+      <p:sp>
+        <p:nvSpPr>
+          <p:cNvPr id="28" name="Text 26"/>
+          <p:cNvSpPr/>
+          <p:nvPr/>
+        </p:nvSpPr>
+        <p:spPr>
+          <a:xfrm>
+            <a:off x="10195560" y="3447288"/>
+            <a:ext cx="2377440" cy="603504"/>
+          </a:xfrm>
+          <a:prstGeom prst="rect">
+            <a:avLst/>
+          </a:prstGeom>
+          <a:solidFill>
+            <a:srgbClr val="FBF5EA"/>
+          </a:solidFill>
+          <a:ln w="8890">
+            <a:solidFill>
+              <a:srgbClr val="D8CBB8"/>
+            </a:solidFill>
+          </a:ln>
+        </p:spPr>
+        <p:txBody>
+          <a:bodyPr wrap="square" lIns="381" tIns="381" rIns="381" bIns="381" rtlCol="0" anchor="ctr"/>
+          <a:lstStyle/>
+          <a:p>
+            <a:pPr indent="0" marL="0">
+              <a:buNone/>
+            </a:pPr>
+            <a:r>
+              <a:rPr lang="en-US" sz="870" dirty="0">
+                <a:solidFill>
+                  <a:srgbClr val="6B6375"/>
+                </a:solidFill>
+                <a:latin typeface="Calibri" pitchFamily="34" charset="0"/>
+                <a:ea typeface="Calibri" pitchFamily="34" charset="-122"/>
+                <a:cs typeface="Calibri" pitchFamily="34" charset="-120"/>
+              </a:rPr>
+              <a:t>Leader / Worker</a:t>
+            </a:r>
+            <a:endParaRPr lang="en-US" sz="870" dirty="0"/>
+          </a:p>
+        </p:txBody>
+      </p:sp>
+      <p:sp>
+        <p:nvSpPr>
+          <p:cNvPr id="29" name="Text 27"/>
+          <p:cNvSpPr/>
+          <p:nvPr/>
+        </p:nvSpPr>
+        <p:spPr>
+          <a:xfrm>
+            <a:off x="548640" y="4087368"/>
+            <a:ext cx="1325880" cy="603504"/>
+          </a:xfrm>
+          <a:prstGeom prst="rect">
+            <a:avLst/>
+          </a:prstGeom>
+          <a:solidFill>
+            <a:srgbClr val="FFFAF1"/>
+          </a:solidFill>
+          <a:ln w="8890">
+            <a:solidFill>
+              <a:srgbClr val="D8CBB8"/>
+            </a:solidFill>
+          </a:ln>
+        </p:spPr>
+        <p:txBody>
+          <a:bodyPr wrap="square" lIns="381" tIns="381" rIns="381" bIns="381" rtlCol="0" anchor="ctr"/>
+          <a:lstStyle/>
+          <a:p>
+            <a:pPr indent="0" marL="0">
+              <a:buNone/>
+            </a:pPr>
+            <a:r>
+              <a:rPr lang="en-US" sz="870" b="1" dirty="0">
+                <a:solidFill>
+                  <a:srgbClr val="6B6375"/>
+                </a:solidFill>
+                <a:latin typeface="Calibri" pitchFamily="34" charset="0"/>
+                <a:ea typeface="Calibri" pitchFamily="34" charset="-122"/>
+                <a:cs typeface="Calibri" pitchFamily="34" charset="-120"/>
+              </a:rPr>
+              <a:t>知识</a:t>
+            </a:r>
+            <a:endParaRPr lang="en-US" sz="870" dirty="0"/>
+          </a:p>
+        </p:txBody>
+      </p:sp>
+      <p:sp>
+        <p:nvSpPr>
+          <p:cNvPr id="30" name="Text 28"/>
+          <p:cNvSpPr/>
+          <p:nvPr/>
+        </p:nvSpPr>
+        <p:spPr>
+          <a:xfrm>
+            <a:off x="1874520" y="4087368"/>
+            <a:ext cx="2423160" cy="603504"/>
+          </a:xfrm>
+          <a:prstGeom prst="rect">
+            <a:avLst/>
+          </a:prstGeom>
+          <a:solidFill>
+            <a:srgbClr val="FFF4D6"/>
+          </a:solidFill>
+          <a:ln w="8890">
+            <a:solidFill>
+              <a:srgbClr val="D8CBB8"/>
+            </a:solidFill>
+          </a:ln>
+        </p:spPr>
+        <p:txBody>
+          <a:bodyPr wrap="square" lIns="381" tIns="381" rIns="381" bIns="381" rtlCol="0" anchor="ctr"/>
+          <a:lstStyle/>
+          <a:p>
+            <a:pPr indent="0" marL="0">
+              <a:buNone/>
+            </a:pPr>
+            <a:r>
+              <a:rPr lang="en-US" sz="870" b="1" dirty="0">
+                <a:solidFill>
+                  <a:srgbClr val="14131A"/>
+                </a:solidFill>
+                <a:latin typeface="Calibri" pitchFamily="34" charset="0"/>
+                <a:ea typeface="Calibri" pitchFamily="34" charset="-122"/>
+                <a:cs typeface="Calibri" pitchFamily="34" charset="-120"/>
+              </a:rPr>
+              <a:t>4 层作用域</a:t>
+            </a:r>
+            <a:endParaRPr lang="en-US" sz="870" dirty="0"/>
+          </a:p>
+        </p:txBody>
+      </p:sp>
+      <p:sp>
+        <p:nvSpPr>
+          <p:cNvPr id="31" name="Text 29"/>
+          <p:cNvSpPr/>
+          <p:nvPr/>
+        </p:nvSpPr>
+        <p:spPr>
+          <a:xfrm>
+            <a:off x="4297680" y="4087368"/>
+            <a:ext cx="2103120" cy="603504"/>
+          </a:xfrm>
+          <a:prstGeom prst="rect">
+            <a:avLst/>
+          </a:prstGeom>
+          <a:solidFill>
+            <a:srgbClr val="FFFAF1"/>
+          </a:solidFill>
+          <a:ln w="8890">
+            <a:solidFill>
+              <a:srgbClr val="D8CBB8"/>
+            </a:solidFill>
+          </a:ln>
+        </p:spPr>
+        <p:txBody>
+          <a:bodyPr wrap="square" lIns="381" tIns="381" rIns="381" bIns="381" rtlCol="0" anchor="ctr"/>
+          <a:lstStyle/>
+          <a:p>
+            <a:pPr indent="0" marL="0">
+              <a:buNone/>
+            </a:pPr>
+            <a:r>
+              <a:rPr lang="en-US" sz="870" dirty="0">
+                <a:solidFill>
+                  <a:srgbClr val="6B6375"/>
+                </a:solidFill>
+                <a:latin typeface="Calibri" pitchFamily="34" charset="0"/>
+                <a:ea typeface="Calibri" pitchFamily="34" charset="-122"/>
+                <a:cs typeface="Calibri" pitchFamily="34" charset="-120"/>
+              </a:rPr>
+              <a:t>频道历史</a:t>
+            </a:r>
+            <a:endParaRPr lang="en-US" sz="870" dirty="0"/>
+          </a:p>
+        </p:txBody>
+      </p:sp>
+      <p:sp>
+        <p:nvSpPr>
+          <p:cNvPr id="32" name="Text 30"/>
+          <p:cNvSpPr/>
+          <p:nvPr/>
+        </p:nvSpPr>
+        <p:spPr>
+          <a:xfrm>
+            <a:off x="6400800" y="4087368"/>
+            <a:ext cx="1874520" cy="603504"/>
+          </a:xfrm>
+          <a:prstGeom prst="rect">
+            <a:avLst/>
+          </a:prstGeom>
+          <a:solidFill>
+            <a:srgbClr val="FFFAF1"/>
+          </a:solidFill>
+          <a:ln w="8890">
+            <a:solidFill>
+              <a:srgbClr val="D8CBB8"/>
+            </a:solidFill>
+          </a:ln>
+        </p:spPr>
+        <p:txBody>
+          <a:bodyPr wrap="square" lIns="381" tIns="381" rIns="381" bIns="381" rtlCol="0" anchor="ctr"/>
+          <a:lstStyle/>
+          <a:p>
+            <a:pPr indent="0" marL="0">
+              <a:buNone/>
+            </a:pPr>
+            <a:r>
+              <a:rPr lang="en-US" sz="870" dirty="0">
+                <a:solidFill>
+                  <a:srgbClr val="6B6375"/>
+                </a:solidFill>
+                <a:latin typeface="Calibri" pitchFamily="34" charset="0"/>
+                <a:ea typeface="Calibri" pitchFamily="34" charset="-122"/>
+                <a:cs typeface="Calibri" pitchFamily="34" charset="-120"/>
+              </a:rPr>
+              <a:t>共享会话</a:t>
+            </a:r>
+            <a:endParaRPr lang="en-US" sz="870" dirty="0"/>
+          </a:p>
+        </p:txBody>
+      </p:sp>
+      <p:sp>
+        <p:nvSpPr>
+          <p:cNvPr id="33" name="Text 31"/>
+          <p:cNvSpPr/>
+          <p:nvPr/>
+        </p:nvSpPr>
+        <p:spPr>
+          <a:xfrm>
+            <a:off x="8275320" y="4087368"/>
+            <a:ext cx="1920240" cy="603504"/>
+          </a:xfrm>
+          <a:prstGeom prst="rect">
+            <a:avLst/>
+          </a:prstGeom>
+          <a:solidFill>
+            <a:srgbClr val="FFFAF1"/>
+          </a:solidFill>
+          <a:ln w="8890">
+            <a:solidFill>
+              <a:srgbClr val="D8CBB8"/>
+            </a:solidFill>
+          </a:ln>
+        </p:spPr>
+        <p:txBody>
+          <a:bodyPr wrap="square" lIns="381" tIns="381" rIns="381" bIns="381" rtlCol="0" anchor="ctr"/>
+          <a:lstStyle/>
+          <a:p>
+            <a:pPr indent="0" marL="0">
+              <a:buNone/>
+            </a:pPr>
+            <a:r>
+              <a:rPr lang="en-US" sz="870" dirty="0">
+                <a:solidFill>
+                  <a:srgbClr val="6B6375"/>
+                </a:solidFill>
+                <a:latin typeface="Calibri" pitchFamily="34" charset="0"/>
+                <a:ea typeface="Calibri" pitchFamily="34" charset="-122"/>
+                <a:cs typeface="Calibri" pitchFamily="34" charset="-120"/>
+              </a:rPr>
+              <a:t>共享消息池</a:t>
+            </a:r>
+            <a:endParaRPr lang="en-US" sz="870" dirty="0"/>
+          </a:p>
+        </p:txBody>
+      </p:sp>
+      <p:sp>
+        <p:nvSpPr>
+          <p:cNvPr id="34" name="Text 32"/>
+          <p:cNvSpPr/>
+          <p:nvPr/>
+        </p:nvSpPr>
+        <p:spPr>
+          <a:xfrm>
+            <a:off x="10195560" y="4087368"/>
+            <a:ext cx="2377440" cy="603504"/>
+          </a:xfrm>
+          <a:prstGeom prst="rect">
+            <a:avLst/>
+          </a:prstGeom>
+          <a:solidFill>
+            <a:srgbClr val="FFFAF1"/>
+          </a:solidFill>
+          <a:ln w="8890">
+            <a:solidFill>
+              <a:srgbClr val="D8CBB8"/>
+            </a:solidFill>
+          </a:ln>
+        </p:spPr>
+        <p:txBody>
+          <a:bodyPr wrap="square" lIns="381" tIns="381" rIns="381" bIns="381" rtlCol="0" anchor="ctr"/>
+          <a:lstStyle/>
+          <a:p>
+            <a:pPr indent="0" marL="0">
+              <a:buNone/>
+            </a:pPr>
+            <a:r>
+              <a:rPr lang="en-US" sz="870" dirty="0">
+                <a:solidFill>
+                  <a:srgbClr val="6B6375"/>
+                </a:solidFill>
+                <a:latin typeface="Calibri" pitchFamily="34" charset="0"/>
+                <a:ea typeface="Calibri" pitchFamily="34" charset="-122"/>
+                <a:cs typeface="Calibri" pitchFamily="34" charset="-120"/>
+              </a:rPr>
+              <a:t>房间记忆</a:t>
+            </a:r>
+            <a:endParaRPr lang="en-US" sz="870" dirty="0"/>
+          </a:p>
+        </p:txBody>
+      </p:sp>
+      <p:sp>
+        <p:nvSpPr>
+          <p:cNvPr id="35" name="Text 33"/>
+          <p:cNvSpPr/>
+          <p:nvPr/>
+        </p:nvSpPr>
+        <p:spPr>
+          <a:xfrm>
+            <a:off x="548640" y="4727448"/>
+            <a:ext cx="1325880" cy="603504"/>
+          </a:xfrm>
+          <a:prstGeom prst="rect">
+            <a:avLst/>
+          </a:prstGeom>
+          <a:solidFill>
+            <a:srgbClr val="FBF5EA"/>
+          </a:solidFill>
+          <a:ln w="8890">
+            <a:solidFill>
+              <a:srgbClr val="D8CBB8"/>
+            </a:solidFill>
+          </a:ln>
+        </p:spPr>
+        <p:txBody>
+          <a:bodyPr wrap="square" lIns="381" tIns="381" rIns="381" bIns="381" rtlCol="0" anchor="ctr"/>
+          <a:lstStyle/>
+          <a:p>
+            <a:pPr indent="0" marL="0">
+              <a:buNone/>
+            </a:pPr>
+            <a:r>
+              <a:rPr lang="en-US" sz="870" b="1" dirty="0">
+                <a:solidFill>
+                  <a:srgbClr val="6B6375"/>
+                </a:solidFill>
+                <a:latin typeface="Calibri" pitchFamily="34" charset="0"/>
+                <a:ea typeface="Calibri" pitchFamily="34" charset="-122"/>
+                <a:cs typeface="Calibri" pitchFamily="34" charset="-120"/>
+              </a:rPr>
+              <a:t>治理</a:t>
+            </a:r>
+            <a:endParaRPr lang="en-US" sz="870" dirty="0"/>
+          </a:p>
+        </p:txBody>
+      </p:sp>
+      <p:sp>
+        <p:nvSpPr>
+          <p:cNvPr id="36" name="Text 34"/>
+          <p:cNvSpPr/>
+          <p:nvPr/>
+        </p:nvSpPr>
+        <p:spPr>
+          <a:xfrm>
+            <a:off x="1874520" y="4727448"/>
+            <a:ext cx="2423160" cy="603504"/>
+          </a:xfrm>
+          <a:prstGeom prst="rect">
+            <a:avLst/>
+          </a:prstGeom>
+          <a:solidFill>
+            <a:srgbClr val="FFF4D6"/>
+          </a:solidFill>
+          <a:ln w="8890">
+            <a:solidFill>
+              <a:srgbClr val="D8CBB8"/>
+            </a:solidFill>
+          </a:ln>
+        </p:spPr>
+        <p:txBody>
+          <a:bodyPr wrap="square" lIns="381" tIns="381" rIns="381" bIns="381" rtlCol="0" anchor="ctr"/>
+          <a:lstStyle/>
+          <a:p>
+            <a:pPr indent="0" marL="0">
+              <a:buNone/>
+            </a:pPr>
+            <a:r>
+              <a:rPr lang="en-US" sz="870" b="1" dirty="0">
+                <a:solidFill>
+                  <a:srgbClr val="14131A"/>
+                </a:solidFill>
+                <a:latin typeface="Calibri" pitchFamily="34" charset="0"/>
+                <a:ea typeface="Calibri" pitchFamily="34" charset="-122"/>
+                <a:cs typeface="Calibri" pitchFamily="34" charset="-120"/>
+              </a:rPr>
+              <a:t>lease + 审计 + 证据 HITL</a:t>
+            </a:r>
+            <a:endParaRPr lang="en-US" sz="870" dirty="0"/>
+          </a:p>
+        </p:txBody>
+      </p:sp>
+      <p:sp>
+        <p:nvSpPr>
+          <p:cNvPr id="37" name="Text 35"/>
+          <p:cNvSpPr/>
+          <p:nvPr/>
+        </p:nvSpPr>
+        <p:spPr>
+          <a:xfrm>
+            <a:off x="4297680" y="4727448"/>
+            <a:ext cx="2103120" cy="603504"/>
+          </a:xfrm>
+          <a:prstGeom prst="rect">
+            <a:avLst/>
+          </a:prstGeom>
+          <a:solidFill>
+            <a:srgbClr val="FBF5EA"/>
+          </a:solidFill>
+          <a:ln w="8890">
+            <a:solidFill>
+              <a:srgbClr val="D8CBB8"/>
+            </a:solidFill>
+          </a:ln>
+        </p:spPr>
+        <p:txBody>
+          <a:bodyPr wrap="square" lIns="381" tIns="381" rIns="381" bIns="381" rtlCol="0" anchor="ctr"/>
+          <a:lstStyle/>
+          <a:p>
+            <a:pPr indent="0" marL="0">
+              <a:buNone/>
+            </a:pPr>
+            <a:r>
+              <a:rPr lang="en-US" sz="870" dirty="0">
+                <a:solidFill>
+                  <a:srgbClr val="6B6375"/>
+                </a:solidFill>
+                <a:latin typeface="Calibri" pitchFamily="34" charset="0"/>
+                <a:ea typeface="Calibri" pitchFamily="34" charset="-122"/>
+                <a:cs typeface="Calibri" pitchFamily="34" charset="-120"/>
+              </a:rPr>
+              <a:t>较弱</a:t>
+            </a:r>
+            <a:endParaRPr lang="en-US" sz="870" dirty="0"/>
+          </a:p>
+        </p:txBody>
+      </p:sp>
+      <p:sp>
+        <p:nvSpPr>
+          <p:cNvPr id="38" name="Text 36"/>
+          <p:cNvSpPr/>
+          <p:nvPr/>
+        </p:nvSpPr>
+        <p:spPr>
+          <a:xfrm>
+            <a:off x="6400800" y="4727448"/>
+            <a:ext cx="1874520" cy="603504"/>
+          </a:xfrm>
+          <a:prstGeom prst="rect">
+            <a:avLst/>
+          </a:prstGeom>
+          <a:solidFill>
+            <a:srgbClr val="FBF5EA"/>
+          </a:solidFill>
+          <a:ln w="8890">
+            <a:solidFill>
+              <a:srgbClr val="D8CBB8"/>
+            </a:solidFill>
+          </a:ln>
+        </p:spPr>
+        <p:txBody>
+          <a:bodyPr wrap="square" lIns="381" tIns="381" rIns="381" bIns="381" rtlCol="0" anchor="ctr"/>
+          <a:lstStyle/>
+          <a:p>
+            <a:pPr indent="0" marL="0">
+              <a:buNone/>
+            </a:pPr>
+            <a:r>
+              <a:rPr lang="en-US" sz="870" dirty="0">
+                <a:solidFill>
+                  <a:srgbClr val="6B6375"/>
+                </a:solidFill>
+                <a:latin typeface="Calibri" pitchFamily="34" charset="0"/>
+                <a:ea typeface="Calibri" pitchFamily="34" charset="-122"/>
+                <a:cs typeface="Calibri" pitchFamily="34" charset="-120"/>
+              </a:rPr>
+              <a:t>较弱</a:t>
+            </a:r>
+            <a:endParaRPr lang="en-US" sz="870" dirty="0"/>
+          </a:p>
+        </p:txBody>
+      </p:sp>
+      <p:sp>
+        <p:nvSpPr>
+          <p:cNvPr id="39" name="Text 37"/>
+          <p:cNvSpPr/>
+          <p:nvPr/>
+        </p:nvSpPr>
+        <p:spPr>
+          <a:xfrm>
+            <a:off x="8275320" y="4727448"/>
+            <a:ext cx="1920240" cy="603504"/>
+          </a:xfrm>
+          <a:prstGeom prst="rect">
+            <a:avLst/>
+          </a:prstGeom>
+          <a:solidFill>
+            <a:srgbClr val="FBF5EA"/>
+          </a:solidFill>
+          <a:ln w="8890">
+            <a:solidFill>
+              <a:srgbClr val="D8CBB8"/>
+            </a:solidFill>
+          </a:ln>
+        </p:spPr>
+        <p:txBody>
+          <a:bodyPr wrap="square" lIns="381" tIns="381" rIns="381" bIns="381" rtlCol="0" anchor="ctr"/>
+          <a:lstStyle/>
+          <a:p>
+            <a:pPr indent="0" marL="0">
+              <a:buNone/>
+            </a:pPr>
+            <a:r>
+              <a:rPr lang="en-US" sz="870" dirty="0">
+                <a:solidFill>
+                  <a:srgbClr val="6B6375"/>
+                </a:solidFill>
+                <a:latin typeface="Calibri" pitchFamily="34" charset="0"/>
+                <a:ea typeface="Calibri" pitchFamily="34" charset="-122"/>
+                <a:cs typeface="Calibri" pitchFamily="34" charset="-120"/>
+              </a:rPr>
+              <a:t>较弱</a:t>
+            </a:r>
+            <a:endParaRPr lang="en-US" sz="870" dirty="0"/>
+          </a:p>
+        </p:txBody>
+      </p:sp>
+      <p:sp>
+        <p:nvSpPr>
+          <p:cNvPr id="40" name="Text 38"/>
+          <p:cNvSpPr/>
+          <p:nvPr/>
+        </p:nvSpPr>
+        <p:spPr>
+          <a:xfrm>
+            <a:off x="10195560" y="4727448"/>
+            <a:ext cx="2377440" cy="603504"/>
+          </a:xfrm>
+          <a:prstGeom prst="rect">
+            <a:avLst/>
+          </a:prstGeom>
+          <a:solidFill>
+            <a:srgbClr val="FBF5EA"/>
+          </a:solidFill>
+          <a:ln w="8890">
+            <a:solidFill>
+              <a:srgbClr val="D8CBB8"/>
+            </a:solidFill>
+          </a:ln>
+        </p:spPr>
+        <p:txBody>
+          <a:bodyPr wrap="square" lIns="381" tIns="381" rIns="381" bIns="381" rtlCol="0" anchor="ctr"/>
+          <a:lstStyle/>
+          <a:p>
+            <a:pPr indent="0" marL="0">
+              <a:buNone/>
+            </a:pPr>
+            <a:r>
+              <a:rPr lang="en-US" sz="870" dirty="0">
+                <a:solidFill>
+                  <a:srgbClr val="6B6375"/>
+                </a:solidFill>
+                <a:latin typeface="Calibri" pitchFamily="34" charset="0"/>
+                <a:ea typeface="Calibri" pitchFamily="34" charset="-122"/>
+                <a:cs typeface="Calibri" pitchFamily="34" charset="-120"/>
+              </a:rPr>
+              <a:t>组织/RBAC 较强</a:t>
+            </a:r>
+            <a:endParaRPr lang="en-US" sz="870" dirty="0"/>
+          </a:p>
+        </p:txBody>
+      </p:sp>
+      <p:sp>
+        <p:nvSpPr>
+          <p:cNvPr id="41" name="Text 39"/>
+          <p:cNvSpPr/>
+          <p:nvPr/>
+        </p:nvSpPr>
+        <p:spPr>
+          <a:xfrm>
+            <a:off x="548640" y="5943600"/>
+            <a:ext cx="10972800" cy="228600"/>
+          </a:xfrm>
+          <a:prstGeom prst="rect">
+            <a:avLst/>
+          </a:prstGeom>
+          <a:noFill/>
+          <a:ln/>
+        </p:spPr>
+        <p:txBody>
+          <a:bodyPr wrap="square" lIns="0" tIns="0" rIns="0" bIns="0" rtlCol="0" anchor="ctr"/>
+          <a:lstStyle/>
+          <a:p>
+            <a:pPr indent="0" marL="0">
+              <a:buNone/>
+            </a:pPr>
+            <a:r>
+              <a:rPr lang="en-US" sz="820" dirty="0">
+                <a:solidFill>
+                  <a:srgbClr val="6B6375"/>
+                </a:solidFill>
+                <a:latin typeface="Calibri" pitchFamily="34" charset="0"/>
+                <a:ea typeface="Calibri" pitchFamily="34" charset="-122"/>
+                <a:cs typeface="Calibri" pitchFamily="34" charset="-120"/>
+              </a:rPr>
+              <a:t>来源：docs/v1.30-channel-knowledge.md §A.2–A.3；按交互、任务、编排、知识、治理分层对比。</a:t>
+            </a:r>
+            <a:endParaRPr lang="en-US" sz="820" dirty="0"/>
+          </a:p>
+        </p:txBody>
+      </p:sp>
+      <p:sp>
+        <p:nvSpPr>
+          <p:cNvPr id="42" name="Text 40"/>
+          <p:cNvSpPr/>
+          <p:nvPr/>
+        </p:nvSpPr>
+        <p:spPr>
+          <a:xfrm>
+            <a:off x="548640" y="6528816"/>
+            <a:ext cx="7315200" cy="182880"/>
+          </a:xfrm>
+          <a:prstGeom prst="rect">
+            <a:avLst/>
+          </a:prstGeom>
+          <a:noFill/>
+          <a:ln/>
+        </p:spPr>
+        <p:txBody>
+          <a:bodyPr wrap="square" lIns="0" tIns="0" rIns="0" bIns="0" rtlCol="0" anchor="ctr"/>
+          <a:lstStyle/>
+          <a:p>
+            <a:pPr indent="0" marL="0">
+              <a:buNone/>
+            </a:pPr>
+            <a:r>
+              <a:rPr lang="en-US" sz="850" dirty="0">
+                <a:solidFill>
+                  <a:srgbClr val="6B6375"/>
+                </a:solidFill>
+                <a:latin typeface="Calibri" pitchFamily="34" charset="0"/>
+                <a:ea typeface="Calibri" pitchFamily="34" charset="-122"/>
+                <a:cs typeface="Calibri" pitchFamily="34" charset="-120"/>
+              </a:rPr>
+              <a:t>Anvil roadmap · v1.0 → v1.30.8</a:t>
+            </a:r>
+            <a:endParaRPr lang="en-US" sz="850" dirty="0"/>
+          </a:p>
+        </p:txBody>
+      </p:sp>
+      <p:sp>
+        <p:nvSpPr>
+          <p:cNvPr id="43" name="Text 41"/>
+          <p:cNvSpPr/>
+          <p:nvPr/>
+        </p:nvSpPr>
+        <p:spPr>
+          <a:xfrm>
+            <a:off x="11155680" y="6528816"/>
+            <a:ext cx="457200" cy="182880"/>
+          </a:xfrm>
+          <a:prstGeom prst="rect">
+            <a:avLst/>
+          </a:prstGeom>
+          <a:noFill/>
+          <a:ln/>
+        </p:spPr>
+        <p:txBody>
+          <a:bodyPr wrap="square" lIns="0" tIns="0" rIns="0" bIns="0" rtlCol="0" anchor="ctr"/>
+          <a:lstStyle/>
+          <a:p>
+            <a:pPr algn="r" indent="0" marL="0">
+              <a:buNone/>
+            </a:pPr>
+            <a:r>
+              <a:rPr lang="en-US" sz="850" dirty="0">
+                <a:solidFill>
+                  <a:srgbClr val="6B6375"/>
+                </a:solidFill>
+                <a:latin typeface="Calibri" pitchFamily="34" charset="0"/>
+                <a:ea typeface="Calibri" pitchFamily="34" charset="-122"/>
+                <a:cs typeface="Calibri" pitchFamily="34" charset="-120"/>
+              </a:rPr>
+              <a:t>16</a:t>
+            </a:r>
+            <a:endParaRPr lang="en-US" sz="850" dirty="0"/>
+          </a:p>
+        </p:txBody>
+      </p:sp>
+    </p:spTree>
+  </p:cSld>
+  <p:clrMapOvr>
+    <a:masterClrMapping/>
+  </p:clrMapOvr>
+</p:sld>
+</file>
+
+<file path=ppt/slides/slide17.xml><?xml version="1.0" encoding="utf-8"?>
+<p:sld xmlns:a="http://schemas.openxmlformats.org/drawingml/2006/main" xmlns:r="http://schemas.openxmlformats.org/officeDocument/2006/relationships" xmlns:p="http://schemas.openxmlformats.org/presentationml/2006/main">
+  <p:cSld name="Slide 17">
     <p:bg>
       <p:bgPr>
         <a:solidFill>
@@ -11388,7 +15553,7 @@
                 <a:ea typeface="Calibri" pitchFamily="34" charset="-122"/>
                 <a:cs typeface="Calibri" pitchFamily="34" charset="-120"/>
               </a:rPr>
-              <a:t>Anvil roadmap · v1.0 → v1.30.7</a:t>
+              <a:t>Anvil roadmap · v1.0 → v1.30.8</a:t>
             </a:r>
             <a:endParaRPr lang="en-US" sz="850" dirty="0"/>
           </a:p>
@@ -11427,7 +15592,7 @@
                 <a:ea typeface="Calibri" pitchFamily="34" charset="-122"/>
                 <a:cs typeface="Calibri" pitchFamily="34" charset="-120"/>
               </a:rPr>
-              <a:t>15</a:t>
+              <a:t>17</a:t>
             </a:r>
             <a:endParaRPr lang="en-US" sz="850" dirty="0"/>
           </a:p>
@@ -12788,7 +16953,7 @@
                 <a:ea typeface="Calibri" pitchFamily="34" charset="-122"/>
                 <a:cs typeface="Calibri" pitchFamily="34" charset="-120"/>
               </a:rPr>
-              <a:t>Anvil roadmap · v1.0 → v1.30.7</a:t>
+              <a:t>Anvil roadmap · v1.0 → v1.30.8</a:t>
             </a:r>
             <a:endParaRPr lang="en-US" sz="850" dirty="0"/>
           </a:p>
@@ -14431,7 +18596,7 @@
                 <a:ea typeface="Calibri" pitchFamily="34" charset="-122"/>
                 <a:cs typeface="Calibri" pitchFamily="34" charset="-120"/>
               </a:rPr>
-              <a:t>Anvil roadmap · v1.0 → v1.30.7</a:t>
+              <a:t>Anvil roadmap · v1.0 → v1.30.8</a:t>
             </a:r>
             <a:endParaRPr lang="en-US" sz="850" dirty="0"/>
           </a:p>
@@ -15918,7 +20083,7 @@
                 <a:ea typeface="Calibri" pitchFamily="34" charset="-122"/>
                 <a:cs typeface="Calibri" pitchFamily="34" charset="-120"/>
               </a:rPr>
-              <a:t>Anvil roadmap · v1.0 → v1.30.7</a:t>
+              <a:t>Anvil roadmap · v1.0 → v1.30.8</a:t>
             </a:r>
             <a:endParaRPr lang="en-US" sz="850" dirty="0"/>
           </a:p>
@@ -17350,7 +21515,7 @@
                 <a:ea typeface="Calibri" pitchFamily="34" charset="-122"/>
                 <a:cs typeface="Calibri" pitchFamily="34" charset="-120"/>
               </a:rPr>
-              <a:t>Anvil roadmap · v1.0 → v1.30.7</a:t>
+              <a:t>Anvil roadmap · v1.0 → v1.30.8</a:t>
             </a:r>
             <a:endParaRPr lang="en-US" sz="850" dirty="0"/>
           </a:p>
@@ -18837,7 +23002,7 @@
                 <a:ea typeface="Calibri" pitchFamily="34" charset="-122"/>
                 <a:cs typeface="Calibri" pitchFamily="34" charset="-120"/>
               </a:rPr>
-              <a:t>Anvil roadmap · v1.0 → v1.30.7</a:t>
+              <a:t>Anvil roadmap · v1.0 → v1.30.8</a:t>
             </a:r>
             <a:endParaRPr lang="en-US" sz="850" dirty="0"/>
           </a:p>
@@ -20324,7 +24489,7 @@
                 <a:ea typeface="Calibri" pitchFamily="34" charset="-122"/>
                 <a:cs typeface="Calibri" pitchFamily="34" charset="-120"/>
               </a:rPr>
-              <a:t>Anvil roadmap · v1.0 → v1.30.7</a:t>
+              <a:t>Anvil roadmap · v1.0 → v1.30.8</a:t>
             </a:r>
             <a:endParaRPr lang="en-US" sz="850" dirty="0"/>
           </a:p>
@@ -21889,7 +26054,7 @@
                 <a:ea typeface="Calibri" pitchFamily="34" charset="-122"/>
                 <a:cs typeface="Calibri" pitchFamily="34" charset="-120"/>
               </a:rPr>
-              <a:t>Anvil roadmap · v1.0 → v1.30.7</a:t>
+              <a:t>Anvil roadmap · v1.0 → v1.30.8</a:t>
             </a:r>
             <a:endParaRPr lang="en-US" sz="850" dirty="0"/>
           </a:p>
@@ -23387,7 +27552,7 @@
                 <a:ea typeface="Calibri" pitchFamily="34" charset="-122"/>
                 <a:cs typeface="Calibri" pitchFamily="34" charset="-120"/>
               </a:rPr>
-              <a:t>Anvil roadmap · v1.0 → v1.30.7</a:t>
+              <a:t>Anvil roadmap · v1.0 → v1.30.8</a:t>
             </a:r>
             <a:endParaRPr lang="en-US" sz="850" dirty="0"/>
           </a:p>
